--- a/deep_learning/3_RNN_NLP/2_NLP_2_Detailed/2_NLP_process.pptx
+++ b/deep_learning/3_RNN_NLP/2_NLP_2_Detailed/2_NLP_process.pptx
@@ -5,10 +5,10 @@
     <p:sldMasterId id="2147483648" r:id="rId1"/>
   </p:sldMasterIdLst>
   <p:notesMasterIdLst>
-    <p:notesMasterId r:id="rId46"/>
+    <p:notesMasterId r:id="rId47"/>
   </p:notesMasterIdLst>
   <p:handoutMasterIdLst>
-    <p:handoutMasterId r:id="rId47"/>
+    <p:handoutMasterId r:id="rId48"/>
   </p:handoutMasterIdLst>
   <p:sldIdLst>
     <p:sldId id="256" r:id="rId2"/>
@@ -40,21 +40,22 @@
     <p:sldId id="268" r:id="rId28"/>
     <p:sldId id="264" r:id="rId29"/>
     <p:sldId id="283" r:id="rId30"/>
-    <p:sldId id="284" r:id="rId31"/>
-    <p:sldId id="270" r:id="rId32"/>
-    <p:sldId id="279" r:id="rId33"/>
-    <p:sldId id="269" r:id="rId34"/>
-    <p:sldId id="271" r:id="rId35"/>
-    <p:sldId id="272" r:id="rId36"/>
-    <p:sldId id="301" r:id="rId37"/>
-    <p:sldId id="288" r:id="rId38"/>
-    <p:sldId id="273" r:id="rId39"/>
-    <p:sldId id="289" r:id="rId40"/>
-    <p:sldId id="274" r:id="rId41"/>
-    <p:sldId id="290" r:id="rId42"/>
-    <p:sldId id="277" r:id="rId43"/>
-    <p:sldId id="278" r:id="rId44"/>
-    <p:sldId id="275" r:id="rId45"/>
+    <p:sldId id="302" r:id="rId31"/>
+    <p:sldId id="284" r:id="rId32"/>
+    <p:sldId id="270" r:id="rId33"/>
+    <p:sldId id="279" r:id="rId34"/>
+    <p:sldId id="269" r:id="rId35"/>
+    <p:sldId id="271" r:id="rId36"/>
+    <p:sldId id="272" r:id="rId37"/>
+    <p:sldId id="301" r:id="rId38"/>
+    <p:sldId id="288" r:id="rId39"/>
+    <p:sldId id="273" r:id="rId40"/>
+    <p:sldId id="289" r:id="rId41"/>
+    <p:sldId id="274" r:id="rId42"/>
+    <p:sldId id="290" r:id="rId43"/>
+    <p:sldId id="277" r:id="rId44"/>
+    <p:sldId id="278" r:id="rId45"/>
+    <p:sldId id="275" r:id="rId46"/>
   </p:sldIdLst>
   <p:sldSz cx="12192000" cy="6858000"/>
   <p:notesSz cx="6858000" cy="9144000"/>
@@ -6964,7 +6965,7 @@
           <a:p>
             <a:fld id="{7BAEECA8-D063-486F-AE31-5020270C1449}" type="datetimeFigureOut">
               <a:rPr lang="en-US" smtClean="0"/>
-              <a:t>4/19/2026</a:t>
+              <a:t>4/26/2026</a:t>
             </a:fld>
             <a:endParaRPr lang="en-US"/>
           </a:p>
@@ -7141,7 +7142,7 @@
           <a:p>
             <a:fld id="{CB233BD1-3BA8-448D-9D08-7846095EA517}" type="datetimeFigureOut">
               <a:rPr lang="en-US" smtClean="0"/>
-              <a:t>4/19/2026</a:t>
+              <a:t>4/26/2026</a:t>
             </a:fld>
             <a:endParaRPr lang="en-US"/>
           </a:p>
@@ -7555,7 +7556,7 @@
           <a:p>
             <a:fld id="{6383FAE1-13DE-4511-8C1B-C8AFB720664C}" type="datetimeFigureOut">
               <a:rPr lang="en-US" smtClean="0"/>
-              <a:t>4/19/2026</a:t>
+              <a:t>4/26/2026</a:t>
             </a:fld>
             <a:endParaRPr lang="en-US"/>
           </a:p>
@@ -7753,7 +7754,7 @@
           <a:p>
             <a:fld id="{6383FAE1-13DE-4511-8C1B-C8AFB720664C}" type="datetimeFigureOut">
               <a:rPr lang="en-US" smtClean="0"/>
-              <a:t>4/19/2026</a:t>
+              <a:t>4/26/2026</a:t>
             </a:fld>
             <a:endParaRPr lang="en-US"/>
           </a:p>
@@ -7961,7 +7962,7 @@
           <a:p>
             <a:fld id="{6383FAE1-13DE-4511-8C1B-C8AFB720664C}" type="datetimeFigureOut">
               <a:rPr lang="en-US" smtClean="0"/>
-              <a:t>4/19/2026</a:t>
+              <a:t>4/26/2026</a:t>
             </a:fld>
             <a:endParaRPr lang="en-US"/>
           </a:p>
@@ -8159,7 +8160,7 @@
           <a:p>
             <a:fld id="{6383FAE1-13DE-4511-8C1B-C8AFB720664C}" type="datetimeFigureOut">
               <a:rPr lang="en-US" smtClean="0"/>
-              <a:t>4/19/2026</a:t>
+              <a:t>4/26/2026</a:t>
             </a:fld>
             <a:endParaRPr lang="en-US"/>
           </a:p>
@@ -8434,7 +8435,7 @@
           <a:p>
             <a:fld id="{6383FAE1-13DE-4511-8C1B-C8AFB720664C}" type="datetimeFigureOut">
               <a:rPr lang="en-US" smtClean="0"/>
-              <a:t>4/19/2026</a:t>
+              <a:t>4/26/2026</a:t>
             </a:fld>
             <a:endParaRPr lang="en-US"/>
           </a:p>
@@ -8699,7 +8700,7 @@
           <a:p>
             <a:fld id="{6383FAE1-13DE-4511-8C1B-C8AFB720664C}" type="datetimeFigureOut">
               <a:rPr lang="en-US" smtClean="0"/>
-              <a:t>4/19/2026</a:t>
+              <a:t>4/26/2026</a:t>
             </a:fld>
             <a:endParaRPr lang="en-US"/>
           </a:p>
@@ -9111,7 +9112,7 @@
           <a:p>
             <a:fld id="{6383FAE1-13DE-4511-8C1B-C8AFB720664C}" type="datetimeFigureOut">
               <a:rPr lang="en-US" smtClean="0"/>
-              <a:t>4/19/2026</a:t>
+              <a:t>4/26/2026</a:t>
             </a:fld>
             <a:endParaRPr lang="en-US"/>
           </a:p>
@@ -9252,7 +9253,7 @@
           <a:p>
             <a:fld id="{6383FAE1-13DE-4511-8C1B-C8AFB720664C}" type="datetimeFigureOut">
               <a:rPr lang="en-US" smtClean="0"/>
-              <a:t>4/19/2026</a:t>
+              <a:t>4/26/2026</a:t>
             </a:fld>
             <a:endParaRPr lang="en-US"/>
           </a:p>
@@ -9365,7 +9366,7 @@
           <a:p>
             <a:fld id="{6383FAE1-13DE-4511-8C1B-C8AFB720664C}" type="datetimeFigureOut">
               <a:rPr lang="en-US" smtClean="0"/>
-              <a:t>4/19/2026</a:t>
+              <a:t>4/26/2026</a:t>
             </a:fld>
             <a:endParaRPr lang="en-US"/>
           </a:p>
@@ -9676,7 +9677,7 @@
           <a:p>
             <a:fld id="{6383FAE1-13DE-4511-8C1B-C8AFB720664C}" type="datetimeFigureOut">
               <a:rPr lang="en-US" smtClean="0"/>
-              <a:t>4/19/2026</a:t>
+              <a:t>4/26/2026</a:t>
             </a:fld>
             <a:endParaRPr lang="en-US"/>
           </a:p>
@@ -9967,7 +9968,7 @@
           <a:p>
             <a:fld id="{6383FAE1-13DE-4511-8C1B-C8AFB720664C}" type="datetimeFigureOut">
               <a:rPr lang="en-US" smtClean="0"/>
-              <a:t>4/19/2026</a:t>
+              <a:t>4/26/2026</a:t>
             </a:fld>
             <a:endParaRPr lang="en-US"/>
           </a:p>
@@ -10211,7 +10212,7 @@
           <a:p>
             <a:fld id="{6383FAE1-13DE-4511-8C1B-C8AFB720664C}" type="datetimeFigureOut">
               <a:rPr lang="en-US" smtClean="0"/>
-              <a:t>4/19/2026</a:t>
+              <a:t>4/26/2026</a:t>
             </a:fld>
             <a:endParaRPr lang="en-US"/>
           </a:p>
@@ -22791,35 +22792,6 @@
           <a:chExt cx="0" cy="0"/>
         </a:xfrm>
       </p:grpSpPr>
-      <p:sp>
-        <p:nvSpPr>
-          <p:cNvPr id="2" name="Title 1"/>
-          <p:cNvSpPr>
-            <a:spLocks noGrp="1"/>
-          </p:cNvSpPr>
-          <p:nvPr>
-            <p:ph type="title"/>
-          </p:nvPr>
-        </p:nvSpPr>
-        <p:spPr>
-          <a:xfrm>
-            <a:off x="401971" y="188957"/>
-            <a:ext cx="6057552" cy="482162"/>
-          </a:xfrm>
-        </p:spPr>
-        <p:txBody>
-          <a:bodyPr>
-            <a:noAutofit/>
-          </a:bodyPr>
-          <a:lstStyle/>
-          <a:p>
-            <a:r>
-              <a:rPr lang="en-US" sz="2000" dirty="0"/>
-              <a:t>4.2) Normalization: Lemmatization(p1)</a:t>
-            </a:r>
-          </a:p>
-        </p:txBody>
-      </p:sp>
       <p:graphicFrame>
         <p:nvGraphicFramePr>
           <p:cNvPr id="4" name="Table 3"/>
@@ -24541,6 +24513,48 @@
           </a:p>
         </p:txBody>
       </p:sp>
+      <p:sp>
+        <p:nvSpPr>
+          <p:cNvPr id="5" name="TextBox 4">
+            <a:extLst>
+              <a:ext uri="{FF2B5EF4-FFF2-40B4-BE49-F238E27FC236}">
+                <a16:creationId xmlns:a16="http://schemas.microsoft.com/office/drawing/2014/main" id="{343D0638-E536-BFD5-94A4-899B71D036AB}"/>
+              </a:ext>
+            </a:extLst>
+          </p:cNvPr>
+          <p:cNvSpPr txBox="1"/>
+          <p:nvPr/>
+        </p:nvSpPr>
+        <p:spPr>
+          <a:xfrm>
+            <a:off x="315468" y="129228"/>
+            <a:ext cx="6190488" cy="461665"/>
+          </a:xfrm>
+          <a:prstGeom prst="rect">
+            <a:avLst/>
+          </a:prstGeom>
+          <a:noFill/>
+        </p:spPr>
+        <p:txBody>
+          <a:bodyPr wrap="square">
+            <a:spAutoFit/>
+          </a:bodyPr>
+          <a:lstStyle/>
+          <a:p>
+            <a:r>
+              <a:rPr lang="en-US" sz="2400" dirty="0">
+                <a:solidFill>
+                  <a:schemeClr val="accent6">
+                    <a:lumMod val="60000"/>
+                    <a:lumOff val="40000"/>
+                  </a:schemeClr>
+                </a:solidFill>
+              </a:rPr>
+              <a:t>4.2) Normalization: Lemmatization(p1)</a:t>
+            </a:r>
+          </a:p>
+        </p:txBody>
+      </p:sp>
     </p:spTree>
     <p:extLst>
       <p:ext uri="{BB962C8B-B14F-4D97-AF65-F5344CB8AC3E}">
@@ -24571,35 +24585,6 @@
           <a:chExt cx="0" cy="0"/>
         </a:xfrm>
       </p:grpSpPr>
-      <p:sp>
-        <p:nvSpPr>
-          <p:cNvPr id="2" name="Title 1"/>
-          <p:cNvSpPr>
-            <a:spLocks noGrp="1"/>
-          </p:cNvSpPr>
-          <p:nvPr>
-            <p:ph type="title"/>
-          </p:nvPr>
-        </p:nvSpPr>
-        <p:spPr>
-          <a:xfrm>
-            <a:off x="401972" y="230902"/>
-            <a:ext cx="4857926" cy="423439"/>
-          </a:xfrm>
-        </p:spPr>
-        <p:txBody>
-          <a:bodyPr>
-            <a:noAutofit/>
-          </a:bodyPr>
-          <a:lstStyle/>
-          <a:p>
-            <a:r>
-              <a:rPr lang="en-US" sz="2000" dirty="0"/>
-              <a:t>4.2) Normalization: Stemming(p2)</a:t>
-            </a:r>
-          </a:p>
-        </p:txBody>
-      </p:sp>
       <p:graphicFrame>
         <p:nvGraphicFramePr>
           <p:cNvPr id="5" name="Table 4"/>
@@ -25730,7 +25715,7 @@
         </p:nvSpPr>
         <p:spPr>
           <a:xfrm>
-            <a:off x="252984" y="535469"/>
+            <a:off x="179832" y="525227"/>
             <a:ext cx="11832336" cy="2677656"/>
           </a:xfrm>
           <a:prstGeom prst="rect">
@@ -25769,7 +25754,112 @@
                   </a:schemeClr>
                 </a:solidFill>
               </a:rPr>
-              <a:t>Chop off word endings to their root form. This Reduce dimensionality of the vocabulary. </a:t>
+              <a:t>Chop off word endings to their root form. </a:t>
+            </a:r>
+          </a:p>
+          <a:p>
+            <a:r>
+              <a:rPr lang="en-US" sz="2400" dirty="0">
+                <a:solidFill>
+                  <a:schemeClr val="accent6">
+                    <a:lumMod val="60000"/>
+                    <a:lumOff val="40000"/>
+                  </a:schemeClr>
+                </a:solidFill>
+              </a:rPr>
+              <a:t>E.g. (connect, connects, connected, connecting, connection, connections, connectivity, connective) -&gt; connect</a:t>
+            </a:r>
+          </a:p>
+          <a:p>
+            <a:r>
+              <a:rPr lang="en-US" sz="2400" dirty="0">
+                <a:solidFill>
+                  <a:schemeClr val="accent6">
+                    <a:lumMod val="60000"/>
+                    <a:lumOff val="40000"/>
+                  </a:schemeClr>
+                </a:solidFill>
+              </a:rPr>
+              <a:t>Unlike lemmatization, stemming is rule-based and typically faster but less accurate.</a:t>
+            </a:r>
+          </a:p>
+          <a:p>
+            <a:r>
+              <a:rPr lang="en-US" sz="2400" dirty="0">
+                <a:solidFill>
+                  <a:schemeClr val="accent6">
+                    <a:lumMod val="60000"/>
+                    <a:lumOff val="40000"/>
+                  </a:schemeClr>
+                </a:solidFill>
+              </a:rPr>
+              <a:t>The stemmed output isn't always a valid English word (</a:t>
+            </a:r>
+            <a:r>
+              <a:rPr lang="en-US" sz="2400" dirty="0" err="1">
+                <a:solidFill>
+                  <a:schemeClr val="accent6">
+                    <a:lumMod val="60000"/>
+                    <a:lumOff val="40000"/>
+                  </a:schemeClr>
+                </a:solidFill>
+              </a:rPr>
+              <a:t>happili</a:t>
+            </a:r>
+            <a:r>
+              <a:rPr lang="en-US" sz="2400" dirty="0">
+                <a:solidFill>
+                  <a:schemeClr val="accent6">
+                    <a:lumMod val="60000"/>
+                    <a:lumOff val="40000"/>
+                  </a:schemeClr>
+                </a:solidFill>
+              </a:rPr>
+              <a:t>, </a:t>
+            </a:r>
+            <a:r>
+              <a:rPr lang="en-US" sz="2400" dirty="0" err="1">
+                <a:solidFill>
+                  <a:schemeClr val="accent6">
+                    <a:lumMod val="60000"/>
+                    <a:lumOff val="40000"/>
+                  </a:schemeClr>
+                </a:solidFill>
+              </a:rPr>
+              <a:t>studi</a:t>
+            </a:r>
+            <a:r>
+              <a:rPr lang="en-US" sz="2400" dirty="0">
+                <a:solidFill>
+                  <a:schemeClr val="accent6">
+                    <a:lumMod val="60000"/>
+                    <a:lumOff val="40000"/>
+                  </a:schemeClr>
+                </a:solidFill>
+              </a:rPr>
+              <a:t>, </a:t>
+            </a:r>
+            <a:r>
+              <a:rPr lang="en-US" sz="2400" dirty="0" err="1">
+                <a:solidFill>
+                  <a:schemeClr val="accent6">
+                    <a:lumMod val="60000"/>
+                    <a:lumOff val="40000"/>
+                  </a:schemeClr>
+                </a:solidFill>
+              </a:rPr>
+              <a:t>relat</a:t>
+            </a:r>
+            <a:r>
+              <a:rPr lang="en-US" sz="2400" dirty="0">
+                <a:solidFill>
+                  <a:schemeClr val="accent6">
+                    <a:lumMod val="60000"/>
+                    <a:lumOff val="40000"/>
+                  </a:schemeClr>
+                </a:solidFill>
+              </a:rPr>
+              <a:t>).</a:t>
             </a:r>
           </a:p>
           <a:p>
@@ -25785,10 +25875,19 @@
                   </a:schemeClr>
                 </a:solidFill>
               </a:rPr>
-              <a:t>E.g. (connect, connects, connected, connecting, connection, connections, connectivity, connective) -&gt; connect</a:t>
-            </a:r>
-          </a:p>
-          <a:p>
+              <a:t>"Passengers loved the amazing services" -&gt; "</a:t>
+            </a:r>
+            <a:r>
+              <a:rPr lang="en-US" sz="2400" dirty="0" err="1">
+                <a:solidFill>
+                  <a:schemeClr val="accent6">
+                    <a:lumMod val="60000"/>
+                    <a:lumOff val="40000"/>
+                  </a:schemeClr>
+                </a:solidFill>
+              </a:rPr>
+              <a:t>passeng</a:t>
+            </a:r>
             <a:r>
               <a:rPr lang="en-US" sz="2400" dirty="0">
                 <a:solidFill>
@@ -25798,10 +25897,19 @@
                   </a:schemeClr>
                 </a:solidFill>
               </a:rPr>
-              <a:t>Unlike lemmatization, stemming is rule-based and typically faster but less accurate.</a:t>
-            </a:r>
-          </a:p>
-          <a:p>
+              <a:t> love the </a:t>
+            </a:r>
+            <a:r>
+              <a:rPr lang="en-US" sz="2400" dirty="0" err="1">
+                <a:solidFill>
+                  <a:schemeClr val="accent6">
+                    <a:lumMod val="60000"/>
+                    <a:lumOff val="40000"/>
+                  </a:schemeClr>
+                </a:solidFill>
+              </a:rPr>
+              <a:t>amaz</a:t>
+            </a:r>
             <a:r>
               <a:rPr lang="en-US" sz="2400" dirty="0">
                 <a:solidFill>
@@ -25811,7 +25919,7 @@
                   </a:schemeClr>
                 </a:solidFill>
               </a:rPr>
-              <a:t>The stemmed output isn't always a valid English word (</a:t>
+              <a:t> </a:t>
             </a:r>
             <a:r>
               <a:rPr lang="en-US" sz="2400" dirty="0" err="1">
@@ -25822,7 +25930,7 @@
                   </a:schemeClr>
                 </a:solidFill>
               </a:rPr>
-              <a:t>happili</a:t>
+              <a:t>servic</a:t>
             </a:r>
             <a:r>
               <a:rPr lang="en-US" sz="2400" dirty="0">
@@ -25833,19 +25941,39 @@
                   </a:schemeClr>
                 </a:solidFill>
               </a:rPr>
-              <a:t>, </a:t>
-            </a:r>
-            <a:r>
-              <a:rPr lang="en-US" sz="2400" dirty="0" err="1">
-                <a:solidFill>
-                  <a:schemeClr val="accent6">
-                    <a:lumMod val="60000"/>
-                    <a:lumOff val="40000"/>
-                  </a:schemeClr>
-                </a:solidFill>
-              </a:rPr>
-              <a:t>studi</a:t>
-            </a:r>
+              <a:t>"</a:t>
+            </a:r>
+          </a:p>
+        </p:txBody>
+      </p:sp>
+      <p:sp>
+        <p:nvSpPr>
+          <p:cNvPr id="8" name="TextBox 7">
+            <a:extLst>
+              <a:ext uri="{FF2B5EF4-FFF2-40B4-BE49-F238E27FC236}">
+                <a16:creationId xmlns:a16="http://schemas.microsoft.com/office/drawing/2014/main" id="{3B1B64BC-4719-0709-0FE7-10E8F0B11A85}"/>
+              </a:ext>
+            </a:extLst>
+          </p:cNvPr>
+          <p:cNvSpPr txBox="1"/>
+          <p:nvPr/>
+        </p:nvSpPr>
+        <p:spPr>
+          <a:xfrm>
+            <a:off x="333756" y="63562"/>
+            <a:ext cx="6190488" cy="461665"/>
+          </a:xfrm>
+          <a:prstGeom prst="rect">
+            <a:avLst/>
+          </a:prstGeom>
+          <a:noFill/>
+        </p:spPr>
+        <p:txBody>
+          <a:bodyPr wrap="square">
+            <a:spAutoFit/>
+          </a:bodyPr>
+          <a:lstStyle/>
+          <a:p>
             <a:r>
               <a:rPr lang="en-US" sz="2400" dirty="0">
                 <a:solidFill>
@@ -25855,111 +25983,7 @@
                   </a:schemeClr>
                 </a:solidFill>
               </a:rPr>
-              <a:t>, </a:t>
-            </a:r>
-            <a:r>
-              <a:rPr lang="en-US" sz="2400" dirty="0" err="1">
-                <a:solidFill>
-                  <a:schemeClr val="accent6">
-                    <a:lumMod val="60000"/>
-                    <a:lumOff val="40000"/>
-                  </a:schemeClr>
-                </a:solidFill>
-              </a:rPr>
-              <a:t>relat</a:t>
-            </a:r>
-            <a:r>
-              <a:rPr lang="en-US" sz="2400" dirty="0">
-                <a:solidFill>
-                  <a:schemeClr val="accent6">
-                    <a:lumMod val="60000"/>
-                    <a:lumOff val="40000"/>
-                  </a:schemeClr>
-                </a:solidFill>
-              </a:rPr>
-              <a:t>).</a:t>
-            </a:r>
-          </a:p>
-          <a:p>
-            <a:pPr marL="0" indent="0">
-              <a:buNone/>
-            </a:pPr>
-            <a:r>
-              <a:rPr lang="en-US" sz="2400" dirty="0">
-                <a:solidFill>
-                  <a:schemeClr val="accent6">
-                    <a:lumMod val="60000"/>
-                    <a:lumOff val="40000"/>
-                  </a:schemeClr>
-                </a:solidFill>
-              </a:rPr>
-              <a:t>"Passengers loved the amazing services" -&gt; "</a:t>
-            </a:r>
-            <a:r>
-              <a:rPr lang="en-US" sz="2400" dirty="0" err="1">
-                <a:solidFill>
-                  <a:schemeClr val="accent6">
-                    <a:lumMod val="60000"/>
-                    <a:lumOff val="40000"/>
-                  </a:schemeClr>
-                </a:solidFill>
-              </a:rPr>
-              <a:t>passeng</a:t>
-            </a:r>
-            <a:r>
-              <a:rPr lang="en-US" sz="2400" dirty="0">
-                <a:solidFill>
-                  <a:schemeClr val="accent6">
-                    <a:lumMod val="60000"/>
-                    <a:lumOff val="40000"/>
-                  </a:schemeClr>
-                </a:solidFill>
-              </a:rPr>
-              <a:t> love the </a:t>
-            </a:r>
-            <a:r>
-              <a:rPr lang="en-US" sz="2400" dirty="0" err="1">
-                <a:solidFill>
-                  <a:schemeClr val="accent6">
-                    <a:lumMod val="60000"/>
-                    <a:lumOff val="40000"/>
-                  </a:schemeClr>
-                </a:solidFill>
-              </a:rPr>
-              <a:t>amaz</a:t>
-            </a:r>
-            <a:r>
-              <a:rPr lang="en-US" sz="2400" dirty="0">
-                <a:solidFill>
-                  <a:schemeClr val="accent6">
-                    <a:lumMod val="60000"/>
-                    <a:lumOff val="40000"/>
-                  </a:schemeClr>
-                </a:solidFill>
-              </a:rPr>
-              <a:t> </a:t>
-            </a:r>
-            <a:r>
-              <a:rPr lang="en-US" sz="2400" dirty="0" err="1">
-                <a:solidFill>
-                  <a:schemeClr val="accent6">
-                    <a:lumMod val="60000"/>
-                    <a:lumOff val="40000"/>
-                  </a:schemeClr>
-                </a:solidFill>
-              </a:rPr>
-              <a:t>servic</a:t>
-            </a:r>
-            <a:r>
-              <a:rPr lang="en-US" sz="2400" dirty="0">
-                <a:solidFill>
-                  <a:schemeClr val="accent6">
-                    <a:lumMod val="60000"/>
-                    <a:lumOff val="40000"/>
-                  </a:schemeClr>
-                </a:solidFill>
-              </a:rPr>
-              <a:t>"</a:t>
+              <a:t>4.2) Normalization: Stemming(p2)</a:t>
             </a:r>
           </a:p>
         </p:txBody>
@@ -26472,6 +26496,227 @@
   <p:cSld>
     <p:spTree>
       <p:nvGrpSpPr>
+        <p:cNvPr id="1" name="">
+          <a:extLst>
+            <a:ext uri="{FF2B5EF4-FFF2-40B4-BE49-F238E27FC236}">
+              <a16:creationId xmlns:a16="http://schemas.microsoft.com/office/drawing/2014/main" id="{FDA9E050-2D0D-215C-3E86-78258727558F}"/>
+            </a:ext>
+          </a:extLst>
+        </p:cNvPr>
+        <p:cNvGrpSpPr/>
+        <p:nvPr/>
+      </p:nvGrpSpPr>
+      <p:grpSpPr>
+        <a:xfrm>
+          <a:off x="0" y="0"/>
+          <a:ext cx="0" cy="0"/>
+          <a:chOff x="0" y="0"/>
+          <a:chExt cx="0" cy="0"/>
+        </a:xfrm>
+      </p:grpSpPr>
+      <p:sp>
+        <p:nvSpPr>
+          <p:cNvPr id="6" name="TextBox 5">
+            <a:extLst>
+              <a:ext uri="{FF2B5EF4-FFF2-40B4-BE49-F238E27FC236}">
+                <a16:creationId xmlns:a16="http://schemas.microsoft.com/office/drawing/2014/main" id="{D4494A25-A02C-4793-70A7-0984392EC7F2}"/>
+              </a:ext>
+            </a:extLst>
+          </p:cNvPr>
+          <p:cNvSpPr txBox="1"/>
+          <p:nvPr/>
+        </p:nvSpPr>
+        <p:spPr>
+          <a:xfrm>
+            <a:off x="179832" y="525227"/>
+            <a:ext cx="11832336" cy="4154984"/>
+          </a:xfrm>
+          <a:prstGeom prst="rect">
+            <a:avLst/>
+          </a:prstGeom>
+          <a:noFill/>
+        </p:spPr>
+        <p:txBody>
+          <a:bodyPr wrap="square">
+            <a:spAutoFit/>
+          </a:bodyPr>
+          <a:lstStyle/>
+          <a:p>
+            <a:r>
+              <a:rPr lang="en-US" sz="2400" dirty="0">
+                <a:solidFill>
+                  <a:schemeClr val="accent6">
+                    <a:lumMod val="60000"/>
+                    <a:lumOff val="40000"/>
+                  </a:schemeClr>
+                </a:solidFill>
+              </a:rPr>
+              <a:t>Advantage of stemming: </a:t>
+            </a:r>
+          </a:p>
+          <a:p>
+            <a:endParaRPr lang="en-US" sz="2400" dirty="0">
+              <a:solidFill>
+                <a:schemeClr val="accent6">
+                  <a:lumMod val="60000"/>
+                  <a:lumOff val="40000"/>
+                </a:schemeClr>
+              </a:solidFill>
+            </a:endParaRPr>
+          </a:p>
+          <a:p>
+            <a:pPr marL="457200" indent="-457200">
+              <a:buAutoNum type="arabicParenR"/>
+            </a:pPr>
+            <a:r>
+              <a:rPr lang="en-US" sz="2400" dirty="0">
+                <a:solidFill>
+                  <a:schemeClr val="accent6">
+                    <a:lumMod val="60000"/>
+                    <a:lumOff val="40000"/>
+                  </a:schemeClr>
+                </a:solidFill>
+              </a:rPr>
+              <a:t>Reduced Dimension: </a:t>
+            </a:r>
+          </a:p>
+          <a:p>
+            <a:r>
+              <a:rPr lang="en-US" sz="2400" dirty="0">
+                <a:solidFill>
+                  <a:schemeClr val="accent6">
+                    <a:lumMod val="60000"/>
+                    <a:lumOff val="40000"/>
+                  </a:schemeClr>
+                </a:solidFill>
+              </a:rPr>
+              <a:t>This Reduce dimensionality of the vocabulary. </a:t>
+            </a:r>
+          </a:p>
+          <a:p>
+            <a:r>
+              <a:rPr lang="en-US" sz="2400" dirty="0">
+                <a:solidFill>
+                  <a:schemeClr val="accent6">
+                    <a:lumMod val="60000"/>
+                    <a:lumOff val="40000"/>
+                  </a:schemeClr>
+                </a:solidFill>
+              </a:rPr>
+              <a:t>Example: </a:t>
+            </a:r>
+          </a:p>
+          <a:p>
+            <a:r>
+              <a:rPr lang="en-US" sz="2400" dirty="0">
+                <a:solidFill>
+                  <a:schemeClr val="accent6">
+                    <a:lumMod val="60000"/>
+                    <a:lumOff val="40000"/>
+                  </a:schemeClr>
+                </a:solidFill>
+              </a:rPr>
+              <a:t>connect, connects, connected, connecting, connection, connections, connectivity, connective </a:t>
+            </a:r>
+          </a:p>
+          <a:p>
+            <a:r>
+              <a:rPr lang="en-US" sz="2400" dirty="0">
+                <a:solidFill>
+                  <a:schemeClr val="accent6">
+                    <a:lumMod val="60000"/>
+                    <a:lumOff val="40000"/>
+                  </a:schemeClr>
+                </a:solidFill>
+              </a:rPr>
+              <a:t>-&gt; connect</a:t>
+            </a:r>
+          </a:p>
+          <a:p>
+            <a:endParaRPr lang="en-US" sz="2400" dirty="0">
+              <a:solidFill>
+                <a:schemeClr val="accent6">
+                  <a:lumMod val="60000"/>
+                  <a:lumOff val="40000"/>
+                </a:schemeClr>
+              </a:solidFill>
+            </a:endParaRPr>
+          </a:p>
+          <a:p>
+            <a:r>
+              <a:rPr lang="en-US" sz="2400" b="1" dirty="0">
+                <a:solidFill>
+                  <a:schemeClr val="accent6">
+                    <a:lumMod val="60000"/>
+                    <a:lumOff val="40000"/>
+                  </a:schemeClr>
+                </a:solidFill>
+              </a:rPr>
+              <a:t>2. Faster processing</a:t>
+            </a:r>
+            <a:br>
+              <a:rPr lang="en-US" sz="2400" dirty="0">
+                <a:solidFill>
+                  <a:schemeClr val="accent6">
+                    <a:lumMod val="60000"/>
+                    <a:lumOff val="40000"/>
+                  </a:schemeClr>
+                </a:solidFill>
+              </a:rPr>
+            </a:br>
+            <a:r>
+              <a:rPr lang="en-US" sz="2400" dirty="0">
+                <a:solidFill>
+                  <a:schemeClr val="accent6">
+                    <a:lumMod val="60000"/>
+                    <a:lumOff val="40000"/>
+                  </a:schemeClr>
+                </a:solidFill>
+              </a:rPr>
+              <a:t>Smaller vocabulary = smaller feature space</a:t>
+            </a:r>
+            <a:br>
+              <a:rPr lang="en-US" sz="2400" dirty="0">
+                <a:solidFill>
+                  <a:schemeClr val="accent6">
+                    <a:lumMod val="60000"/>
+                    <a:lumOff val="40000"/>
+                  </a:schemeClr>
+                </a:solidFill>
+              </a:rPr>
+            </a:br>
+            <a:r>
+              <a:rPr lang="en-US" sz="2400" dirty="0">
+                <a:solidFill>
+                  <a:schemeClr val="accent6">
+                    <a:lumMod val="60000"/>
+                    <a:lumOff val="40000"/>
+                  </a:schemeClr>
+                </a:solidFill>
+              </a:rPr>
+              <a:t>👉 Models train faster and use less memory.</a:t>
+            </a:r>
+          </a:p>
+        </p:txBody>
+      </p:sp>
+    </p:spTree>
+    <p:extLst>
+      <p:ext uri="{BB962C8B-B14F-4D97-AF65-F5344CB8AC3E}">
+        <p14:creationId xmlns:p14="http://schemas.microsoft.com/office/powerpoint/2010/main" val="253089219"/>
+      </p:ext>
+    </p:extLst>
+  </p:cSld>
+  <p:clrMapOvr>
+    <a:masterClrMapping/>
+  </p:clrMapOvr>
+</p:sld>
+</file>
+
+<file path=ppt/slides/slide31.xml><?xml version="1.0" encoding="utf-8"?>
+<p:sld xmlns:a="http://schemas.openxmlformats.org/drawingml/2006/main" xmlns:r="http://schemas.openxmlformats.org/officeDocument/2006/relationships" xmlns:p="http://schemas.openxmlformats.org/presentationml/2006/main">
+  <p:cSld>
+    <p:spTree>
+      <p:nvGrpSpPr>
         <p:cNvPr id="1" name=""/>
         <p:cNvGrpSpPr/>
         <p:nvPr/>
@@ -26732,7 +26977,7 @@
 </p:sld>
 </file>
 
-<file path=ppt/slides/slide31.xml><?xml version="1.0" encoding="utf-8"?>
+<file path=ppt/slides/slide32.xml><?xml version="1.0" encoding="utf-8"?>
 <p:sld xmlns:a="http://schemas.openxmlformats.org/drawingml/2006/main" xmlns:r="http://schemas.openxmlformats.org/officeDocument/2006/relationships" xmlns:p="http://schemas.openxmlformats.org/presentationml/2006/main">
   <p:cSld>
     <p:spTree>
@@ -27215,7 +27460,7 @@
 </p:sld>
 </file>
 
-<file path=ppt/slides/slide32.xml><?xml version="1.0" encoding="utf-8"?>
+<file path=ppt/slides/slide33.xml><?xml version="1.0" encoding="utf-8"?>
 <p:sld xmlns:a="http://schemas.openxmlformats.org/drawingml/2006/main" xmlns:r="http://schemas.openxmlformats.org/officeDocument/2006/relationships" xmlns:p="http://schemas.openxmlformats.org/presentationml/2006/main">
   <p:cSld>
     <p:spTree>
@@ -29375,7 +29620,7 @@
 </p:sld>
 </file>
 
-<file path=ppt/slides/slide33.xml><?xml version="1.0" encoding="utf-8"?>
+<file path=ppt/slides/slide34.xml><?xml version="1.0" encoding="utf-8"?>
 <p:sld xmlns:a="http://schemas.openxmlformats.org/drawingml/2006/main" xmlns:r="http://schemas.openxmlformats.org/officeDocument/2006/relationships" xmlns:p="http://schemas.openxmlformats.org/presentationml/2006/main">
   <p:cSld>
     <p:spTree>
@@ -29487,162 +29732,6 @@
     <p:extLst>
       <p:ext uri="{BB962C8B-B14F-4D97-AF65-F5344CB8AC3E}">
         <p14:creationId xmlns:p14="http://schemas.microsoft.com/office/powerpoint/2010/main" val="318446816"/>
-      </p:ext>
-    </p:extLst>
-  </p:cSld>
-  <p:clrMapOvr>
-    <a:masterClrMapping/>
-  </p:clrMapOvr>
-</p:sld>
-</file>
-
-<file path=ppt/slides/slide34.xml><?xml version="1.0" encoding="utf-8"?>
-<p:sld xmlns:a="http://schemas.openxmlformats.org/drawingml/2006/main" xmlns:r="http://schemas.openxmlformats.org/officeDocument/2006/relationships" xmlns:p="http://schemas.openxmlformats.org/presentationml/2006/main">
-  <p:cSld>
-    <p:spTree>
-      <p:nvGrpSpPr>
-        <p:cNvPr id="1" name=""/>
-        <p:cNvGrpSpPr/>
-        <p:nvPr/>
-      </p:nvGrpSpPr>
-      <p:grpSpPr>
-        <a:xfrm>
-          <a:off x="0" y="0"/>
-          <a:ext cx="0" cy="0"/>
-          <a:chOff x="0" y="0"/>
-          <a:chExt cx="0" cy="0"/>
-        </a:xfrm>
-      </p:grpSpPr>
-      <p:sp>
-        <p:nvSpPr>
-          <p:cNvPr id="2" name="Title 1"/>
-          <p:cNvSpPr>
-            <a:spLocks noGrp="1"/>
-          </p:cNvSpPr>
-          <p:nvPr>
-            <p:ph type="title"/>
-          </p:nvPr>
-        </p:nvSpPr>
-        <p:spPr>
-          <a:xfrm>
-            <a:off x="318082" y="188956"/>
-            <a:ext cx="10515600" cy="582831"/>
-          </a:xfrm>
-        </p:spPr>
-        <p:txBody>
-          <a:bodyPr>
-            <a:normAutofit/>
-          </a:bodyPr>
-          <a:lstStyle/>
-          <a:p>
-            <a:r>
-              <a:rPr lang="en-US" sz="3200" dirty="0"/>
-              <a:t>5. Text Representation: Where is </a:t>
-            </a:r>
-            <a:r>
-              <a:rPr lang="en-US" sz="3200" dirty="0" err="1"/>
-              <a:t>BoW</a:t>
-            </a:r>
-            <a:r>
-              <a:rPr lang="en-US" sz="3200" dirty="0"/>
-              <a:t> used in NLP tasks?</a:t>
-            </a:r>
-          </a:p>
-        </p:txBody>
-      </p:sp>
-      <p:sp>
-        <p:nvSpPr>
-          <p:cNvPr id="3" name="Content Placeholder 2"/>
-          <p:cNvSpPr>
-            <a:spLocks noGrp="1"/>
-          </p:cNvSpPr>
-          <p:nvPr>
-            <p:ph idx="1"/>
-          </p:nvPr>
-        </p:nvSpPr>
-        <p:spPr>
-          <a:xfrm>
-            <a:off x="838200" y="1825625"/>
-            <a:ext cx="10515600" cy="2939322"/>
-          </a:xfrm>
-        </p:spPr>
-        <p:txBody>
-          <a:bodyPr>
-            <a:normAutofit fontScale="77500" lnSpcReduction="20000"/>
-          </a:bodyPr>
-          <a:lstStyle/>
-          <a:p>
-            <a:pPr marL="0" indent="0">
-              <a:buNone/>
-            </a:pPr>
-            <a:r>
-              <a:rPr lang="en-US" dirty="0"/>
-              <a:t>Spam Detection </a:t>
-            </a:r>
-          </a:p>
-          <a:p>
-            <a:pPr marL="0" indent="0">
-              <a:buNone/>
-            </a:pPr>
-            <a:r>
-              <a:rPr lang="en-US" dirty="0"/>
-              <a:t>→ "free", "winner", "offer" appear? =&gt; Spam!</a:t>
-            </a:r>
-          </a:p>
-          <a:p>
-            <a:pPr marL="0" indent="0">
-              <a:buNone/>
-            </a:pPr>
-            <a:endParaRPr lang="en-US" dirty="0"/>
-          </a:p>
-          <a:p>
-            <a:pPr marL="0" indent="0">
-              <a:buNone/>
-            </a:pPr>
-            <a:r>
-              <a:rPr lang="en-US" dirty="0"/>
-              <a:t>Sentiment Analysis</a:t>
-            </a:r>
-          </a:p>
-          <a:p>
-            <a:pPr marL="0" indent="0">
-              <a:buNone/>
-            </a:pPr>
-            <a:r>
-              <a:rPr lang="en-US" dirty="0"/>
-              <a:t>→ "love", "hate", "awesome", "bad" words are critical.</a:t>
-            </a:r>
-          </a:p>
-          <a:p>
-            <a:pPr marL="0" indent="0">
-              <a:buNone/>
-            </a:pPr>
-            <a:endParaRPr lang="en-US" dirty="0"/>
-          </a:p>
-          <a:p>
-            <a:pPr marL="0" indent="0">
-              <a:buNone/>
-            </a:pPr>
-            <a:r>
-              <a:rPr lang="en-US" dirty="0"/>
-              <a:t>Topic Classification</a:t>
-            </a:r>
-          </a:p>
-          <a:p>
-            <a:pPr marL="0" indent="0">
-              <a:buNone/>
-            </a:pPr>
-            <a:r>
-              <a:rPr lang="en-US" dirty="0"/>
-              <a:t>→ "flight", "hotel", "restaurant" words hint about travel vs food.</a:t>
-            </a:r>
-          </a:p>
-        </p:txBody>
-      </p:sp>
-    </p:spTree>
-    <p:extLst>
-      <p:ext uri="{BB962C8B-B14F-4D97-AF65-F5344CB8AC3E}">
-        <p14:creationId xmlns:p14="http://schemas.microsoft.com/office/powerpoint/2010/main" val="933682613"/>
       </p:ext>
     </p:extLst>
   </p:cSld>
@@ -29681,6 +29770,162 @@
         </p:nvSpPr>
         <p:spPr>
           <a:xfrm>
+            <a:off x="318082" y="188956"/>
+            <a:ext cx="10515600" cy="582831"/>
+          </a:xfrm>
+        </p:spPr>
+        <p:txBody>
+          <a:bodyPr>
+            <a:normAutofit/>
+          </a:bodyPr>
+          <a:lstStyle/>
+          <a:p>
+            <a:r>
+              <a:rPr lang="en-US" sz="3200" dirty="0"/>
+              <a:t>5. Text Representation: Where is </a:t>
+            </a:r>
+            <a:r>
+              <a:rPr lang="en-US" sz="3200" dirty="0" err="1"/>
+              <a:t>BoW</a:t>
+            </a:r>
+            <a:r>
+              <a:rPr lang="en-US" sz="3200" dirty="0"/>
+              <a:t> used in NLP tasks?</a:t>
+            </a:r>
+          </a:p>
+        </p:txBody>
+      </p:sp>
+      <p:sp>
+        <p:nvSpPr>
+          <p:cNvPr id="3" name="Content Placeholder 2"/>
+          <p:cNvSpPr>
+            <a:spLocks noGrp="1"/>
+          </p:cNvSpPr>
+          <p:nvPr>
+            <p:ph idx="1"/>
+          </p:nvPr>
+        </p:nvSpPr>
+        <p:spPr>
+          <a:xfrm>
+            <a:off x="838200" y="1825625"/>
+            <a:ext cx="10515600" cy="2939322"/>
+          </a:xfrm>
+        </p:spPr>
+        <p:txBody>
+          <a:bodyPr>
+            <a:normAutofit fontScale="77500" lnSpcReduction="20000"/>
+          </a:bodyPr>
+          <a:lstStyle/>
+          <a:p>
+            <a:pPr marL="0" indent="0">
+              <a:buNone/>
+            </a:pPr>
+            <a:r>
+              <a:rPr lang="en-US" dirty="0"/>
+              <a:t>Spam Detection </a:t>
+            </a:r>
+          </a:p>
+          <a:p>
+            <a:pPr marL="0" indent="0">
+              <a:buNone/>
+            </a:pPr>
+            <a:r>
+              <a:rPr lang="en-US" dirty="0"/>
+              <a:t>→ "free", "winner", "offer" appear? =&gt; Spam!</a:t>
+            </a:r>
+          </a:p>
+          <a:p>
+            <a:pPr marL="0" indent="0">
+              <a:buNone/>
+            </a:pPr>
+            <a:endParaRPr lang="en-US" dirty="0"/>
+          </a:p>
+          <a:p>
+            <a:pPr marL="0" indent="0">
+              <a:buNone/>
+            </a:pPr>
+            <a:r>
+              <a:rPr lang="en-US" dirty="0"/>
+              <a:t>Sentiment Analysis</a:t>
+            </a:r>
+          </a:p>
+          <a:p>
+            <a:pPr marL="0" indent="0">
+              <a:buNone/>
+            </a:pPr>
+            <a:r>
+              <a:rPr lang="en-US" dirty="0"/>
+              <a:t>→ "love", "hate", "awesome", "bad" words are critical.</a:t>
+            </a:r>
+          </a:p>
+          <a:p>
+            <a:pPr marL="0" indent="0">
+              <a:buNone/>
+            </a:pPr>
+            <a:endParaRPr lang="en-US" dirty="0"/>
+          </a:p>
+          <a:p>
+            <a:pPr marL="0" indent="0">
+              <a:buNone/>
+            </a:pPr>
+            <a:r>
+              <a:rPr lang="en-US" dirty="0"/>
+              <a:t>Topic Classification</a:t>
+            </a:r>
+          </a:p>
+          <a:p>
+            <a:pPr marL="0" indent="0">
+              <a:buNone/>
+            </a:pPr>
+            <a:r>
+              <a:rPr lang="en-US" dirty="0"/>
+              <a:t>→ "flight", "hotel", "restaurant" words hint about travel vs food.</a:t>
+            </a:r>
+          </a:p>
+        </p:txBody>
+      </p:sp>
+    </p:spTree>
+    <p:extLst>
+      <p:ext uri="{BB962C8B-B14F-4D97-AF65-F5344CB8AC3E}">
+        <p14:creationId xmlns:p14="http://schemas.microsoft.com/office/powerpoint/2010/main" val="933682613"/>
+      </p:ext>
+    </p:extLst>
+  </p:cSld>
+  <p:clrMapOvr>
+    <a:masterClrMapping/>
+  </p:clrMapOvr>
+</p:sld>
+</file>
+
+<file path=ppt/slides/slide36.xml><?xml version="1.0" encoding="utf-8"?>
+<p:sld xmlns:a="http://schemas.openxmlformats.org/drawingml/2006/main" xmlns:r="http://schemas.openxmlformats.org/officeDocument/2006/relationships" xmlns:p="http://schemas.openxmlformats.org/presentationml/2006/main">
+  <p:cSld>
+    <p:spTree>
+      <p:nvGrpSpPr>
+        <p:cNvPr id="1" name=""/>
+        <p:cNvGrpSpPr/>
+        <p:nvPr/>
+      </p:nvGrpSpPr>
+      <p:grpSpPr>
+        <a:xfrm>
+          <a:off x="0" y="0"/>
+          <a:ext cx="0" cy="0"/>
+          <a:chOff x="0" y="0"/>
+          <a:chExt cx="0" cy="0"/>
+        </a:xfrm>
+      </p:grpSpPr>
+      <p:sp>
+        <p:nvSpPr>
+          <p:cNvPr id="2" name="Title 1"/>
+          <p:cNvSpPr>
+            <a:spLocks noGrp="1"/>
+          </p:cNvSpPr>
+          <p:nvPr>
+            <p:ph type="title"/>
+          </p:nvPr>
+        </p:nvSpPr>
+        <p:spPr>
+          <a:xfrm>
             <a:off x="318082" y="120588"/>
             <a:ext cx="10515600" cy="582831"/>
           </a:xfrm>
@@ -29922,7 +30167,7 @@
 </p:sld>
 </file>
 
-<file path=ppt/slides/slide36.xml><?xml version="1.0" encoding="utf-8"?>
+<file path=ppt/slides/slide37.xml><?xml version="1.0" encoding="utf-8"?>
 <p:sld xmlns:a="http://schemas.openxmlformats.org/drawingml/2006/main" xmlns:r="http://schemas.openxmlformats.org/officeDocument/2006/relationships" xmlns:p="http://schemas.openxmlformats.org/presentationml/2006/main">
   <p:cSld>
     <p:spTree>
@@ -29996,8 +30241,8 @@
           </a:p>
         </p:txBody>
       </p:sp>
-      <mc:AlternateContent xmlns:mc="http://schemas.openxmlformats.org/markup-compatibility/2006">
-        <mc:Choice xmlns:a14="http://schemas.microsoft.com/office/drawing/2010/main" Requires="a14">
+      <mc:AlternateContent xmlns:mc="http://schemas.openxmlformats.org/markup-compatibility/2006" xmlns:a14="http://schemas.microsoft.com/office/drawing/2010/main">
+        <mc:Choice Requires="a14">
           <p:sp>
             <p:nvSpPr>
               <p:cNvPr id="7" name="TextBox 6">
@@ -30393,7 +30638,7 @@
             </p:txBody>
           </p:sp>
         </mc:Choice>
-        <mc:Fallback>
+        <mc:Fallback xmlns="">
           <p:sp>
             <p:nvSpPr>
               <p:cNvPr id="7" name="TextBox 6">
@@ -30544,8 +30789,8 @@
           </a:p>
         </p:txBody>
       </p:sp>
-      <mc:AlternateContent xmlns:mc="http://schemas.openxmlformats.org/markup-compatibility/2006">
-        <mc:Choice xmlns:a14="http://schemas.microsoft.com/office/drawing/2010/main" Requires="a14">
+      <mc:AlternateContent xmlns:mc="http://schemas.openxmlformats.org/markup-compatibility/2006" xmlns:a14="http://schemas.microsoft.com/office/drawing/2010/main">
+        <mc:Choice Requires="a14">
           <p:sp>
             <p:nvSpPr>
               <p:cNvPr id="10" name="TextBox 9">
@@ -31087,7 +31332,7 @@
             </p:txBody>
           </p:sp>
         </mc:Choice>
-        <mc:Fallback>
+        <mc:Fallback xmlns="">
           <p:sp>
             <p:nvSpPr>
               <p:cNvPr id="10" name="TextBox 9">
@@ -31174,8 +31419,8 @@
           </a:p>
         </p:txBody>
       </p:sp>
-      <mc:AlternateContent xmlns:mc="http://schemas.openxmlformats.org/markup-compatibility/2006">
-        <mc:Choice xmlns:a14="http://schemas.microsoft.com/office/drawing/2010/main" Requires="a14">
+      <mc:AlternateContent xmlns:mc="http://schemas.openxmlformats.org/markup-compatibility/2006" xmlns:a14="http://schemas.microsoft.com/office/drawing/2010/main">
+        <mc:Choice Requires="a14">
           <p:sp>
             <p:nvSpPr>
               <p:cNvPr id="12" name="TextBox 11">
@@ -31733,7 +31978,7 @@
             </p:txBody>
           </p:sp>
         </mc:Choice>
-        <mc:Fallback>
+        <mc:Fallback xmlns="">
           <p:sp>
             <p:nvSpPr>
               <p:cNvPr id="12" name="TextBox 11">
@@ -31883,7 +32128,7 @@
 </p:sld>
 </file>
 
-<file path=ppt/slides/slide37.xml><?xml version="1.0" encoding="utf-8"?>
+<file path=ppt/slides/slide38.xml><?xml version="1.0" encoding="utf-8"?>
 <p:sld xmlns:a="http://schemas.openxmlformats.org/drawingml/2006/main" xmlns:r="http://schemas.openxmlformats.org/officeDocument/2006/relationships" xmlns:p="http://schemas.openxmlformats.org/presentationml/2006/main">
   <p:cSld>
     <p:spTree>
@@ -32035,7 +32280,7 @@
 </p:sld>
 </file>
 
-<file path=ppt/slides/slide38.xml><?xml version="1.0" encoding="utf-8"?>
+<file path=ppt/slides/slide39.xml><?xml version="1.0" encoding="utf-8"?>
 <p:sld xmlns:a="http://schemas.openxmlformats.org/drawingml/2006/main" xmlns:r="http://schemas.openxmlformats.org/officeDocument/2006/relationships" xmlns:p="http://schemas.openxmlformats.org/presentationml/2006/main">
   <p:cSld>
     <p:spTree>
@@ -32373,240 +32618,6 @@
 </p:sld>
 </file>
 
-<file path=ppt/slides/slide39.xml><?xml version="1.0" encoding="utf-8"?>
-<p:sld xmlns:a="http://schemas.openxmlformats.org/drawingml/2006/main" xmlns:r="http://schemas.openxmlformats.org/officeDocument/2006/relationships" xmlns:p="http://schemas.openxmlformats.org/presentationml/2006/main">
-  <p:cSld>
-    <p:spTree>
-      <p:nvGrpSpPr>
-        <p:cNvPr id="1" name=""/>
-        <p:cNvGrpSpPr/>
-        <p:nvPr/>
-      </p:nvGrpSpPr>
-      <p:grpSpPr>
-        <a:xfrm>
-          <a:off x="0" y="0"/>
-          <a:ext cx="0" cy="0"/>
-          <a:chOff x="0" y="0"/>
-          <a:chExt cx="0" cy="0"/>
-        </a:xfrm>
-      </p:grpSpPr>
-      <p:sp>
-        <p:nvSpPr>
-          <p:cNvPr id="2" name="Title 1"/>
-          <p:cNvSpPr>
-            <a:spLocks noGrp="1"/>
-          </p:cNvSpPr>
-          <p:nvPr>
-            <p:ph type="title"/>
-          </p:nvPr>
-        </p:nvSpPr>
-        <p:spPr>
-          <a:xfrm>
-            <a:off x="838200" y="365125"/>
-            <a:ext cx="10515600" cy="700277"/>
-          </a:xfrm>
-        </p:spPr>
-        <p:txBody>
-          <a:bodyPr>
-            <a:normAutofit/>
-          </a:bodyPr>
-          <a:lstStyle/>
-          <a:p>
-            <a:r>
-              <a:rPr lang="en-US" sz="3200" dirty="0"/>
-              <a:t>5. Text Representation: What is document in TF-IDF?</a:t>
-            </a:r>
-          </a:p>
-        </p:txBody>
-      </p:sp>
-      <p:sp>
-        <p:nvSpPr>
-          <p:cNvPr id="5" name="TextBox 4">
-            <a:extLst>
-              <a:ext uri="{FF2B5EF4-FFF2-40B4-BE49-F238E27FC236}">
-                <a16:creationId xmlns:a16="http://schemas.microsoft.com/office/drawing/2014/main" id="{D0A76F66-AD31-D812-B4A2-C42B8D9E2786}"/>
-              </a:ext>
-            </a:extLst>
-          </p:cNvPr>
-          <p:cNvSpPr txBox="1"/>
-          <p:nvPr/>
-        </p:nvSpPr>
-        <p:spPr>
-          <a:xfrm>
-            <a:off x="701040" y="1674013"/>
-            <a:ext cx="11213592" cy="1938992"/>
-          </a:xfrm>
-          <a:prstGeom prst="rect">
-            <a:avLst/>
-          </a:prstGeom>
-          <a:noFill/>
-        </p:spPr>
-        <p:txBody>
-          <a:bodyPr wrap="square">
-            <a:spAutoFit/>
-          </a:bodyPr>
-          <a:lstStyle/>
-          <a:p>
-            <a:pPr marL="0" indent="0">
-              <a:buNone/>
-            </a:pPr>
-            <a:r>
-              <a:rPr lang="en-US" sz="2400" dirty="0">
-                <a:solidFill>
-                  <a:schemeClr val="accent6">
-                    <a:lumMod val="60000"/>
-                    <a:lumOff val="40000"/>
-                  </a:schemeClr>
-                </a:solidFill>
-              </a:rPr>
-              <a:t>In practice:</a:t>
-            </a:r>
-          </a:p>
-          <a:p>
-            <a:pPr marL="0" indent="0">
-              <a:buNone/>
-            </a:pPr>
-            <a:endParaRPr lang="en-US" sz="2400" dirty="0">
-              <a:solidFill>
-                <a:schemeClr val="accent6">
-                  <a:lumMod val="60000"/>
-                  <a:lumOff val="40000"/>
-                </a:schemeClr>
-              </a:solidFill>
-            </a:endParaRPr>
-          </a:p>
-          <a:p>
-            <a:pPr marL="342900" indent="-342900">
-              <a:buFont typeface="Arial" panose="020B0604020202020204" pitchFamily="34" charset="0"/>
-              <a:buChar char="•"/>
-            </a:pPr>
-            <a:r>
-              <a:rPr lang="en-US" sz="2400" dirty="0">
-                <a:solidFill>
-                  <a:schemeClr val="accent6">
-                    <a:lumMod val="60000"/>
-                    <a:lumOff val="40000"/>
-                  </a:schemeClr>
-                </a:solidFill>
-              </a:rPr>
-              <a:t>If you’re analyzing tweets, each </a:t>
-            </a:r>
-            <a:r>
-              <a:rPr lang="en-US" sz="2400" b="1" dirty="0">
-                <a:solidFill>
-                  <a:schemeClr val="accent6">
-                    <a:lumMod val="60000"/>
-                    <a:lumOff val="40000"/>
-                  </a:schemeClr>
-                </a:solidFill>
-              </a:rPr>
-              <a:t>tweet</a:t>
-            </a:r>
-            <a:r>
-              <a:rPr lang="en-US" sz="2400" dirty="0">
-                <a:solidFill>
-                  <a:schemeClr val="accent6">
-                    <a:lumMod val="60000"/>
-                    <a:lumOff val="40000"/>
-                  </a:schemeClr>
-                </a:solidFill>
-              </a:rPr>
-              <a:t> is a “document.”</a:t>
-            </a:r>
-          </a:p>
-          <a:p>
-            <a:pPr marL="342900" indent="-342900">
-              <a:buFont typeface="Arial" panose="020B0604020202020204" pitchFamily="34" charset="0"/>
-              <a:buChar char="•"/>
-            </a:pPr>
-            <a:r>
-              <a:rPr lang="en-US" sz="2400" dirty="0">
-                <a:solidFill>
-                  <a:schemeClr val="accent6">
-                    <a:lumMod val="60000"/>
-                    <a:lumOff val="40000"/>
-                  </a:schemeClr>
-                </a:solidFill>
-              </a:rPr>
-              <a:t>For news classification, each </a:t>
-            </a:r>
-            <a:r>
-              <a:rPr lang="en-US" sz="2400" b="1" dirty="0">
-                <a:solidFill>
-                  <a:schemeClr val="accent6">
-                    <a:lumMod val="60000"/>
-                    <a:lumOff val="40000"/>
-                  </a:schemeClr>
-                </a:solidFill>
-              </a:rPr>
-              <a:t>article</a:t>
-            </a:r>
-            <a:r>
-              <a:rPr lang="en-US" sz="2400" dirty="0">
-                <a:solidFill>
-                  <a:schemeClr val="accent6">
-                    <a:lumMod val="60000"/>
-                    <a:lumOff val="40000"/>
-                  </a:schemeClr>
-                </a:solidFill>
-              </a:rPr>
-              <a:t> is a “document.”</a:t>
-            </a:r>
-          </a:p>
-          <a:p>
-            <a:pPr marL="342900" indent="-342900">
-              <a:buFont typeface="Arial" panose="020B0604020202020204" pitchFamily="34" charset="0"/>
-              <a:buChar char="•"/>
-            </a:pPr>
-            <a:r>
-              <a:rPr lang="en-US" sz="2400" dirty="0">
-                <a:solidFill>
-                  <a:schemeClr val="accent6">
-                    <a:lumMod val="60000"/>
-                    <a:lumOff val="40000"/>
-                  </a:schemeClr>
-                </a:solidFill>
-              </a:rPr>
-              <a:t>For summarization, each </a:t>
-            </a:r>
-            <a:r>
-              <a:rPr lang="en-US" sz="2400" b="1" dirty="0">
-                <a:solidFill>
-                  <a:schemeClr val="accent6">
-                    <a:lumMod val="60000"/>
-                    <a:lumOff val="40000"/>
-                  </a:schemeClr>
-                </a:solidFill>
-              </a:rPr>
-              <a:t>paragraph or longer text</a:t>
-            </a:r>
-            <a:r>
-              <a:rPr lang="en-US" sz="2400" dirty="0">
-                <a:solidFill>
-                  <a:schemeClr val="accent6">
-                    <a:lumMod val="60000"/>
-                    <a:lumOff val="40000"/>
-                  </a:schemeClr>
-                </a:solidFill>
-              </a:rPr>
-              <a:t> is treated as a “document.”</a:t>
-            </a:r>
-          </a:p>
-        </p:txBody>
-      </p:sp>
-    </p:spTree>
-    <p:extLst>
-      <p:ext uri="{BB962C8B-B14F-4D97-AF65-F5344CB8AC3E}">
-        <p14:creationId xmlns:p14="http://schemas.microsoft.com/office/powerpoint/2010/main" val="257055425"/>
-      </p:ext>
-    </p:extLst>
-  </p:cSld>
-  <p:clrMapOvr>
-    <a:masterClrMapping/>
-  </p:clrMapOvr>
-</p:sld>
-</file>
-
 <file path=ppt/slides/slide4.xml><?xml version="1.0" encoding="utf-8"?>
 <p:sld xmlns:a="http://schemas.openxmlformats.org/drawingml/2006/main" xmlns:r="http://schemas.openxmlformats.org/officeDocument/2006/relationships" xmlns:p="http://schemas.openxmlformats.org/presentationml/2006/main">
   <p:cSld>
@@ -32996,8 +33007,8 @@
         </p:nvSpPr>
         <p:spPr>
           <a:xfrm>
-            <a:off x="318082" y="188956"/>
-            <a:ext cx="10515600" cy="582831"/>
+            <a:off x="838200" y="365125"/>
+            <a:ext cx="10515600" cy="700277"/>
           </a:xfrm>
         </p:spPr>
         <p:txBody>
@@ -33008,7 +33019,7 @@
           <a:p>
             <a:r>
               <a:rPr lang="en-US" sz="3200" dirty="0"/>
-              <a:t>5. Text Representation: TF-IDF, how does it help?</a:t>
+              <a:t>5. Text Representation: What is document in TF-IDF?</a:t>
             </a:r>
           </a:p>
         </p:txBody>
@@ -33018,7 +33029,7 @@
           <p:cNvPr id="5" name="TextBox 4">
             <a:extLst>
               <a:ext uri="{FF2B5EF4-FFF2-40B4-BE49-F238E27FC236}">
-                <a16:creationId xmlns:a16="http://schemas.microsoft.com/office/drawing/2014/main" id="{2FEAE422-2927-8BF9-58D6-28EFAF85EAED}"/>
+                <a16:creationId xmlns:a16="http://schemas.microsoft.com/office/drawing/2014/main" id="{D0A76F66-AD31-D812-B4A2-C42B8D9E2786}"/>
               </a:ext>
             </a:extLst>
           </p:cNvPr>
@@ -33027,8 +33038,8 @@
         </p:nvSpPr>
         <p:spPr>
           <a:xfrm>
-            <a:off x="571500" y="1270338"/>
-            <a:ext cx="7200900" cy="2677656"/>
+            <a:off x="701040" y="1674013"/>
+            <a:ext cx="11213592" cy="1938992"/>
           </a:xfrm>
           <a:prstGeom prst="rect">
             <a:avLst/>
@@ -33041,6 +33052,35 @@
           </a:bodyPr>
           <a:lstStyle/>
           <a:p>
+            <a:pPr marL="0" indent="0">
+              <a:buNone/>
+            </a:pPr>
+            <a:r>
+              <a:rPr lang="en-US" sz="2400" dirty="0">
+                <a:solidFill>
+                  <a:schemeClr val="accent6">
+                    <a:lumMod val="60000"/>
+                    <a:lumOff val="40000"/>
+                  </a:schemeClr>
+                </a:solidFill>
+              </a:rPr>
+              <a:t>In practice:</a:t>
+            </a:r>
+          </a:p>
+          <a:p>
+            <a:pPr marL="0" indent="0">
+              <a:buNone/>
+            </a:pPr>
+            <a:endParaRPr lang="en-US" sz="2400" dirty="0">
+              <a:solidFill>
+                <a:schemeClr val="accent6">
+                  <a:lumMod val="60000"/>
+                  <a:lumOff val="40000"/>
+                </a:schemeClr>
+              </a:solidFill>
+            </a:endParaRPr>
+          </a:p>
+          <a:p>
             <a:pPr marL="342900" indent="-342900">
               <a:buFont typeface="Arial" panose="020B0604020202020204" pitchFamily="34" charset="0"/>
               <a:buChar char="•"/>
@@ -33054,7 +33094,29 @@
                   </a:schemeClr>
                 </a:solidFill>
               </a:rPr>
-              <a:t>Filters out common, less informative words</a:t>
+              <a:t>If you’re analyzing tweets, each </a:t>
+            </a:r>
+            <a:r>
+              <a:rPr lang="en-US" sz="2400" b="1" dirty="0">
+                <a:solidFill>
+                  <a:schemeClr val="accent6">
+                    <a:lumMod val="60000"/>
+                    <a:lumOff val="40000"/>
+                  </a:schemeClr>
+                </a:solidFill>
+              </a:rPr>
+              <a:t>tweet</a:t>
+            </a:r>
+            <a:r>
+              <a:rPr lang="en-US" sz="2400" dirty="0">
+                <a:solidFill>
+                  <a:schemeClr val="accent6">
+                    <a:lumMod val="60000"/>
+                    <a:lumOff val="40000"/>
+                  </a:schemeClr>
+                </a:solidFill>
+              </a:rPr>
+              <a:t> is a “document.”</a:t>
             </a:r>
           </a:p>
           <a:p>
@@ -33071,7 +33133,29 @@
                   </a:schemeClr>
                 </a:solidFill>
               </a:rPr>
-              <a:t>Keeps meaningful, rare keywords</a:t>
+              <a:t>For news classification, each </a:t>
+            </a:r>
+            <a:r>
+              <a:rPr lang="en-US" sz="2400" b="1" dirty="0">
+                <a:solidFill>
+                  <a:schemeClr val="accent6">
+                    <a:lumMod val="60000"/>
+                    <a:lumOff val="40000"/>
+                  </a:schemeClr>
+                </a:solidFill>
+              </a:rPr>
+              <a:t>article</a:t>
+            </a:r>
+            <a:r>
+              <a:rPr lang="en-US" sz="2400" dirty="0">
+                <a:solidFill>
+                  <a:schemeClr val="accent6">
+                    <a:lumMod val="60000"/>
+                    <a:lumOff val="40000"/>
+                  </a:schemeClr>
+                </a:solidFill>
+              </a:rPr>
+              <a:t> is a “document.”</a:t>
             </a:r>
           </a:p>
           <a:p>
@@ -33088,14 +33172,19 @@
                   </a:schemeClr>
                 </a:solidFill>
               </a:rPr>
-              <a:t>Improves performance in:</a:t>
-            </a:r>
-          </a:p>
-          <a:p>
-            <a:pPr marL="800100" lvl="1" indent="-342900">
-              <a:buFont typeface="Arial" panose="020B0604020202020204" pitchFamily="34" charset="0"/>
-              <a:buChar char="•"/>
-            </a:pPr>
+              <a:t>For summarization, each </a:t>
+            </a:r>
+            <a:r>
+              <a:rPr lang="en-US" sz="2400" b="1" dirty="0">
+                <a:solidFill>
+                  <a:schemeClr val="accent6">
+                    <a:lumMod val="60000"/>
+                    <a:lumOff val="40000"/>
+                  </a:schemeClr>
+                </a:solidFill>
+              </a:rPr>
+              <a:t>paragraph or longer text</a:t>
+            </a:r>
             <a:r>
               <a:rPr lang="en-US" sz="2400" dirty="0">
                 <a:solidFill>
@@ -33105,58 +33194,7 @@
                   </a:schemeClr>
                 </a:solidFill>
               </a:rPr>
-              <a:t>Text classification</a:t>
-            </a:r>
-          </a:p>
-          <a:p>
-            <a:pPr marL="800100" lvl="1" indent="-342900">
-              <a:buFont typeface="Arial" panose="020B0604020202020204" pitchFamily="34" charset="0"/>
-              <a:buChar char="•"/>
-            </a:pPr>
-            <a:r>
-              <a:rPr lang="en-US" sz="2400" dirty="0">
-                <a:solidFill>
-                  <a:schemeClr val="accent6">
-                    <a:lumMod val="60000"/>
-                    <a:lumOff val="40000"/>
-                  </a:schemeClr>
-                </a:solidFill>
-              </a:rPr>
-              <a:t>Search engines (e.g., Google ranking)</a:t>
-            </a:r>
-          </a:p>
-          <a:p>
-            <a:pPr marL="800100" lvl="1" indent="-342900">
-              <a:buFont typeface="Arial" panose="020B0604020202020204" pitchFamily="34" charset="0"/>
-              <a:buChar char="•"/>
-            </a:pPr>
-            <a:r>
-              <a:rPr lang="en-US" sz="2400" dirty="0">
-                <a:solidFill>
-                  <a:schemeClr val="accent6">
-                    <a:lumMod val="60000"/>
-                    <a:lumOff val="40000"/>
-                  </a:schemeClr>
-                </a:solidFill>
-              </a:rPr>
-              <a:t>Document similarity</a:t>
-            </a:r>
-          </a:p>
-          <a:p>
-            <a:pPr marL="800100" lvl="1" indent="-342900">
-              <a:buFont typeface="Arial" panose="020B0604020202020204" pitchFamily="34" charset="0"/>
-              <a:buChar char="•"/>
-            </a:pPr>
-            <a:r>
-              <a:rPr lang="en-US" sz="2400" dirty="0">
-                <a:solidFill>
-                  <a:schemeClr val="accent6">
-                    <a:lumMod val="60000"/>
-                    <a:lumOff val="40000"/>
-                  </a:schemeClr>
-                </a:solidFill>
-              </a:rPr>
-              <a:t>Keyword extraction</a:t>
+              <a:t> is treated as a “document.”</a:t>
             </a:r>
           </a:p>
         </p:txBody>
@@ -33164,7 +33202,7 @@
     </p:spTree>
     <p:extLst>
       <p:ext uri="{BB962C8B-B14F-4D97-AF65-F5344CB8AC3E}">
-        <p14:creationId xmlns:p14="http://schemas.microsoft.com/office/powerpoint/2010/main" val="2929780632"/>
+        <p14:creationId xmlns:p14="http://schemas.microsoft.com/office/powerpoint/2010/main" val="257055425"/>
       </p:ext>
     </p:extLst>
   </p:cSld>
@@ -33215,13 +33253,8 @@
           <a:p>
             <a:r>
               <a:rPr lang="en-US" sz="3200" dirty="0"/>
-              <a:t>5. Text Representation: Word </a:t>
-            </a:r>
-            <a:r>
-              <a:rPr lang="en-US" sz="3200" dirty="0" err="1"/>
-              <a:t>embeddings</a:t>
-            </a:r>
-            <a:endParaRPr lang="en-US" sz="3200" dirty="0"/>
+              <a:t>5. Text Representation: TF-IDF, how does it help?</a:t>
+            </a:r>
           </a:p>
         </p:txBody>
       </p:sp>
@@ -33230,7 +33263,7 @@
           <p:cNvPr id="5" name="TextBox 4">
             <a:extLst>
               <a:ext uri="{FF2B5EF4-FFF2-40B4-BE49-F238E27FC236}">
-                <a16:creationId xmlns:a16="http://schemas.microsoft.com/office/drawing/2014/main" id="{9EB377DB-53A7-59BE-032E-CF8B4DD2B5D9}"/>
+                <a16:creationId xmlns:a16="http://schemas.microsoft.com/office/drawing/2014/main" id="{2FEAE422-2927-8BF9-58D6-28EFAF85EAED}"/>
               </a:ext>
             </a:extLst>
           </p:cNvPr>
@@ -33239,8 +33272,8 @@
         </p:nvSpPr>
         <p:spPr>
           <a:xfrm>
-            <a:off x="162634" y="1984909"/>
-            <a:ext cx="11559974" cy="2677656"/>
+            <a:off x="571500" y="1270338"/>
+            <a:ext cx="7200900" cy="2677656"/>
           </a:xfrm>
           <a:prstGeom prst="rect">
             <a:avLst/>
@@ -33258,17 +33291,6 @@
               <a:buChar char="•"/>
             </a:pPr>
             <a:r>
-              <a:rPr lang="en-US" sz="2400" b="1" dirty="0">
-                <a:solidFill>
-                  <a:schemeClr val="accent6">
-                    <a:lumMod val="60000"/>
-                    <a:lumOff val="40000"/>
-                  </a:schemeClr>
-                </a:solidFill>
-              </a:rPr>
-              <a:t>Word2Vec</a:t>
-            </a:r>
-            <a:r>
               <a:rPr lang="en-US" sz="2400" dirty="0">
                 <a:solidFill>
                   <a:schemeClr val="accent6">
@@ -33277,29 +33299,7 @@
                   </a:schemeClr>
                 </a:solidFill>
               </a:rPr>
-              <a:t> is a powerful method developed by </a:t>
-            </a:r>
-            <a:r>
-              <a:rPr lang="en-US" sz="2400" b="1" dirty="0">
-                <a:solidFill>
-                  <a:schemeClr val="accent6">
-                    <a:lumMod val="60000"/>
-                    <a:lumOff val="40000"/>
-                  </a:schemeClr>
-                </a:solidFill>
-              </a:rPr>
-              <a:t>Google</a:t>
-            </a:r>
-            <a:r>
-              <a:rPr lang="en-US" sz="2400" dirty="0">
-                <a:solidFill>
-                  <a:schemeClr val="accent6">
-                    <a:lumMod val="60000"/>
-                    <a:lumOff val="40000"/>
-                  </a:schemeClr>
-                </a:solidFill>
-              </a:rPr>
-              <a:t> </a:t>
+              <a:t>Filters out common, less informative words</a:t>
             </a:r>
           </a:p>
           <a:p>
@@ -33307,14 +33307,17 @@
               <a:buFont typeface="Arial" panose="020B0604020202020204" pitchFamily="34" charset="0"/>
               <a:buChar char="•"/>
             </a:pPr>
-            <a:endParaRPr lang="en-US" sz="2400" dirty="0">
-              <a:solidFill>
-                <a:schemeClr val="accent6">
-                  <a:lumMod val="60000"/>
-                  <a:lumOff val="40000"/>
-                </a:schemeClr>
-              </a:solidFill>
-            </a:endParaRPr>
+            <a:r>
+              <a:rPr lang="en-US" sz="2400" dirty="0">
+                <a:solidFill>
+                  <a:schemeClr val="accent6">
+                    <a:lumMod val="60000"/>
+                    <a:lumOff val="40000"/>
+                  </a:schemeClr>
+                </a:solidFill>
+              </a:rPr>
+              <a:t>Keeps meaningful, rare keywords</a:t>
+            </a:r>
           </a:p>
           <a:p>
             <a:pPr marL="342900" indent="-342900">
@@ -33330,69 +33333,28 @@
                   </a:schemeClr>
                 </a:solidFill>
               </a:rPr>
-              <a:t>Create these embeddings using a neural network. It converts each word into a </a:t>
-            </a:r>
-            <a:r>
-              <a:rPr lang="en-US" sz="2400" b="1" dirty="0">
-                <a:solidFill>
-                  <a:schemeClr val="accent6">
-                    <a:lumMod val="60000"/>
-                    <a:lumOff val="40000"/>
-                  </a:schemeClr>
-                </a:solidFill>
-              </a:rPr>
-              <a:t>fixed-size vector</a:t>
-            </a:r>
-            <a:r>
-              <a:rPr lang="en-US" sz="2400" dirty="0">
-                <a:solidFill>
-                  <a:schemeClr val="accent6">
-                    <a:lumMod val="60000"/>
-                    <a:lumOff val="40000"/>
-                  </a:schemeClr>
-                </a:solidFill>
-              </a:rPr>
-              <a:t> (e.g., 100-300 dimensions), and </a:t>
-            </a:r>
-            <a:r>
-              <a:rPr lang="en-US" sz="2400" b="1" dirty="0">
-                <a:solidFill>
-                  <a:schemeClr val="accent6">
-                    <a:lumMod val="60000"/>
-                    <a:lumOff val="40000"/>
-                  </a:schemeClr>
-                </a:solidFill>
-              </a:rPr>
-              <a:t>captures context</a:t>
-            </a:r>
-            <a:r>
-              <a:rPr lang="en-US" sz="2400" dirty="0">
-                <a:solidFill>
-                  <a:schemeClr val="accent6">
-                    <a:lumMod val="60000"/>
-                    <a:lumOff val="40000"/>
-                  </a:schemeClr>
-                </a:solidFill>
-              </a:rPr>
-              <a:t> by training on large corpora.</a:t>
-            </a:r>
-          </a:p>
-          <a:p>
-            <a:pPr marL="342900" indent="-342900">
+              <a:t>Improves performance in:</a:t>
+            </a:r>
+          </a:p>
+          <a:p>
+            <a:pPr marL="800100" lvl="1" indent="-342900">
               <a:buFont typeface="Arial" panose="020B0604020202020204" pitchFamily="34" charset="0"/>
               <a:buChar char="•"/>
             </a:pPr>
-            <a:endParaRPr lang="en-US" sz="2400" dirty="0">
-              <a:solidFill>
-                <a:schemeClr val="accent6">
-                  <a:lumMod val="60000"/>
-                  <a:lumOff val="40000"/>
-                </a:schemeClr>
-              </a:solidFill>
-            </a:endParaRPr>
-          </a:p>
-          <a:p>
-            <a:pPr marL="342900" indent="-342900">
+            <a:r>
+              <a:rPr lang="en-US" sz="2400" dirty="0">
+                <a:solidFill>
+                  <a:schemeClr val="accent6">
+                    <a:lumMod val="60000"/>
+                    <a:lumOff val="40000"/>
+                  </a:schemeClr>
+                </a:solidFill>
+              </a:rPr>
+              <a:t>Text classification</a:t>
+            </a:r>
+          </a:p>
+          <a:p>
+            <a:pPr marL="800100" lvl="1" indent="-342900">
               <a:buFont typeface="Arial" panose="020B0604020202020204" pitchFamily="34" charset="0"/>
               <a:buChar char="•"/>
             </a:pPr>
@@ -33405,7 +33367,41 @@
                   </a:schemeClr>
                 </a:solidFill>
               </a:rPr>
-              <a:t>It represents words in a continuous vector space where semantically similar words are mapped to nearby points</a:t>
+              <a:t>Search engines (e.g., Google ranking)</a:t>
+            </a:r>
+          </a:p>
+          <a:p>
+            <a:pPr marL="800100" lvl="1" indent="-342900">
+              <a:buFont typeface="Arial" panose="020B0604020202020204" pitchFamily="34" charset="0"/>
+              <a:buChar char="•"/>
+            </a:pPr>
+            <a:r>
+              <a:rPr lang="en-US" sz="2400" dirty="0">
+                <a:solidFill>
+                  <a:schemeClr val="accent6">
+                    <a:lumMod val="60000"/>
+                    <a:lumOff val="40000"/>
+                  </a:schemeClr>
+                </a:solidFill>
+              </a:rPr>
+              <a:t>Document similarity</a:t>
+            </a:r>
+          </a:p>
+          <a:p>
+            <a:pPr marL="800100" lvl="1" indent="-342900">
+              <a:buFont typeface="Arial" panose="020B0604020202020204" pitchFamily="34" charset="0"/>
+              <a:buChar char="•"/>
+            </a:pPr>
+            <a:r>
+              <a:rPr lang="en-US" sz="2400" dirty="0">
+                <a:solidFill>
+                  <a:schemeClr val="accent6">
+                    <a:lumMod val="60000"/>
+                    <a:lumOff val="40000"/>
+                  </a:schemeClr>
+                </a:solidFill>
+              </a:rPr>
+              <a:t>Keyword extraction</a:t>
             </a:r>
           </a:p>
         </p:txBody>
@@ -33413,7 +33409,7 @@
     </p:spTree>
     <p:extLst>
       <p:ext uri="{BB962C8B-B14F-4D97-AF65-F5344CB8AC3E}">
-        <p14:creationId xmlns:p14="http://schemas.microsoft.com/office/powerpoint/2010/main" val="1655728032"/>
+        <p14:creationId xmlns:p14="http://schemas.microsoft.com/office/powerpoint/2010/main" val="2929780632"/>
       </p:ext>
     </p:extLst>
   </p:cSld>
@@ -33458,7 +33454,7 @@
         </p:spPr>
         <p:txBody>
           <a:bodyPr>
-            <a:normAutofit fontScale="90000"/>
+            <a:normAutofit/>
           </a:bodyPr>
           <a:lstStyle/>
           <a:p>
@@ -33470,10 +33466,7 @@
               <a:rPr lang="en-US" sz="3200" dirty="0" err="1"/>
               <a:t>embeddings</a:t>
             </a:r>
-            <a:r>
-              <a:rPr lang="en-US" sz="3200" dirty="0"/>
-              <a:t>, Word2Vec Architecture</a:t>
-            </a:r>
+            <a:endParaRPr lang="en-US" sz="3200" dirty="0"/>
           </a:p>
         </p:txBody>
       </p:sp>
@@ -33482,7 +33475,7 @@
           <p:cNvPr id="5" name="TextBox 4">
             <a:extLst>
               <a:ext uri="{FF2B5EF4-FFF2-40B4-BE49-F238E27FC236}">
-                <a16:creationId xmlns:a16="http://schemas.microsoft.com/office/drawing/2014/main" id="{5130CB80-58AF-6EE5-2B10-5C88B2019B58}"/>
+                <a16:creationId xmlns:a16="http://schemas.microsoft.com/office/drawing/2014/main" id="{9EB377DB-53A7-59BE-032E-CF8B4DD2B5D9}"/>
               </a:ext>
             </a:extLst>
           </p:cNvPr>
@@ -33491,8 +33484,8 @@
         </p:nvSpPr>
         <p:spPr>
           <a:xfrm>
-            <a:off x="318082" y="1056007"/>
-            <a:ext cx="8586216" cy="3785652"/>
+            <a:off x="162634" y="1984909"/>
+            <a:ext cx="11559974" cy="2677656"/>
           </a:xfrm>
           <a:prstGeom prst="rect">
             <a:avLst/>
@@ -33505,10 +33498,22 @@
           </a:bodyPr>
           <a:lstStyle/>
           <a:p>
-            <a:pPr marL="0" indent="0">
-              <a:buNone/>
+            <a:pPr marL="342900" indent="-342900">
+              <a:buFont typeface="Arial" panose="020B0604020202020204" pitchFamily="34" charset="0"/>
+              <a:buChar char="•"/>
             </a:pPr>
             <a:r>
+              <a:rPr lang="en-US" sz="2400" b="1" dirty="0">
+                <a:solidFill>
+                  <a:schemeClr val="accent6">
+                    <a:lumMod val="60000"/>
+                    <a:lumOff val="40000"/>
+                  </a:schemeClr>
+                </a:solidFill>
+              </a:rPr>
+              <a:t>Word2Vec</a:t>
+            </a:r>
+            <a:r>
               <a:rPr lang="en-US" sz="2400" dirty="0">
                 <a:solidFill>
                   <a:schemeClr val="accent6">
@@ -33517,13 +33522,19 @@
                   </a:schemeClr>
                 </a:solidFill>
               </a:rPr>
-              <a:t>How Word2Vec Works (High Level)</a:t>
-            </a:r>
-          </a:p>
-          <a:p>
-            <a:pPr marL="0" indent="0">
-              <a:buNone/>
-            </a:pPr>
+              <a:t> is a powerful method developed by </a:t>
+            </a:r>
+            <a:r>
+              <a:rPr lang="en-US" sz="2400" b="1" dirty="0">
+                <a:solidFill>
+                  <a:schemeClr val="accent6">
+                    <a:lumMod val="60000"/>
+                    <a:lumOff val="40000"/>
+                  </a:schemeClr>
+                </a:solidFill>
+              </a:rPr>
+              <a:t>Google</a:t>
+            </a:r>
             <a:r>
               <a:rPr lang="en-US" sz="2400" dirty="0">
                 <a:solidFill>
@@ -33533,12 +33544,13 @@
                   </a:schemeClr>
                 </a:solidFill>
               </a:rPr>
-              <a:t>It has two main architectures:</a:t>
-            </a:r>
-          </a:p>
-          <a:p>
-            <a:pPr marL="0" indent="0">
-              <a:buNone/>
+              <a:t> </a:t>
+            </a:r>
+          </a:p>
+          <a:p>
+            <a:pPr marL="342900" indent="-342900">
+              <a:buFont typeface="Arial" panose="020B0604020202020204" pitchFamily="34" charset="0"/>
+              <a:buChar char="•"/>
             </a:pPr>
             <a:endParaRPr lang="en-US" sz="2400" dirty="0">
               <a:solidFill>
@@ -33550,10 +33562,22 @@
             </a:endParaRPr>
           </a:p>
           <a:p>
-            <a:pPr marL="0" indent="0">
-              <a:buNone/>
+            <a:pPr marL="342900" indent="-342900">
+              <a:buFont typeface="Arial" panose="020B0604020202020204" pitchFamily="34" charset="0"/>
+              <a:buChar char="•"/>
             </a:pPr>
             <a:r>
+              <a:rPr lang="en-US" sz="2400" dirty="0">
+                <a:solidFill>
+                  <a:schemeClr val="accent6">
+                    <a:lumMod val="60000"/>
+                    <a:lumOff val="40000"/>
+                  </a:schemeClr>
+                </a:solidFill>
+              </a:rPr>
+              <a:t>Create these embeddings using a neural network. It converts each word into a </a:t>
+            </a:r>
+            <a:r>
               <a:rPr lang="en-US" sz="2400" b="1" dirty="0">
                 <a:solidFill>
                   <a:schemeClr val="accent6">
@@ -33562,13 +33586,8 @@
                   </a:schemeClr>
                 </a:solidFill>
               </a:rPr>
-              <a:t>1. CBOW (Continuous Bag of Words):</a:t>
-            </a:r>
-          </a:p>
-          <a:p>
-            <a:pPr marL="0" indent="0">
-              <a:buNone/>
-            </a:pPr>
+              <a:t>fixed-size vector</a:t>
+            </a:r>
             <a:r>
               <a:rPr lang="en-US" sz="2400" dirty="0">
                 <a:solidFill>
@@ -33578,7 +33597,7 @@
                   </a:schemeClr>
                 </a:solidFill>
               </a:rPr>
-              <a:t>Predicts the </a:t>
+              <a:t> (e.g., 100-300 dimensions), and </a:t>
             </a:r>
             <a:r>
               <a:rPr lang="en-US" sz="2400" b="1" dirty="0">
@@ -33589,7 +33608,7 @@
                   </a:schemeClr>
                 </a:solidFill>
               </a:rPr>
-              <a:t>target</a:t>
+              <a:t>captures context</a:t>
             </a:r>
             <a:r>
               <a:rPr lang="en-US" sz="2400" dirty="0">
@@ -33600,50 +33619,13 @@
                   </a:schemeClr>
                 </a:solidFill>
               </a:rPr>
-              <a:t> word from its </a:t>
-            </a:r>
-            <a:r>
-              <a:rPr lang="en-US" sz="2400" b="1" dirty="0">
-                <a:solidFill>
-                  <a:schemeClr val="accent6">
-                    <a:lumMod val="60000"/>
-                    <a:lumOff val="40000"/>
-                  </a:schemeClr>
-                </a:solidFill>
-              </a:rPr>
-              <a:t>context</a:t>
-            </a:r>
-            <a:r>
-              <a:rPr lang="en-US" sz="2400" dirty="0">
-                <a:solidFill>
-                  <a:schemeClr val="accent6">
-                    <a:lumMod val="60000"/>
-                    <a:lumOff val="40000"/>
-                  </a:schemeClr>
-                </a:solidFill>
-              </a:rPr>
-              <a:t> words.</a:t>
-            </a:r>
-          </a:p>
-          <a:p>
-            <a:pPr marL="0" indent="0">
-              <a:buNone/>
-            </a:pPr>
-            <a:r>
-              <a:rPr lang="en-US" sz="2400" dirty="0">
-                <a:solidFill>
-                  <a:schemeClr val="accent6">
-                    <a:lumMod val="60000"/>
-                    <a:lumOff val="40000"/>
-                  </a:schemeClr>
-                </a:solidFill>
-              </a:rPr>
-              <a:t>Example: "The cat sat on the ___" → Predict: "mat"</a:t>
-            </a:r>
-          </a:p>
-          <a:p>
-            <a:pPr marL="0" indent="0">
-              <a:buNone/>
+              <a:t> by training on large corpora.</a:t>
+            </a:r>
+          </a:p>
+          <a:p>
+            <a:pPr marL="342900" indent="-342900">
+              <a:buFont typeface="Arial" panose="020B0604020202020204" pitchFamily="34" charset="0"/>
+              <a:buChar char="•"/>
             </a:pPr>
             <a:endParaRPr lang="en-US" sz="2400" dirty="0">
               <a:solidFill>
@@ -33655,26 +33637,11 @@
             </a:endParaRPr>
           </a:p>
           <a:p>
-            <a:pPr marL="0" indent="0">
-              <a:buNone/>
+            <a:pPr marL="342900" indent="-342900">
+              <a:buFont typeface="Arial" panose="020B0604020202020204" pitchFamily="34" charset="0"/>
+              <a:buChar char="•"/>
             </a:pPr>
             <a:r>
-              <a:rPr lang="en-US" sz="2400" b="1" dirty="0">
-                <a:solidFill>
-                  <a:schemeClr val="accent6">
-                    <a:lumMod val="60000"/>
-                    <a:lumOff val="40000"/>
-                  </a:schemeClr>
-                </a:solidFill>
-              </a:rPr>
-              <a:t>2. Skip-Gram:</a:t>
-            </a:r>
-          </a:p>
-          <a:p>
-            <a:pPr marL="0" indent="0">
-              <a:buNone/>
-            </a:pPr>
-            <a:r>
               <a:rPr lang="en-US" sz="2400" dirty="0">
                 <a:solidFill>
                   <a:schemeClr val="accent6">
@@ -33683,67 +33650,7 @@
                   </a:schemeClr>
                 </a:solidFill>
               </a:rPr>
-              <a:t>Predicts </a:t>
-            </a:r>
-            <a:r>
-              <a:rPr lang="en-US" sz="2400" b="1" dirty="0">
-                <a:solidFill>
-                  <a:schemeClr val="accent6">
-                    <a:lumMod val="60000"/>
-                    <a:lumOff val="40000"/>
-                  </a:schemeClr>
-                </a:solidFill>
-              </a:rPr>
-              <a:t>context</a:t>
-            </a:r>
-            <a:r>
-              <a:rPr lang="en-US" sz="2400" dirty="0">
-                <a:solidFill>
-                  <a:schemeClr val="accent6">
-                    <a:lumMod val="60000"/>
-                    <a:lumOff val="40000"/>
-                  </a:schemeClr>
-                </a:solidFill>
-              </a:rPr>
-              <a:t> words from a </a:t>
-            </a:r>
-            <a:r>
-              <a:rPr lang="en-US" sz="2400" b="1" dirty="0">
-                <a:solidFill>
-                  <a:schemeClr val="accent6">
-                    <a:lumMod val="60000"/>
-                    <a:lumOff val="40000"/>
-                  </a:schemeClr>
-                </a:solidFill>
-              </a:rPr>
-              <a:t>target</a:t>
-            </a:r>
-            <a:r>
-              <a:rPr lang="en-US" sz="2400" dirty="0">
-                <a:solidFill>
-                  <a:schemeClr val="accent6">
-                    <a:lumMod val="60000"/>
-                    <a:lumOff val="40000"/>
-                  </a:schemeClr>
-                </a:solidFill>
-              </a:rPr>
-              <a:t> word.</a:t>
-            </a:r>
-          </a:p>
-          <a:p>
-            <a:pPr marL="0" indent="0">
-              <a:buNone/>
-            </a:pPr>
-            <a:r>
-              <a:rPr lang="en-US" sz="2400" dirty="0">
-                <a:solidFill>
-                  <a:schemeClr val="accent6">
-                    <a:lumMod val="60000"/>
-                    <a:lumOff val="40000"/>
-                  </a:schemeClr>
-                </a:solidFill>
-              </a:rPr>
-              <a:t>Example: Given "sat" → Predict words like "cat", "on", "the"</a:t>
+              <a:t>It represents words in a continuous vector space where semantically similar words are mapped to nearby points</a:t>
             </a:r>
           </a:p>
         </p:txBody>
@@ -33751,7 +33658,7 @@
     </p:spTree>
     <p:extLst>
       <p:ext uri="{BB962C8B-B14F-4D97-AF65-F5344CB8AC3E}">
-        <p14:creationId xmlns:p14="http://schemas.microsoft.com/office/powerpoint/2010/main" val="3514277113"/>
+        <p14:creationId xmlns:p14="http://schemas.microsoft.com/office/powerpoint/2010/main" val="1655728032"/>
       </p:ext>
     </p:extLst>
   </p:cSld>
@@ -33796,6 +33703,344 @@
         </p:spPr>
         <p:txBody>
           <a:bodyPr>
+            <a:normAutofit fontScale="90000"/>
+          </a:bodyPr>
+          <a:lstStyle/>
+          <a:p>
+            <a:r>
+              <a:rPr lang="en-US" sz="3200" dirty="0"/>
+              <a:t>5. Text Representation: Word </a:t>
+            </a:r>
+            <a:r>
+              <a:rPr lang="en-US" sz="3200" dirty="0" err="1"/>
+              <a:t>embeddings</a:t>
+            </a:r>
+            <a:r>
+              <a:rPr lang="en-US" sz="3200" dirty="0"/>
+              <a:t>, Word2Vec Architecture</a:t>
+            </a:r>
+          </a:p>
+        </p:txBody>
+      </p:sp>
+      <p:sp>
+        <p:nvSpPr>
+          <p:cNvPr id="5" name="TextBox 4">
+            <a:extLst>
+              <a:ext uri="{FF2B5EF4-FFF2-40B4-BE49-F238E27FC236}">
+                <a16:creationId xmlns:a16="http://schemas.microsoft.com/office/drawing/2014/main" id="{5130CB80-58AF-6EE5-2B10-5C88B2019B58}"/>
+              </a:ext>
+            </a:extLst>
+          </p:cNvPr>
+          <p:cNvSpPr txBox="1"/>
+          <p:nvPr/>
+        </p:nvSpPr>
+        <p:spPr>
+          <a:xfrm>
+            <a:off x="318082" y="1056007"/>
+            <a:ext cx="8586216" cy="3785652"/>
+          </a:xfrm>
+          <a:prstGeom prst="rect">
+            <a:avLst/>
+          </a:prstGeom>
+          <a:noFill/>
+        </p:spPr>
+        <p:txBody>
+          <a:bodyPr wrap="square">
+            <a:spAutoFit/>
+          </a:bodyPr>
+          <a:lstStyle/>
+          <a:p>
+            <a:pPr marL="0" indent="0">
+              <a:buNone/>
+            </a:pPr>
+            <a:r>
+              <a:rPr lang="en-US" sz="2400" dirty="0">
+                <a:solidFill>
+                  <a:schemeClr val="accent6">
+                    <a:lumMod val="60000"/>
+                    <a:lumOff val="40000"/>
+                  </a:schemeClr>
+                </a:solidFill>
+              </a:rPr>
+              <a:t>How Word2Vec Works (High Level)</a:t>
+            </a:r>
+          </a:p>
+          <a:p>
+            <a:pPr marL="0" indent="0">
+              <a:buNone/>
+            </a:pPr>
+            <a:r>
+              <a:rPr lang="en-US" sz="2400" dirty="0">
+                <a:solidFill>
+                  <a:schemeClr val="accent6">
+                    <a:lumMod val="60000"/>
+                    <a:lumOff val="40000"/>
+                  </a:schemeClr>
+                </a:solidFill>
+              </a:rPr>
+              <a:t>It has two main architectures:</a:t>
+            </a:r>
+          </a:p>
+          <a:p>
+            <a:pPr marL="0" indent="0">
+              <a:buNone/>
+            </a:pPr>
+            <a:endParaRPr lang="en-US" sz="2400" dirty="0">
+              <a:solidFill>
+                <a:schemeClr val="accent6">
+                  <a:lumMod val="60000"/>
+                  <a:lumOff val="40000"/>
+                </a:schemeClr>
+              </a:solidFill>
+            </a:endParaRPr>
+          </a:p>
+          <a:p>
+            <a:pPr marL="0" indent="0">
+              <a:buNone/>
+            </a:pPr>
+            <a:r>
+              <a:rPr lang="en-US" sz="2400" b="1" dirty="0">
+                <a:solidFill>
+                  <a:schemeClr val="accent6">
+                    <a:lumMod val="60000"/>
+                    <a:lumOff val="40000"/>
+                  </a:schemeClr>
+                </a:solidFill>
+              </a:rPr>
+              <a:t>1. CBOW (Continuous Bag of Words):</a:t>
+            </a:r>
+          </a:p>
+          <a:p>
+            <a:pPr marL="0" indent="0">
+              <a:buNone/>
+            </a:pPr>
+            <a:r>
+              <a:rPr lang="en-US" sz="2400" dirty="0">
+                <a:solidFill>
+                  <a:schemeClr val="accent6">
+                    <a:lumMod val="60000"/>
+                    <a:lumOff val="40000"/>
+                  </a:schemeClr>
+                </a:solidFill>
+              </a:rPr>
+              <a:t>Predicts the </a:t>
+            </a:r>
+            <a:r>
+              <a:rPr lang="en-US" sz="2400" b="1" dirty="0">
+                <a:solidFill>
+                  <a:schemeClr val="accent6">
+                    <a:lumMod val="60000"/>
+                    <a:lumOff val="40000"/>
+                  </a:schemeClr>
+                </a:solidFill>
+              </a:rPr>
+              <a:t>target</a:t>
+            </a:r>
+            <a:r>
+              <a:rPr lang="en-US" sz="2400" dirty="0">
+                <a:solidFill>
+                  <a:schemeClr val="accent6">
+                    <a:lumMod val="60000"/>
+                    <a:lumOff val="40000"/>
+                  </a:schemeClr>
+                </a:solidFill>
+              </a:rPr>
+              <a:t> word from its </a:t>
+            </a:r>
+            <a:r>
+              <a:rPr lang="en-US" sz="2400" b="1" dirty="0">
+                <a:solidFill>
+                  <a:schemeClr val="accent6">
+                    <a:lumMod val="60000"/>
+                    <a:lumOff val="40000"/>
+                  </a:schemeClr>
+                </a:solidFill>
+              </a:rPr>
+              <a:t>context</a:t>
+            </a:r>
+            <a:r>
+              <a:rPr lang="en-US" sz="2400" dirty="0">
+                <a:solidFill>
+                  <a:schemeClr val="accent6">
+                    <a:lumMod val="60000"/>
+                    <a:lumOff val="40000"/>
+                  </a:schemeClr>
+                </a:solidFill>
+              </a:rPr>
+              <a:t> words.</a:t>
+            </a:r>
+          </a:p>
+          <a:p>
+            <a:pPr marL="0" indent="0">
+              <a:buNone/>
+            </a:pPr>
+            <a:r>
+              <a:rPr lang="en-US" sz="2400" dirty="0">
+                <a:solidFill>
+                  <a:schemeClr val="accent6">
+                    <a:lumMod val="60000"/>
+                    <a:lumOff val="40000"/>
+                  </a:schemeClr>
+                </a:solidFill>
+              </a:rPr>
+              <a:t>Example: "The cat sat on the ___" → Predict: "mat"</a:t>
+            </a:r>
+          </a:p>
+          <a:p>
+            <a:pPr marL="0" indent="0">
+              <a:buNone/>
+            </a:pPr>
+            <a:endParaRPr lang="en-US" sz="2400" dirty="0">
+              <a:solidFill>
+                <a:schemeClr val="accent6">
+                  <a:lumMod val="60000"/>
+                  <a:lumOff val="40000"/>
+                </a:schemeClr>
+              </a:solidFill>
+            </a:endParaRPr>
+          </a:p>
+          <a:p>
+            <a:pPr marL="0" indent="0">
+              <a:buNone/>
+            </a:pPr>
+            <a:r>
+              <a:rPr lang="en-US" sz="2400" b="1" dirty="0">
+                <a:solidFill>
+                  <a:schemeClr val="accent6">
+                    <a:lumMod val="60000"/>
+                    <a:lumOff val="40000"/>
+                  </a:schemeClr>
+                </a:solidFill>
+              </a:rPr>
+              <a:t>2. Skip-Gram:</a:t>
+            </a:r>
+          </a:p>
+          <a:p>
+            <a:pPr marL="0" indent="0">
+              <a:buNone/>
+            </a:pPr>
+            <a:r>
+              <a:rPr lang="en-US" sz="2400" dirty="0">
+                <a:solidFill>
+                  <a:schemeClr val="accent6">
+                    <a:lumMod val="60000"/>
+                    <a:lumOff val="40000"/>
+                  </a:schemeClr>
+                </a:solidFill>
+              </a:rPr>
+              <a:t>Predicts </a:t>
+            </a:r>
+            <a:r>
+              <a:rPr lang="en-US" sz="2400" b="1" dirty="0">
+                <a:solidFill>
+                  <a:schemeClr val="accent6">
+                    <a:lumMod val="60000"/>
+                    <a:lumOff val="40000"/>
+                  </a:schemeClr>
+                </a:solidFill>
+              </a:rPr>
+              <a:t>context</a:t>
+            </a:r>
+            <a:r>
+              <a:rPr lang="en-US" sz="2400" dirty="0">
+                <a:solidFill>
+                  <a:schemeClr val="accent6">
+                    <a:lumMod val="60000"/>
+                    <a:lumOff val="40000"/>
+                  </a:schemeClr>
+                </a:solidFill>
+              </a:rPr>
+              <a:t> words from a </a:t>
+            </a:r>
+            <a:r>
+              <a:rPr lang="en-US" sz="2400" b="1" dirty="0">
+                <a:solidFill>
+                  <a:schemeClr val="accent6">
+                    <a:lumMod val="60000"/>
+                    <a:lumOff val="40000"/>
+                  </a:schemeClr>
+                </a:solidFill>
+              </a:rPr>
+              <a:t>target</a:t>
+            </a:r>
+            <a:r>
+              <a:rPr lang="en-US" sz="2400" dirty="0">
+                <a:solidFill>
+                  <a:schemeClr val="accent6">
+                    <a:lumMod val="60000"/>
+                    <a:lumOff val="40000"/>
+                  </a:schemeClr>
+                </a:solidFill>
+              </a:rPr>
+              <a:t> word.</a:t>
+            </a:r>
+          </a:p>
+          <a:p>
+            <a:pPr marL="0" indent="0">
+              <a:buNone/>
+            </a:pPr>
+            <a:r>
+              <a:rPr lang="en-US" sz="2400" dirty="0">
+                <a:solidFill>
+                  <a:schemeClr val="accent6">
+                    <a:lumMod val="60000"/>
+                    <a:lumOff val="40000"/>
+                  </a:schemeClr>
+                </a:solidFill>
+              </a:rPr>
+              <a:t>Example: Given "sat" → Predict words like "cat", "on", "the"</a:t>
+            </a:r>
+          </a:p>
+        </p:txBody>
+      </p:sp>
+    </p:spTree>
+    <p:extLst>
+      <p:ext uri="{BB962C8B-B14F-4D97-AF65-F5344CB8AC3E}">
+        <p14:creationId xmlns:p14="http://schemas.microsoft.com/office/powerpoint/2010/main" val="3514277113"/>
+      </p:ext>
+    </p:extLst>
+  </p:cSld>
+  <p:clrMapOvr>
+    <a:masterClrMapping/>
+  </p:clrMapOvr>
+</p:sld>
+</file>
+
+<file path=ppt/slides/slide44.xml><?xml version="1.0" encoding="utf-8"?>
+<p:sld xmlns:a="http://schemas.openxmlformats.org/drawingml/2006/main" xmlns:r="http://schemas.openxmlformats.org/officeDocument/2006/relationships" xmlns:p="http://schemas.openxmlformats.org/presentationml/2006/main">
+  <p:cSld>
+    <p:spTree>
+      <p:nvGrpSpPr>
+        <p:cNvPr id="1" name=""/>
+        <p:cNvGrpSpPr/>
+        <p:nvPr/>
+      </p:nvGrpSpPr>
+      <p:grpSpPr>
+        <a:xfrm>
+          <a:off x="0" y="0"/>
+          <a:ext cx="0" cy="0"/>
+          <a:chOff x="0" y="0"/>
+          <a:chExt cx="0" cy="0"/>
+        </a:xfrm>
+      </p:grpSpPr>
+      <p:sp>
+        <p:nvSpPr>
+          <p:cNvPr id="2" name="Title 1"/>
+          <p:cNvSpPr>
+            <a:spLocks noGrp="1"/>
+          </p:cNvSpPr>
+          <p:nvPr>
+            <p:ph type="title"/>
+          </p:nvPr>
+        </p:nvSpPr>
+        <p:spPr>
+          <a:xfrm>
+            <a:off x="318082" y="188956"/>
+            <a:ext cx="10515600" cy="582831"/>
+          </a:xfrm>
+        </p:spPr>
+        <p:txBody>
+          <a:bodyPr>
             <a:normAutofit/>
           </a:bodyPr>
           <a:lstStyle/>
@@ -34184,7 +34429,7 @@
 </p:sld>
 </file>
 
-<file path=ppt/slides/slide44.xml><?xml version="1.0" encoding="utf-8"?>
+<file path=ppt/slides/slide45.xml><?xml version="1.0" encoding="utf-8"?>
 <p:sld xmlns:a="http://schemas.openxmlformats.org/drawingml/2006/main" xmlns:r="http://schemas.openxmlformats.org/officeDocument/2006/relationships" xmlns:p="http://schemas.openxmlformats.org/presentationml/2006/main">
   <p:cSld>
     <p:spTree>

--- a/deep_learning/3_RNN_NLP/2_NLP_2_Detailed/2_NLP_process.pptx
+++ b/deep_learning/3_RNN_NLP/2_NLP_2_Detailed/2_NLP_process.pptx
@@ -27,15 +27,15 @@
     <p:sldId id="286" r:id="rId15"/>
     <p:sldId id="295" r:id="rId16"/>
     <p:sldId id="280" r:id="rId17"/>
-    <p:sldId id="296" r:id="rId18"/>
-    <p:sldId id="259" r:id="rId19"/>
-    <p:sldId id="262" r:id="rId20"/>
-    <p:sldId id="297" r:id="rId21"/>
-    <p:sldId id="263" r:id="rId22"/>
-    <p:sldId id="287" r:id="rId23"/>
-    <p:sldId id="261" r:id="rId24"/>
-    <p:sldId id="265" r:id="rId25"/>
-    <p:sldId id="266" r:id="rId26"/>
+    <p:sldId id="259" r:id="rId18"/>
+    <p:sldId id="262" r:id="rId19"/>
+    <p:sldId id="297" r:id="rId20"/>
+    <p:sldId id="263" r:id="rId21"/>
+    <p:sldId id="287" r:id="rId22"/>
+    <p:sldId id="261" r:id="rId23"/>
+    <p:sldId id="265" r:id="rId24"/>
+    <p:sldId id="266" r:id="rId25"/>
+    <p:sldId id="303" r:id="rId26"/>
     <p:sldId id="267" r:id="rId27"/>
     <p:sldId id="268" r:id="rId28"/>
     <p:sldId id="264" r:id="rId29"/>
@@ -6965,7 +6965,7 @@
           <a:p>
             <a:fld id="{7BAEECA8-D063-486F-AE31-5020270C1449}" type="datetimeFigureOut">
               <a:rPr lang="en-US" smtClean="0"/>
-              <a:t>4/26/2026</a:t>
+              <a:t>5/3/2026</a:t>
             </a:fld>
             <a:endParaRPr lang="en-US"/>
           </a:p>
@@ -7142,7 +7142,7 @@
           <a:p>
             <a:fld id="{CB233BD1-3BA8-448D-9D08-7846095EA517}" type="datetimeFigureOut">
               <a:rPr lang="en-US" smtClean="0"/>
-              <a:t>4/26/2026</a:t>
+              <a:t>5/3/2026</a:t>
             </a:fld>
             <a:endParaRPr lang="en-US"/>
           </a:p>
@@ -7556,7 +7556,7 @@
           <a:p>
             <a:fld id="{6383FAE1-13DE-4511-8C1B-C8AFB720664C}" type="datetimeFigureOut">
               <a:rPr lang="en-US" smtClean="0"/>
-              <a:t>4/26/2026</a:t>
+              <a:t>5/3/2026</a:t>
             </a:fld>
             <a:endParaRPr lang="en-US"/>
           </a:p>
@@ -7754,7 +7754,7 @@
           <a:p>
             <a:fld id="{6383FAE1-13DE-4511-8C1B-C8AFB720664C}" type="datetimeFigureOut">
               <a:rPr lang="en-US" smtClean="0"/>
-              <a:t>4/26/2026</a:t>
+              <a:t>5/3/2026</a:t>
             </a:fld>
             <a:endParaRPr lang="en-US"/>
           </a:p>
@@ -7962,7 +7962,7 @@
           <a:p>
             <a:fld id="{6383FAE1-13DE-4511-8C1B-C8AFB720664C}" type="datetimeFigureOut">
               <a:rPr lang="en-US" smtClean="0"/>
-              <a:t>4/26/2026</a:t>
+              <a:t>5/3/2026</a:t>
             </a:fld>
             <a:endParaRPr lang="en-US"/>
           </a:p>
@@ -8160,7 +8160,7 @@
           <a:p>
             <a:fld id="{6383FAE1-13DE-4511-8C1B-C8AFB720664C}" type="datetimeFigureOut">
               <a:rPr lang="en-US" smtClean="0"/>
-              <a:t>4/26/2026</a:t>
+              <a:t>5/3/2026</a:t>
             </a:fld>
             <a:endParaRPr lang="en-US"/>
           </a:p>
@@ -8435,7 +8435,7 @@
           <a:p>
             <a:fld id="{6383FAE1-13DE-4511-8C1B-C8AFB720664C}" type="datetimeFigureOut">
               <a:rPr lang="en-US" smtClean="0"/>
-              <a:t>4/26/2026</a:t>
+              <a:t>5/3/2026</a:t>
             </a:fld>
             <a:endParaRPr lang="en-US"/>
           </a:p>
@@ -8700,7 +8700,7 @@
           <a:p>
             <a:fld id="{6383FAE1-13DE-4511-8C1B-C8AFB720664C}" type="datetimeFigureOut">
               <a:rPr lang="en-US" smtClean="0"/>
-              <a:t>4/26/2026</a:t>
+              <a:t>5/3/2026</a:t>
             </a:fld>
             <a:endParaRPr lang="en-US"/>
           </a:p>
@@ -9112,7 +9112,7 @@
           <a:p>
             <a:fld id="{6383FAE1-13DE-4511-8C1B-C8AFB720664C}" type="datetimeFigureOut">
               <a:rPr lang="en-US" smtClean="0"/>
-              <a:t>4/26/2026</a:t>
+              <a:t>5/3/2026</a:t>
             </a:fld>
             <a:endParaRPr lang="en-US"/>
           </a:p>
@@ -9253,7 +9253,7 @@
           <a:p>
             <a:fld id="{6383FAE1-13DE-4511-8C1B-C8AFB720664C}" type="datetimeFigureOut">
               <a:rPr lang="en-US" smtClean="0"/>
-              <a:t>4/26/2026</a:t>
+              <a:t>5/3/2026</a:t>
             </a:fld>
             <a:endParaRPr lang="en-US"/>
           </a:p>
@@ -9366,7 +9366,7 @@
           <a:p>
             <a:fld id="{6383FAE1-13DE-4511-8C1B-C8AFB720664C}" type="datetimeFigureOut">
               <a:rPr lang="en-US" smtClean="0"/>
-              <a:t>4/26/2026</a:t>
+              <a:t>5/3/2026</a:t>
             </a:fld>
             <a:endParaRPr lang="en-US"/>
           </a:p>
@@ -9677,7 +9677,7 @@
           <a:p>
             <a:fld id="{6383FAE1-13DE-4511-8C1B-C8AFB720664C}" type="datetimeFigureOut">
               <a:rPr lang="en-US" smtClean="0"/>
-              <a:t>4/26/2026</a:t>
+              <a:t>5/3/2026</a:t>
             </a:fld>
             <a:endParaRPr lang="en-US"/>
           </a:p>
@@ -9968,7 +9968,7 @@
           <a:p>
             <a:fld id="{6383FAE1-13DE-4511-8C1B-C8AFB720664C}" type="datetimeFigureOut">
               <a:rPr lang="en-US" smtClean="0"/>
-              <a:t>4/26/2026</a:t>
+              <a:t>5/3/2026</a:t>
             </a:fld>
             <a:endParaRPr lang="en-US"/>
           </a:p>
@@ -10212,7 +10212,7 @@
           <a:p>
             <a:fld id="{6383FAE1-13DE-4511-8C1B-C8AFB720664C}" type="datetimeFigureOut">
               <a:rPr lang="en-US" smtClean="0"/>
-              <a:t>4/26/2026</a:t>
+              <a:t>5/3/2026</a:t>
             </a:fld>
             <a:endParaRPr lang="en-US"/>
           </a:p>
@@ -12931,18 +12931,18 @@
               <a:buNone/>
             </a:pPr>
             <a:r>
-              <a:rPr lang="en-US" sz="2000" b="1" dirty="0">
-                <a:solidFill>
-                  <a:schemeClr val="accent6">
-                    <a:lumMod val="60000"/>
-                    <a:lumOff val="40000"/>
-                  </a:schemeClr>
-                </a:solidFill>
-              </a:rPr>
-              <a:t>4.4) Adding Noise:</a:t>
-            </a:r>
-            <a:r>
-              <a:rPr lang="en-US" sz="2000" dirty="0">
+              <a:rPr lang="en-US" sz="2400" b="1" dirty="0">
+                <a:solidFill>
+                  <a:schemeClr val="accent6">
+                    <a:lumMod val="60000"/>
+                    <a:lumOff val="40000"/>
+                  </a:schemeClr>
+                </a:solidFill>
+              </a:rPr>
+              <a:t>d.4) Adding Noise:</a:t>
+            </a:r>
+            <a:r>
+              <a:rPr lang="en-US" sz="2400" dirty="0">
                 <a:solidFill>
                   <a:schemeClr val="accent6">
                     <a:lumMod val="60000"/>
@@ -12958,7 +12958,7 @@
               <a:buNone/>
             </a:pPr>
             <a:r>
-              <a:rPr lang="en-US" sz="2000" dirty="0">
+              <a:rPr lang="en-US" sz="2400" dirty="0">
                 <a:solidFill>
                   <a:schemeClr val="accent6">
                     <a:lumMod val="60000"/>
@@ -12975,15 +12975,26 @@
               <a:buNone/>
             </a:pPr>
             <a:r>
-              <a:rPr lang="en-US" sz="2000" dirty="0">
-                <a:solidFill>
-                  <a:schemeClr val="accent6">
-                    <a:lumMod val="60000"/>
-                    <a:lumOff val="40000"/>
-                  </a:schemeClr>
-                </a:solidFill>
-              </a:rPr>
-              <a:t>Original Sentence: "The manager approved the new policy yesterday."</a:t>
+              <a:rPr lang="en-US" sz="2400" dirty="0">
+                <a:solidFill>
+                  <a:schemeClr val="accent6">
+                    <a:lumMod val="60000"/>
+                    <a:lumOff val="40000"/>
+                  </a:schemeClr>
+                </a:solidFill>
+              </a:rPr>
+              <a:t>Original Sentence: </a:t>
+            </a:r>
+            <a:r>
+              <a:rPr lang="en-US" sz="2400" b="1" dirty="0">
+                <a:solidFill>
+                  <a:schemeClr val="accent4">
+                    <a:lumMod val="60000"/>
+                    <a:lumOff val="40000"/>
+                  </a:schemeClr>
+                </a:solidFill>
+              </a:rPr>
+              <a:t>"The manager approved the new policy yesterday."</a:t>
             </a:r>
           </a:p>
           <a:p>
@@ -12991,102 +13002,7 @@
               <a:buFont typeface="Arial" panose="020B0604020202020204" pitchFamily="34" charset="0"/>
               <a:buNone/>
             </a:pPr>
-            <a:r>
-              <a:rPr lang="en-US" sz="2000" dirty="0">
-                <a:solidFill>
-                  <a:schemeClr val="accent6">
-                    <a:lumMod val="60000"/>
-                    <a:lumOff val="40000"/>
-                  </a:schemeClr>
-                </a:solidFill>
-              </a:rPr>
-              <a:t>Noisy Paraphrased Versions:</a:t>
-            </a:r>
-          </a:p>
-          <a:p>
-            <a:pPr marL="0" indent="0">
-              <a:buFont typeface="Arial" panose="020B0604020202020204" pitchFamily="34" charset="0"/>
-              <a:buNone/>
-            </a:pPr>
-            <a:r>
-              <a:rPr lang="en-US" sz="2000" dirty="0">
-                <a:solidFill>
-                  <a:schemeClr val="accent6">
-                    <a:lumMod val="60000"/>
-                    <a:lumOff val="40000"/>
-                  </a:schemeClr>
-                </a:solidFill>
-              </a:rPr>
-              <a:t>Character Swap (common typo): "The </a:t>
-            </a:r>
-            <a:r>
-              <a:rPr lang="en-US" sz="2000" b="1" dirty="0" err="1">
-                <a:solidFill>
-                  <a:schemeClr val="accent6">
-                    <a:lumMod val="60000"/>
-                    <a:lumOff val="40000"/>
-                  </a:schemeClr>
-                </a:solidFill>
-              </a:rPr>
-              <a:t>mnaager</a:t>
-            </a:r>
-            <a:r>
-              <a:rPr lang="en-US" sz="2000" dirty="0">
-                <a:solidFill>
-                  <a:schemeClr val="accent6">
-                    <a:lumMod val="60000"/>
-                    <a:lumOff val="40000"/>
-                  </a:schemeClr>
-                </a:solidFill>
-              </a:rPr>
-              <a:t> approved the new policy yesterday."</a:t>
-            </a:r>
-          </a:p>
-          <a:p>
-            <a:pPr marL="0" indent="0">
-              <a:buFont typeface="Arial" panose="020B0604020202020204" pitchFamily="34" charset="0"/>
-              <a:buNone/>
-            </a:pPr>
-            <a:r>
-              <a:rPr lang="en-US" sz="2000" dirty="0">
-                <a:solidFill>
-                  <a:schemeClr val="accent6">
-                    <a:lumMod val="60000"/>
-                    <a:lumOff val="40000"/>
-                  </a:schemeClr>
-                </a:solidFill>
-              </a:rPr>
-              <a:t>(“manager” → “</a:t>
-            </a:r>
-            <a:r>
-              <a:rPr lang="en-US" sz="2000" dirty="0" err="1">
-                <a:solidFill>
-                  <a:schemeClr val="accent6">
-                    <a:lumMod val="60000"/>
-                    <a:lumOff val="40000"/>
-                  </a:schemeClr>
-                </a:solidFill>
-              </a:rPr>
-              <a:t>mnaager</a:t>
-            </a:r>
-            <a:r>
-              <a:rPr lang="en-US" sz="2000" dirty="0">
-                <a:solidFill>
-                  <a:schemeClr val="accent6">
-                    <a:lumMod val="60000"/>
-                    <a:lumOff val="40000"/>
-                  </a:schemeClr>
-                </a:solidFill>
-              </a:rPr>
-              <a:t>”)</a:t>
-            </a:r>
-          </a:p>
-          <a:p>
-            <a:pPr marL="0" indent="0">
-              <a:buFont typeface="Arial" panose="020B0604020202020204" pitchFamily="34" charset="0"/>
-              <a:buNone/>
-            </a:pPr>
-            <a:endParaRPr lang="en-US" sz="2000" dirty="0">
+            <a:endParaRPr lang="en-US" sz="2400" dirty="0">
               <a:solidFill>
                 <a:schemeClr val="accent6">
                   <a:lumMod val="60000"/>
@@ -13101,37 +13017,15 @@
               <a:buNone/>
             </a:pPr>
             <a:r>
-              <a:rPr lang="en-US" sz="2000" dirty="0">
-                <a:solidFill>
-                  <a:schemeClr val="accent6">
-                    <a:lumMod val="60000"/>
-                    <a:lumOff val="40000"/>
-                  </a:schemeClr>
-                </a:solidFill>
-              </a:rPr>
-              <a:t>Character Deletion: "The </a:t>
-            </a:r>
-            <a:r>
-              <a:rPr lang="en-US" sz="2000" b="1" dirty="0">
-                <a:solidFill>
-                  <a:schemeClr val="accent6">
-                    <a:lumMod val="60000"/>
-                    <a:lumOff val="40000"/>
-                  </a:schemeClr>
-                </a:solidFill>
-              </a:rPr>
-              <a:t>manger</a:t>
-            </a:r>
-            <a:r>
-              <a:rPr lang="en-US" sz="2000" dirty="0">
-                <a:solidFill>
-                  <a:schemeClr val="accent6">
-                    <a:lumMod val="60000"/>
-                    <a:lumOff val="40000"/>
-                  </a:schemeClr>
-                </a:solidFill>
-              </a:rPr>
-              <a:t> approved the new policy yesterday." </a:t>
+              <a:rPr lang="en-US" sz="2400" dirty="0">
+                <a:solidFill>
+                  <a:schemeClr val="accent6">
+                    <a:lumMod val="60000"/>
+                    <a:lumOff val="40000"/>
+                  </a:schemeClr>
+                </a:solidFill>
+              </a:rPr>
+              <a:t>Noisy Paraphrased Versions:</a:t>
             </a:r>
           </a:p>
           <a:p>
@@ -13140,15 +13034,48 @@
               <a:buNone/>
             </a:pPr>
             <a:r>
-              <a:rPr lang="en-US" sz="2000" dirty="0">
-                <a:solidFill>
-                  <a:schemeClr val="accent6">
-                    <a:lumMod val="60000"/>
-                    <a:lumOff val="40000"/>
-                  </a:schemeClr>
-                </a:solidFill>
-              </a:rPr>
-              <a:t>(“manager” → “manger” — which also creates a valid but incorrect word)</a:t>
+              <a:rPr lang="en-US" sz="2400" dirty="0">
+                <a:solidFill>
+                  <a:schemeClr val="accent6">
+                    <a:lumMod val="60000"/>
+                    <a:lumOff val="40000"/>
+                  </a:schemeClr>
+                </a:solidFill>
+              </a:rPr>
+              <a:t>Character Swap (common typo): </a:t>
+            </a:r>
+            <a:r>
+              <a:rPr lang="en-US" sz="2400" b="1" dirty="0">
+                <a:solidFill>
+                  <a:schemeClr val="accent6">
+                    <a:lumMod val="60000"/>
+                    <a:lumOff val="40000"/>
+                  </a:schemeClr>
+                </a:solidFill>
+              </a:rPr>
+              <a:t>"The </a:t>
+            </a:r>
+            <a:r>
+              <a:rPr lang="en-US" sz="2400" b="1" dirty="0" err="1">
+                <a:solidFill>
+                  <a:schemeClr val="accent6">
+                    <a:lumMod val="60000"/>
+                    <a:lumOff val="40000"/>
+                  </a:schemeClr>
+                </a:solidFill>
+              </a:rPr>
+              <a:t>mnaager</a:t>
+            </a:r>
+            <a:r>
+              <a:rPr lang="en-US" sz="2400" b="1" dirty="0">
+                <a:solidFill>
+                  <a:schemeClr val="accent6">
+                    <a:lumMod val="60000"/>
+                    <a:lumOff val="40000"/>
+                  </a:schemeClr>
+                </a:solidFill>
+              </a:rPr>
+              <a:t> approved the new policy yesterday."</a:t>
             </a:r>
           </a:p>
           <a:p>
@@ -13156,7 +13083,46 @@
               <a:buFont typeface="Arial" panose="020B0604020202020204" pitchFamily="34" charset="0"/>
               <a:buNone/>
             </a:pPr>
-            <a:endParaRPr lang="en-US" sz="2000" dirty="0">
+            <a:r>
+              <a:rPr lang="en-US" sz="2400" dirty="0">
+                <a:solidFill>
+                  <a:schemeClr val="accent6">
+                    <a:lumMod val="60000"/>
+                    <a:lumOff val="40000"/>
+                  </a:schemeClr>
+                </a:solidFill>
+              </a:rPr>
+              <a:t>(“manager” → “</a:t>
+            </a:r>
+            <a:r>
+              <a:rPr lang="en-US" sz="2400" dirty="0" err="1">
+                <a:solidFill>
+                  <a:schemeClr val="accent6">
+                    <a:lumMod val="60000"/>
+                    <a:lumOff val="40000"/>
+                  </a:schemeClr>
+                </a:solidFill>
+              </a:rPr>
+              <a:t>mnaager</a:t>
+            </a:r>
+            <a:r>
+              <a:rPr lang="en-US" sz="2400" dirty="0">
+                <a:solidFill>
+                  <a:schemeClr val="accent6">
+                    <a:lumMod val="60000"/>
+                    <a:lumOff val="40000"/>
+                  </a:schemeClr>
+                </a:solidFill>
+              </a:rPr>
+              <a:t>”)</a:t>
+            </a:r>
+          </a:p>
+          <a:p>
+            <a:pPr marL="0" indent="0">
+              <a:buFont typeface="Arial" panose="020B0604020202020204" pitchFamily="34" charset="0"/>
+              <a:buNone/>
+            </a:pPr>
+            <a:endParaRPr lang="en-US" sz="2400" dirty="0">
               <a:solidFill>
                 <a:schemeClr val="accent6">
                   <a:lumMod val="60000"/>
@@ -13171,15 +13137,37 @@
               <a:buNone/>
             </a:pPr>
             <a:r>
-              <a:rPr lang="en-US" sz="2000" dirty="0">
-                <a:solidFill>
-                  <a:schemeClr val="accent6">
-                    <a:lumMod val="60000"/>
-                    <a:lumOff val="40000"/>
-                  </a:schemeClr>
-                </a:solidFill>
-              </a:rPr>
-              <a:t>Missing Word: "Manager approved new policy yesterday."</a:t>
+              <a:rPr lang="en-US" sz="2400" dirty="0">
+                <a:solidFill>
+                  <a:schemeClr val="accent6">
+                    <a:lumMod val="60000"/>
+                    <a:lumOff val="40000"/>
+                  </a:schemeClr>
+                </a:solidFill>
+              </a:rPr>
+              <a:t>Character Deletion: </a:t>
+            </a:r>
+            <a:r>
+              <a:rPr lang="en-US" sz="2400" b="1" dirty="0">
+                <a:solidFill>
+                  <a:schemeClr val="accent6">
+                    <a:lumMod val="60000"/>
+                    <a:lumOff val="40000"/>
+                  </a:schemeClr>
+                </a:solidFill>
+              </a:rPr>
+              <a:t>"The manger approved the new policy yesterday."</a:t>
+            </a:r>
+            <a:r>
+              <a:rPr lang="en-US" sz="2400" dirty="0">
+                <a:solidFill>
+                  <a:schemeClr val="accent6">
+                    <a:lumMod val="60000"/>
+                    <a:lumOff val="40000"/>
+                  </a:schemeClr>
+                </a:solidFill>
+              </a:rPr>
+              <a:t> </a:t>
             </a:r>
           </a:p>
           <a:p>
@@ -13188,7 +13176,66 @@
               <a:buNone/>
             </a:pPr>
             <a:r>
-              <a:rPr lang="en-US" sz="2000" dirty="0">
+              <a:rPr lang="en-US" sz="2400" dirty="0">
+                <a:solidFill>
+                  <a:schemeClr val="accent6">
+                    <a:lumMod val="60000"/>
+                    <a:lumOff val="40000"/>
+                  </a:schemeClr>
+                </a:solidFill>
+              </a:rPr>
+              <a:t>(“manager” → “manger” — which also creates a valid but incorrect word)</a:t>
+            </a:r>
+          </a:p>
+          <a:p>
+            <a:pPr marL="0" indent="0">
+              <a:buFont typeface="Arial" panose="020B0604020202020204" pitchFamily="34" charset="0"/>
+              <a:buNone/>
+            </a:pPr>
+            <a:endParaRPr lang="en-US" sz="2400" dirty="0">
+              <a:solidFill>
+                <a:schemeClr val="accent6">
+                  <a:lumMod val="60000"/>
+                  <a:lumOff val="40000"/>
+                </a:schemeClr>
+              </a:solidFill>
+            </a:endParaRPr>
+          </a:p>
+          <a:p>
+            <a:pPr marL="0" indent="0">
+              <a:buFont typeface="Arial" panose="020B0604020202020204" pitchFamily="34" charset="0"/>
+              <a:buNone/>
+            </a:pPr>
+            <a:r>
+              <a:rPr lang="en-US" sz="2400" dirty="0">
+                <a:solidFill>
+                  <a:schemeClr val="accent6">
+                    <a:lumMod val="60000"/>
+                    <a:lumOff val="40000"/>
+                  </a:schemeClr>
+                </a:solidFill>
+              </a:rPr>
+              <a:t>Missing Word: </a:t>
+            </a:r>
+            <a:r>
+              <a:rPr lang="en-US" sz="2400" b="1" dirty="0">
+                <a:solidFill>
+                  <a:schemeClr val="accent6">
+                    <a:lumMod val="60000"/>
+                    <a:lumOff val="40000"/>
+                  </a:schemeClr>
+                </a:solidFill>
+              </a:rPr>
+              <a:t>"Manager approved new policy yesterday."</a:t>
+            </a:r>
+          </a:p>
+          <a:p>
+            <a:pPr marL="0" indent="0">
+              <a:buFont typeface="Arial" panose="020B0604020202020204" pitchFamily="34" charset="0"/>
+              <a:buNone/>
+            </a:pPr>
+            <a:r>
+              <a:rPr lang="en-US" sz="2400" dirty="0">
                 <a:solidFill>
                   <a:schemeClr val="accent6">
                     <a:lumMod val="60000"/>
@@ -13475,7 +13522,7 @@
               <a:buNone/>
             </a:pPr>
             <a:r>
-              <a:rPr lang="en-US" sz="2000" b="1" dirty="0">
+              <a:rPr lang="en-US" sz="2400" b="1" dirty="0">
                 <a:solidFill>
                   <a:schemeClr val="accent6">
                     <a:lumMod val="60000"/>
@@ -13486,7 +13533,7 @@
               <a:t>4.4) Adding Noise:</a:t>
             </a:r>
             <a:r>
-              <a:rPr lang="en-US" sz="2000" dirty="0">
+              <a:rPr lang="en-US" sz="2400" dirty="0">
                 <a:solidFill>
                   <a:schemeClr val="accent6">
                     <a:lumMod val="60000"/>
@@ -13502,7 +13549,7 @@
               <a:buFont typeface="Arial" panose="020B0604020202020204" pitchFamily="34" charset="0"/>
               <a:buNone/>
             </a:pPr>
-            <a:endParaRPr lang="en-US" sz="2000" dirty="0">
+            <a:endParaRPr lang="en-US" sz="2400" dirty="0">
               <a:solidFill>
                 <a:schemeClr val="accent6">
                   <a:lumMod val="60000"/>
@@ -13517,15 +13564,26 @@
               <a:buNone/>
             </a:pPr>
             <a:r>
-              <a:rPr lang="en-US" sz="2000" dirty="0">
-                <a:solidFill>
-                  <a:schemeClr val="accent6">
-                    <a:lumMod val="60000"/>
-                    <a:lumOff val="40000"/>
-                  </a:schemeClr>
-                </a:solidFill>
-              </a:rPr>
-              <a:t>Homophone Confusion: "The manager approved the knew policy yesterday."</a:t>
+              <a:rPr lang="en-US" sz="2400" dirty="0">
+                <a:solidFill>
+                  <a:schemeClr val="accent6">
+                    <a:lumMod val="60000"/>
+                    <a:lumOff val="40000"/>
+                  </a:schemeClr>
+                </a:solidFill>
+              </a:rPr>
+              <a:t>Homophone Confusion: </a:t>
+            </a:r>
+            <a:r>
+              <a:rPr lang="en-US" sz="2400" b="1" dirty="0">
+                <a:solidFill>
+                  <a:schemeClr val="accent6">
+                    <a:lumMod val="60000"/>
+                    <a:lumOff val="40000"/>
+                  </a:schemeClr>
+                </a:solidFill>
+              </a:rPr>
+              <a:t>"The manager approved the knew policy yesterday."</a:t>
             </a:r>
           </a:p>
           <a:p>
@@ -13534,7 +13592,7 @@
               <a:buNone/>
             </a:pPr>
             <a:r>
-              <a:rPr lang="en-US" sz="2000" dirty="0">
+              <a:rPr lang="en-US" sz="2400" dirty="0">
                 <a:solidFill>
                   <a:schemeClr val="accent6">
                     <a:lumMod val="60000"/>
@@ -13550,7 +13608,7 @@
               <a:buFont typeface="Arial" panose="020B0604020202020204" pitchFamily="34" charset="0"/>
               <a:buNone/>
             </a:pPr>
-            <a:endParaRPr lang="en-US" sz="2000" dirty="0">
+            <a:endParaRPr lang="en-US" sz="2400" dirty="0">
               <a:solidFill>
                 <a:schemeClr val="accent6">
                   <a:lumMod val="60000"/>
@@ -13565,18 +13623,29 @@
               <a:buNone/>
             </a:pPr>
             <a:r>
-              <a:rPr lang="en-US" sz="2000" dirty="0">
-                <a:solidFill>
-                  <a:schemeClr val="accent6">
-                    <a:lumMod val="60000"/>
-                    <a:lumOff val="40000"/>
-                  </a:schemeClr>
-                </a:solidFill>
-              </a:rPr>
-              <a:t>Keyboard Proximity Error: "The manager </a:t>
-            </a:r>
-            <a:r>
-              <a:rPr lang="en-US" sz="2000" dirty="0" err="1">
+              <a:rPr lang="en-US" sz="2400" dirty="0">
+                <a:solidFill>
+                  <a:schemeClr val="accent6">
+                    <a:lumMod val="60000"/>
+                    <a:lumOff val="40000"/>
+                  </a:schemeClr>
+                </a:solidFill>
+              </a:rPr>
+              <a:t>Keyboard Proximity Error: </a:t>
+            </a:r>
+            <a:r>
+              <a:rPr lang="en-US" sz="2400" b="1" dirty="0">
+                <a:solidFill>
+                  <a:schemeClr val="accent6">
+                    <a:lumMod val="60000"/>
+                    <a:lumOff val="40000"/>
+                  </a:schemeClr>
+                </a:solidFill>
+              </a:rPr>
+              <a:t>"The manager </a:t>
+            </a:r>
+            <a:r>
+              <a:rPr lang="en-US" sz="2400" b="1" dirty="0" err="1">
                 <a:solidFill>
                   <a:schemeClr val="accent6">
                     <a:lumMod val="60000"/>
@@ -13587,7 +13656,7 @@
               <a:t>approvdd</a:t>
             </a:r>
             <a:r>
-              <a:rPr lang="en-US" sz="2000" dirty="0">
+              <a:rPr lang="en-US" sz="2400" b="1" dirty="0">
                 <a:solidFill>
                   <a:schemeClr val="accent6">
                     <a:lumMod val="60000"/>
@@ -13604,7 +13673,7 @@
               <a:buNone/>
             </a:pPr>
             <a:r>
-              <a:rPr lang="en-US" sz="2000" dirty="0">
+              <a:rPr lang="en-US" sz="2400" dirty="0">
                 <a:solidFill>
                   <a:schemeClr val="accent6">
                     <a:lumMod val="60000"/>
@@ -13923,225 +13992,6 @@
 </file>
 
 <file path=ppt/slides/slide17.xml><?xml version="1.0" encoding="utf-8"?>
-<p:sld xmlns:a="http://schemas.openxmlformats.org/drawingml/2006/main" xmlns:r="http://schemas.openxmlformats.org/officeDocument/2006/relationships" xmlns:p="http://schemas.openxmlformats.org/presentationml/2006/main">
-  <p:cSld>
-    <p:spTree>
-      <p:nvGrpSpPr>
-        <p:cNvPr id="1" name="">
-          <a:extLst>
-            <a:ext uri="{FF2B5EF4-FFF2-40B4-BE49-F238E27FC236}">
-              <a16:creationId xmlns:a16="http://schemas.microsoft.com/office/drawing/2014/main" id="{595CA1E2-08C4-07AE-A4BD-0CB5CE60009C}"/>
-            </a:ext>
-          </a:extLst>
-        </p:cNvPr>
-        <p:cNvGrpSpPr/>
-        <p:nvPr/>
-      </p:nvGrpSpPr>
-      <p:grpSpPr>
-        <a:xfrm>
-          <a:off x="0" y="0"/>
-          <a:ext cx="0" cy="0"/>
-          <a:chOff x="0" y="0"/>
-          <a:chExt cx="0" cy="0"/>
-        </a:xfrm>
-      </p:grpSpPr>
-      <p:sp>
-        <p:nvSpPr>
-          <p:cNvPr id="7" name="TextBox 6">
-            <a:extLst>
-              <a:ext uri="{FF2B5EF4-FFF2-40B4-BE49-F238E27FC236}">
-                <a16:creationId xmlns:a16="http://schemas.microsoft.com/office/drawing/2014/main" id="{6D764CAE-CE8C-4D3A-D45A-A92662050AE3}"/>
-              </a:ext>
-            </a:extLst>
-          </p:cNvPr>
-          <p:cNvSpPr txBox="1"/>
-          <p:nvPr/>
-        </p:nvSpPr>
-        <p:spPr>
-          <a:xfrm>
-            <a:off x="297180" y="243763"/>
-            <a:ext cx="10117836" cy="461665"/>
-          </a:xfrm>
-          <a:prstGeom prst="rect">
-            <a:avLst/>
-          </a:prstGeom>
-          <a:noFill/>
-        </p:spPr>
-        <p:txBody>
-          <a:bodyPr wrap="square">
-            <a:spAutoFit/>
-          </a:bodyPr>
-          <a:lstStyle/>
-          <a:p>
-            <a:r>
-              <a:rPr lang="en-US" sz="2400" b="1" dirty="0">
-                <a:solidFill>
-                  <a:schemeClr val="accent6">
-                    <a:lumMod val="60000"/>
-                    <a:lumOff val="40000"/>
-                  </a:schemeClr>
-                </a:solidFill>
-              </a:rPr>
-              <a:t>2. Text cleaning(preprocessing):</a:t>
-            </a:r>
-          </a:p>
-        </p:txBody>
-      </p:sp>
-      <p:sp>
-        <p:nvSpPr>
-          <p:cNvPr id="9" name="TextBox 8">
-            <a:extLst>
-              <a:ext uri="{FF2B5EF4-FFF2-40B4-BE49-F238E27FC236}">
-                <a16:creationId xmlns:a16="http://schemas.microsoft.com/office/drawing/2014/main" id="{E58B39A8-5A9C-350F-0846-EEF7C50CB387}"/>
-              </a:ext>
-            </a:extLst>
-          </p:cNvPr>
-          <p:cNvSpPr txBox="1"/>
-          <p:nvPr/>
-        </p:nvSpPr>
-        <p:spPr>
-          <a:xfrm>
-            <a:off x="448056" y="1851071"/>
-            <a:ext cx="11311128" cy="3416320"/>
-          </a:xfrm>
-          <a:prstGeom prst="rect">
-            <a:avLst/>
-          </a:prstGeom>
-          <a:noFill/>
-        </p:spPr>
-        <p:txBody>
-          <a:bodyPr wrap="square">
-            <a:spAutoFit/>
-          </a:bodyPr>
-          <a:lstStyle/>
-          <a:p>
-            <a:pPr marL="0" indent="0">
-              <a:buNone/>
-            </a:pPr>
-            <a:r>
-              <a:rPr lang="en-US" sz="2400" dirty="0">
-                <a:solidFill>
-                  <a:schemeClr val="accent6">
-                    <a:lumMod val="60000"/>
-                    <a:lumOff val="40000"/>
-                  </a:schemeClr>
-                </a:solidFill>
-              </a:rPr>
-              <a:t>In Sequential Models (like RNN), cleaning is even more important because:</a:t>
-            </a:r>
-          </a:p>
-          <a:p>
-            <a:pPr marL="342900" indent="-342900">
-              <a:buFont typeface="Arial" panose="020B0604020202020204" pitchFamily="34" charset="0"/>
-              <a:buChar char="•"/>
-            </a:pPr>
-            <a:r>
-              <a:rPr lang="en-US" sz="2400" dirty="0">
-                <a:solidFill>
-                  <a:schemeClr val="accent6">
-                    <a:lumMod val="60000"/>
-                    <a:lumOff val="40000"/>
-                  </a:schemeClr>
-                </a:solidFill>
-              </a:rPr>
-              <a:t>Sequence matters (order of tokens is critical).</a:t>
-            </a:r>
-          </a:p>
-          <a:p>
-            <a:pPr marL="342900" indent="-342900">
-              <a:buFont typeface="Arial" panose="020B0604020202020204" pitchFamily="34" charset="0"/>
-              <a:buChar char="•"/>
-            </a:pPr>
-            <a:r>
-              <a:rPr lang="en-US" sz="2400" dirty="0">
-                <a:solidFill>
-                  <a:schemeClr val="accent6">
-                    <a:lumMod val="60000"/>
-                    <a:lumOff val="40000"/>
-                  </a:schemeClr>
-                </a:solidFill>
-              </a:rPr>
-              <a:t>Input size needs to be limited (you often fix input length; you want it full of meaningful words).</a:t>
-            </a:r>
-          </a:p>
-          <a:p>
-            <a:pPr marL="342900" indent="-342900">
-              <a:buFont typeface="Arial" panose="020B0604020202020204" pitchFamily="34" charset="0"/>
-              <a:buChar char="•"/>
-            </a:pPr>
-            <a:r>
-              <a:rPr lang="en-US" sz="2400" dirty="0">
-                <a:solidFill>
-                  <a:schemeClr val="accent6">
-                    <a:lumMod val="60000"/>
-                    <a:lumOff val="40000"/>
-                  </a:schemeClr>
-                </a:solidFill>
-              </a:rPr>
-              <a:t>Garbage in → garbage out (noisy inputs = bad outputs).</a:t>
-            </a:r>
-          </a:p>
-          <a:p>
-            <a:pPr marL="0" indent="0">
-              <a:buNone/>
-            </a:pPr>
-            <a:endParaRPr lang="en-US" sz="2400" dirty="0">
-              <a:solidFill>
-                <a:schemeClr val="accent6">
-                  <a:lumMod val="60000"/>
-                  <a:lumOff val="40000"/>
-                </a:schemeClr>
-              </a:solidFill>
-            </a:endParaRPr>
-          </a:p>
-          <a:p>
-            <a:pPr marL="0" indent="0">
-              <a:buNone/>
-            </a:pPr>
-            <a:r>
-              <a:rPr lang="en-US" sz="2400" dirty="0">
-                <a:solidFill>
-                  <a:schemeClr val="accent6">
-                    <a:lumMod val="60000"/>
-                    <a:lumOff val="40000"/>
-                  </a:schemeClr>
-                </a:solidFill>
-              </a:rPr>
-              <a:t>Bottom line: </a:t>
-            </a:r>
-          </a:p>
-          <a:p>
-            <a:pPr marL="0" indent="0">
-              <a:buNone/>
-            </a:pPr>
-            <a:r>
-              <a:rPr lang="en-US" sz="2400" dirty="0">
-                <a:solidFill>
-                  <a:schemeClr val="accent6">
-                    <a:lumMod val="60000"/>
-                    <a:lumOff val="40000"/>
-                  </a:schemeClr>
-                </a:solidFill>
-              </a:rPr>
-              <a:t>Clean text helps the model focus on real patterns (like grammar, sentiment, or meaning) rather than noise.</a:t>
-            </a:r>
-          </a:p>
-        </p:txBody>
-      </p:sp>
-    </p:spTree>
-    <p:extLst>
-      <p:ext uri="{BB962C8B-B14F-4D97-AF65-F5344CB8AC3E}">
-        <p14:creationId xmlns:p14="http://schemas.microsoft.com/office/powerpoint/2010/main" val="3784133368"/>
-      </p:ext>
-    </p:extLst>
-  </p:cSld>
-  <p:clrMapOvr>
-    <a:masterClrMapping/>
-  </p:clrMapOvr>
-</p:sld>
-</file>
-
-<file path=ppt/slides/slide18.xml><?xml version="1.0" encoding="utf-8"?>
 <p:sld xmlns:a="http://schemas.openxmlformats.org/drawingml/2006/main" xmlns:r="http://schemas.openxmlformats.org/officeDocument/2006/relationships" xmlns:p="http://schemas.openxmlformats.org/presentationml/2006/main">
   <p:cSld>
     <p:spTree>
@@ -16444,7 +16294,7 @@
 </p:sld>
 </file>
 
-<file path=ppt/slides/slide19.xml><?xml version="1.0" encoding="utf-8"?>
+<file path=ppt/slides/slide18.xml><?xml version="1.0" encoding="utf-8"?>
 <p:sld xmlns:a="http://schemas.openxmlformats.org/drawingml/2006/main" xmlns:r="http://schemas.openxmlformats.org/officeDocument/2006/relationships" xmlns:p="http://schemas.openxmlformats.org/presentationml/2006/main">
   <p:cSld>
     <p:spTree>
@@ -16745,6 +16595,252 @@
     <p:extLst>
       <p:ext uri="{BB962C8B-B14F-4D97-AF65-F5344CB8AC3E}">
         <p14:creationId xmlns:p14="http://schemas.microsoft.com/office/powerpoint/2010/main" val="2389308144"/>
+      </p:ext>
+    </p:extLst>
+  </p:cSld>
+  <p:clrMapOvr>
+    <a:masterClrMapping/>
+  </p:clrMapOvr>
+</p:sld>
+</file>
+
+<file path=ppt/slides/slide19.xml><?xml version="1.0" encoding="utf-8"?>
+<p:sld xmlns:a="http://schemas.openxmlformats.org/drawingml/2006/main" xmlns:r="http://schemas.openxmlformats.org/officeDocument/2006/relationships" xmlns:p="http://schemas.openxmlformats.org/presentationml/2006/main">
+  <p:cSld>
+    <p:spTree>
+      <p:nvGrpSpPr>
+        <p:cNvPr id="1" name="">
+          <a:extLst>
+            <a:ext uri="{FF2B5EF4-FFF2-40B4-BE49-F238E27FC236}">
+              <a16:creationId xmlns:a16="http://schemas.microsoft.com/office/drawing/2014/main" id="{315764FA-E5CC-98C4-E3D1-A0A02ED19C0F}"/>
+            </a:ext>
+          </a:extLst>
+        </p:cNvPr>
+        <p:cNvGrpSpPr/>
+        <p:nvPr/>
+      </p:nvGrpSpPr>
+      <p:grpSpPr>
+        <a:xfrm>
+          <a:off x="0" y="0"/>
+          <a:ext cx="0" cy="0"/>
+          <a:chOff x="0" y="0"/>
+          <a:chExt cx="0" cy="0"/>
+        </a:xfrm>
+      </p:grpSpPr>
+      <p:sp>
+        <p:nvSpPr>
+          <p:cNvPr id="3" name="TextBox 2">
+            <a:extLst>
+              <a:ext uri="{FF2B5EF4-FFF2-40B4-BE49-F238E27FC236}">
+                <a16:creationId xmlns:a16="http://schemas.microsoft.com/office/drawing/2014/main" id="{23307E44-D257-6FED-C14E-DBBB2D9ADD24}"/>
+              </a:ext>
+            </a:extLst>
+          </p:cNvPr>
+          <p:cNvSpPr txBox="1"/>
+          <p:nvPr/>
+        </p:nvSpPr>
+        <p:spPr>
+          <a:xfrm>
+            <a:off x="343949" y="799554"/>
+            <a:ext cx="11524397" cy="2308324"/>
+          </a:xfrm>
+          <a:prstGeom prst="rect">
+            <a:avLst/>
+          </a:prstGeom>
+          <a:noFill/>
+        </p:spPr>
+        <p:txBody>
+          <a:bodyPr wrap="square" rtlCol="0">
+            <a:spAutoFit/>
+          </a:bodyPr>
+          <a:lstStyle/>
+          <a:p>
+            <a:r>
+              <a:rPr lang="en-US" sz="2400" b="1" dirty="0">
+                <a:solidFill>
+                  <a:schemeClr val="accent6">
+                    <a:lumMod val="60000"/>
+                    <a:lumOff val="40000"/>
+                  </a:schemeClr>
+                </a:solidFill>
+              </a:rPr>
+              <a:t>Example 3:</a:t>
+            </a:r>
+            <a:r>
+              <a:rPr lang="en-US" sz="2400" dirty="0">
+                <a:solidFill>
+                  <a:schemeClr val="accent6">
+                    <a:lumMod val="60000"/>
+                    <a:lumOff val="40000"/>
+                  </a:schemeClr>
+                </a:solidFill>
+              </a:rPr>
+              <a:t> </a:t>
+            </a:r>
+            <a:r>
+              <a:rPr lang="en-US" sz="2400" b="1" dirty="0" err="1">
+                <a:solidFill>
+                  <a:schemeClr val="accent6">
+                    <a:lumMod val="60000"/>
+                    <a:lumOff val="40000"/>
+                  </a:schemeClr>
+                </a:solidFill>
+              </a:rPr>
+              <a:t>Subword</a:t>
+            </a:r>
+            <a:r>
+              <a:rPr lang="en-US" sz="2400" b="1" dirty="0">
+                <a:solidFill>
+                  <a:schemeClr val="accent6">
+                    <a:lumMod val="60000"/>
+                    <a:lumOff val="40000"/>
+                  </a:schemeClr>
+                </a:solidFill>
+              </a:rPr>
+              <a:t> Tokenization </a:t>
+            </a:r>
+            <a:r>
+              <a:rPr lang="en-US" sz="2400" dirty="0">
+                <a:solidFill>
+                  <a:schemeClr val="accent6">
+                    <a:lumMod val="60000"/>
+                    <a:lumOff val="40000"/>
+                  </a:schemeClr>
+                </a:solidFill>
+              </a:rPr>
+              <a:t>(using BERT tokenizer)</a:t>
+            </a:r>
+          </a:p>
+          <a:p>
+            <a:r>
+              <a:rPr lang="en-US" sz="2400" dirty="0">
+                <a:solidFill>
+                  <a:schemeClr val="accent6">
+                    <a:lumMod val="60000"/>
+                    <a:lumOff val="40000"/>
+                  </a:schemeClr>
+                </a:solidFill>
+              </a:rPr>
+              <a:t>Input Sentence: "Unbelievable service!"</a:t>
+            </a:r>
+          </a:p>
+          <a:p>
+            <a:r>
+              <a:rPr lang="en-US" sz="2400" dirty="0" err="1">
+                <a:solidFill>
+                  <a:schemeClr val="accent6">
+                    <a:lumMod val="60000"/>
+                    <a:lumOff val="40000"/>
+                  </a:schemeClr>
+                </a:solidFill>
+              </a:rPr>
+              <a:t>Subword</a:t>
+            </a:r>
+            <a:r>
+              <a:rPr lang="en-US" sz="2400" dirty="0">
+                <a:solidFill>
+                  <a:schemeClr val="accent6">
+                    <a:lumMod val="60000"/>
+                    <a:lumOff val="40000"/>
+                  </a:schemeClr>
+                </a:solidFill>
+              </a:rPr>
+              <a:t> Tokens: ['un', '##believable', 'service', '!']</a:t>
+            </a:r>
+          </a:p>
+          <a:p>
+            <a:endParaRPr lang="en-US" sz="2400" dirty="0">
+              <a:solidFill>
+                <a:schemeClr val="accent6">
+                  <a:lumMod val="60000"/>
+                  <a:lumOff val="40000"/>
+                </a:schemeClr>
+              </a:solidFill>
+            </a:endParaRPr>
+          </a:p>
+          <a:p>
+            <a:r>
+              <a:rPr lang="en-US" sz="2400" dirty="0">
+                <a:solidFill>
+                  <a:schemeClr val="accent6">
+                    <a:lumMod val="60000"/>
+                    <a:lumOff val="40000"/>
+                  </a:schemeClr>
+                </a:solidFill>
+              </a:rPr>
+              <a:t>Notice: un and believable are split because BERT uses </a:t>
+            </a:r>
+            <a:r>
+              <a:rPr lang="en-US" sz="2400" dirty="0" err="1">
+                <a:solidFill>
+                  <a:schemeClr val="accent6">
+                    <a:lumMod val="60000"/>
+                    <a:lumOff val="40000"/>
+                  </a:schemeClr>
+                </a:solidFill>
+              </a:rPr>
+              <a:t>WordPiece</a:t>
+            </a:r>
+            <a:r>
+              <a:rPr lang="en-US" sz="2400" dirty="0">
+                <a:solidFill>
+                  <a:schemeClr val="accent6">
+                    <a:lumMod val="60000"/>
+                    <a:lumOff val="40000"/>
+                  </a:schemeClr>
+                </a:solidFill>
+              </a:rPr>
+              <a:t> tokenization, handling rare words more efficiently.</a:t>
+            </a:r>
+          </a:p>
+        </p:txBody>
+      </p:sp>
+      <p:sp>
+        <p:nvSpPr>
+          <p:cNvPr id="5" name="TextBox 4">
+            <a:extLst>
+              <a:ext uri="{FF2B5EF4-FFF2-40B4-BE49-F238E27FC236}">
+                <a16:creationId xmlns:a16="http://schemas.microsoft.com/office/drawing/2014/main" id="{0FD3F392-7937-90FD-25BD-069B64D03D4C}"/>
+              </a:ext>
+            </a:extLst>
+          </p:cNvPr>
+          <p:cNvSpPr txBox="1"/>
+          <p:nvPr/>
+        </p:nvSpPr>
+        <p:spPr>
+          <a:xfrm>
+            <a:off x="132588" y="199382"/>
+            <a:ext cx="6190488" cy="461665"/>
+          </a:xfrm>
+          <a:prstGeom prst="rect">
+            <a:avLst/>
+          </a:prstGeom>
+          <a:noFill/>
+        </p:spPr>
+        <p:txBody>
+          <a:bodyPr wrap="square">
+            <a:spAutoFit/>
+          </a:bodyPr>
+          <a:lstStyle/>
+          <a:p>
+            <a:r>
+              <a:rPr lang="en-US" sz="2400" b="1" dirty="0">
+                <a:solidFill>
+                  <a:schemeClr val="accent6">
+                    <a:lumMod val="60000"/>
+                    <a:lumOff val="40000"/>
+                  </a:schemeClr>
+                </a:solidFill>
+              </a:rPr>
+              <a:t>3. Tokenization:</a:t>
+            </a:r>
+          </a:p>
+        </p:txBody>
+      </p:sp>
+    </p:spTree>
+    <p:extLst>
+      <p:ext uri="{BB962C8B-B14F-4D97-AF65-F5344CB8AC3E}">
+        <p14:creationId xmlns:p14="http://schemas.microsoft.com/office/powerpoint/2010/main" val="1567010560"/>
       </p:ext>
     </p:extLst>
   </p:cSld>
@@ -16838,252 +16934,6 @@
   <p:cSld>
     <p:spTree>
       <p:nvGrpSpPr>
-        <p:cNvPr id="1" name="">
-          <a:extLst>
-            <a:ext uri="{FF2B5EF4-FFF2-40B4-BE49-F238E27FC236}">
-              <a16:creationId xmlns:a16="http://schemas.microsoft.com/office/drawing/2014/main" id="{315764FA-E5CC-98C4-E3D1-A0A02ED19C0F}"/>
-            </a:ext>
-          </a:extLst>
-        </p:cNvPr>
-        <p:cNvGrpSpPr/>
-        <p:nvPr/>
-      </p:nvGrpSpPr>
-      <p:grpSpPr>
-        <a:xfrm>
-          <a:off x="0" y="0"/>
-          <a:ext cx="0" cy="0"/>
-          <a:chOff x="0" y="0"/>
-          <a:chExt cx="0" cy="0"/>
-        </a:xfrm>
-      </p:grpSpPr>
-      <p:sp>
-        <p:nvSpPr>
-          <p:cNvPr id="3" name="TextBox 2">
-            <a:extLst>
-              <a:ext uri="{FF2B5EF4-FFF2-40B4-BE49-F238E27FC236}">
-                <a16:creationId xmlns:a16="http://schemas.microsoft.com/office/drawing/2014/main" id="{23307E44-D257-6FED-C14E-DBBB2D9ADD24}"/>
-              </a:ext>
-            </a:extLst>
-          </p:cNvPr>
-          <p:cNvSpPr txBox="1"/>
-          <p:nvPr/>
-        </p:nvSpPr>
-        <p:spPr>
-          <a:xfrm>
-            <a:off x="343949" y="799554"/>
-            <a:ext cx="11524397" cy="2308324"/>
-          </a:xfrm>
-          <a:prstGeom prst="rect">
-            <a:avLst/>
-          </a:prstGeom>
-          <a:noFill/>
-        </p:spPr>
-        <p:txBody>
-          <a:bodyPr wrap="square" rtlCol="0">
-            <a:spAutoFit/>
-          </a:bodyPr>
-          <a:lstStyle/>
-          <a:p>
-            <a:r>
-              <a:rPr lang="en-US" sz="2400" b="1" dirty="0">
-                <a:solidFill>
-                  <a:schemeClr val="accent6">
-                    <a:lumMod val="60000"/>
-                    <a:lumOff val="40000"/>
-                  </a:schemeClr>
-                </a:solidFill>
-              </a:rPr>
-              <a:t>Example 3:</a:t>
-            </a:r>
-            <a:r>
-              <a:rPr lang="en-US" sz="2400" dirty="0">
-                <a:solidFill>
-                  <a:schemeClr val="accent6">
-                    <a:lumMod val="60000"/>
-                    <a:lumOff val="40000"/>
-                  </a:schemeClr>
-                </a:solidFill>
-              </a:rPr>
-              <a:t> </a:t>
-            </a:r>
-            <a:r>
-              <a:rPr lang="en-US" sz="2400" b="1" dirty="0" err="1">
-                <a:solidFill>
-                  <a:schemeClr val="accent6">
-                    <a:lumMod val="60000"/>
-                    <a:lumOff val="40000"/>
-                  </a:schemeClr>
-                </a:solidFill>
-              </a:rPr>
-              <a:t>Subword</a:t>
-            </a:r>
-            <a:r>
-              <a:rPr lang="en-US" sz="2400" b="1" dirty="0">
-                <a:solidFill>
-                  <a:schemeClr val="accent6">
-                    <a:lumMod val="60000"/>
-                    <a:lumOff val="40000"/>
-                  </a:schemeClr>
-                </a:solidFill>
-              </a:rPr>
-              <a:t> Tokenization </a:t>
-            </a:r>
-            <a:r>
-              <a:rPr lang="en-US" sz="2400" dirty="0">
-                <a:solidFill>
-                  <a:schemeClr val="accent6">
-                    <a:lumMod val="60000"/>
-                    <a:lumOff val="40000"/>
-                  </a:schemeClr>
-                </a:solidFill>
-              </a:rPr>
-              <a:t>(using BERT tokenizer)</a:t>
-            </a:r>
-          </a:p>
-          <a:p>
-            <a:r>
-              <a:rPr lang="en-US" sz="2400" dirty="0">
-                <a:solidFill>
-                  <a:schemeClr val="accent6">
-                    <a:lumMod val="60000"/>
-                    <a:lumOff val="40000"/>
-                  </a:schemeClr>
-                </a:solidFill>
-              </a:rPr>
-              <a:t>Input Sentence: "Unbelievable service!"</a:t>
-            </a:r>
-          </a:p>
-          <a:p>
-            <a:r>
-              <a:rPr lang="en-US" sz="2400" dirty="0" err="1">
-                <a:solidFill>
-                  <a:schemeClr val="accent6">
-                    <a:lumMod val="60000"/>
-                    <a:lumOff val="40000"/>
-                  </a:schemeClr>
-                </a:solidFill>
-              </a:rPr>
-              <a:t>Subword</a:t>
-            </a:r>
-            <a:r>
-              <a:rPr lang="en-US" sz="2400" dirty="0">
-                <a:solidFill>
-                  <a:schemeClr val="accent6">
-                    <a:lumMod val="60000"/>
-                    <a:lumOff val="40000"/>
-                  </a:schemeClr>
-                </a:solidFill>
-              </a:rPr>
-              <a:t> Tokens: ['un', '##believable', 'service', '!']</a:t>
-            </a:r>
-          </a:p>
-          <a:p>
-            <a:endParaRPr lang="en-US" sz="2400" dirty="0">
-              <a:solidFill>
-                <a:schemeClr val="accent6">
-                  <a:lumMod val="60000"/>
-                  <a:lumOff val="40000"/>
-                </a:schemeClr>
-              </a:solidFill>
-            </a:endParaRPr>
-          </a:p>
-          <a:p>
-            <a:r>
-              <a:rPr lang="en-US" sz="2400" dirty="0">
-                <a:solidFill>
-                  <a:schemeClr val="accent6">
-                    <a:lumMod val="60000"/>
-                    <a:lumOff val="40000"/>
-                  </a:schemeClr>
-                </a:solidFill>
-              </a:rPr>
-              <a:t>Notice: un and believable are split because BERT uses </a:t>
-            </a:r>
-            <a:r>
-              <a:rPr lang="en-US" sz="2400" dirty="0" err="1">
-                <a:solidFill>
-                  <a:schemeClr val="accent6">
-                    <a:lumMod val="60000"/>
-                    <a:lumOff val="40000"/>
-                  </a:schemeClr>
-                </a:solidFill>
-              </a:rPr>
-              <a:t>WordPiece</a:t>
-            </a:r>
-            <a:r>
-              <a:rPr lang="en-US" sz="2400" dirty="0">
-                <a:solidFill>
-                  <a:schemeClr val="accent6">
-                    <a:lumMod val="60000"/>
-                    <a:lumOff val="40000"/>
-                  </a:schemeClr>
-                </a:solidFill>
-              </a:rPr>
-              <a:t> tokenization, handling rare words more efficiently.</a:t>
-            </a:r>
-          </a:p>
-        </p:txBody>
-      </p:sp>
-      <p:sp>
-        <p:nvSpPr>
-          <p:cNvPr id="5" name="TextBox 4">
-            <a:extLst>
-              <a:ext uri="{FF2B5EF4-FFF2-40B4-BE49-F238E27FC236}">
-                <a16:creationId xmlns:a16="http://schemas.microsoft.com/office/drawing/2014/main" id="{0FD3F392-7937-90FD-25BD-069B64D03D4C}"/>
-              </a:ext>
-            </a:extLst>
-          </p:cNvPr>
-          <p:cNvSpPr txBox="1"/>
-          <p:nvPr/>
-        </p:nvSpPr>
-        <p:spPr>
-          <a:xfrm>
-            <a:off x="132588" y="199382"/>
-            <a:ext cx="6190488" cy="461665"/>
-          </a:xfrm>
-          <a:prstGeom prst="rect">
-            <a:avLst/>
-          </a:prstGeom>
-          <a:noFill/>
-        </p:spPr>
-        <p:txBody>
-          <a:bodyPr wrap="square">
-            <a:spAutoFit/>
-          </a:bodyPr>
-          <a:lstStyle/>
-          <a:p>
-            <a:r>
-              <a:rPr lang="en-US" sz="2400" b="1" dirty="0">
-                <a:solidFill>
-                  <a:schemeClr val="accent6">
-                    <a:lumMod val="60000"/>
-                    <a:lumOff val="40000"/>
-                  </a:schemeClr>
-                </a:solidFill>
-              </a:rPr>
-              <a:t>3. Tokenization:</a:t>
-            </a:r>
-          </a:p>
-        </p:txBody>
-      </p:sp>
-    </p:spTree>
-    <p:extLst>
-      <p:ext uri="{BB962C8B-B14F-4D97-AF65-F5344CB8AC3E}">
-        <p14:creationId xmlns:p14="http://schemas.microsoft.com/office/powerpoint/2010/main" val="1567010560"/>
-      </p:ext>
-    </p:extLst>
-  </p:cSld>
-  <p:clrMapOvr>
-    <a:masterClrMapping/>
-  </p:clrMapOvr>
-</p:sld>
-</file>
-
-<file path=ppt/slides/slide21.xml><?xml version="1.0" encoding="utf-8"?>
-<p:sld xmlns:a="http://schemas.openxmlformats.org/drawingml/2006/main" xmlns:r="http://schemas.openxmlformats.org/officeDocument/2006/relationships" xmlns:p="http://schemas.openxmlformats.org/presentationml/2006/main">
-  <p:cSld>
-    <p:spTree>
-      <p:nvGrpSpPr>
         <p:cNvPr id="1" name=""/>
         <p:cNvGrpSpPr/>
         <p:nvPr/>
@@ -17412,7 +17262,7 @@
 </p:sld>
 </file>
 
-<file path=ppt/slides/slide22.xml><?xml version="1.0" encoding="utf-8"?>
+<file path=ppt/slides/slide21.xml><?xml version="1.0" encoding="utf-8"?>
 <p:sld xmlns:a="http://schemas.openxmlformats.org/drawingml/2006/main" xmlns:r="http://schemas.openxmlformats.org/officeDocument/2006/relationships" xmlns:p="http://schemas.openxmlformats.org/presentationml/2006/main">
   <p:cSld>
     <p:spTree>
@@ -17464,9 +17314,9 @@
             </a:r>
           </a:p>
           <a:p>
-            <a:pPr marL="285750" indent="-285750">
-              <a:buFont typeface="Arial" panose="020B0604020202020204" pitchFamily="34" charset="0"/>
-              <a:buChar char="•"/>
+            <a:pPr marL="342900" indent="-342900">
+              <a:buFontTx/>
+              <a:buChar char="-"/>
             </a:pPr>
             <a:r>
               <a:rPr lang="en-US" sz="2000" dirty="0">
@@ -17481,9 +17331,9 @@
             </a:r>
           </a:p>
           <a:p>
-            <a:pPr marL="285750" indent="-285750">
-              <a:buFont typeface="Arial" panose="020B0604020202020204" pitchFamily="34" charset="0"/>
-              <a:buChar char="•"/>
+            <a:pPr marL="342900" indent="-342900">
+              <a:buFontTx/>
+              <a:buChar char="-"/>
             </a:pPr>
             <a:r>
               <a:rPr lang="en-US" sz="2000" dirty="0">
@@ -17494,13 +17344,13 @@
                   </a:schemeClr>
                 </a:solidFill>
               </a:rPr>
-              <a:t>What is the sentence sentiment?</a:t>
-            </a:r>
-          </a:p>
-          <a:p>
-            <a:pPr marL="285750" indent="-285750">
-              <a:buFont typeface="Arial" panose="020B0604020202020204" pitchFamily="34" charset="0"/>
-              <a:buChar char="•"/>
+              <a:t>What is the sentence sentiment? If you lot of words like : love, recommended, enjoy, liked</a:t>
+            </a:r>
+          </a:p>
+          <a:p>
+            <a:pPr marL="342900" indent="-342900">
+              <a:buFontTx/>
+              <a:buChar char="-"/>
             </a:pPr>
             <a:r>
               <a:rPr lang="en-US" sz="2000" dirty="0">
@@ -17511,10 +17361,14 @@
                   </a:schemeClr>
                 </a:solidFill>
               </a:rPr>
-              <a:t>Which words are meaningful (e.g., named entities)?</a:t>
-            </a:r>
-          </a:p>
-          <a:p>
+              <a:t> Which words are meaningful (e.g., named entities)?</a:t>
+            </a:r>
+          </a:p>
+          <a:p>
+            <a:pPr marL="342900" indent="-342900">
+              <a:buFontTx/>
+              <a:buChar char="-"/>
+            </a:pPr>
             <a:endParaRPr lang="en-US" sz="2000" dirty="0">
               <a:solidFill>
                 <a:schemeClr val="accent6">
@@ -17525,62 +17379,11 @@
             </a:endParaRPr>
           </a:p>
           <a:p>
-            <a:r>
-              <a:rPr lang="en-US" sz="2000" dirty="0">
-                <a:solidFill>
-                  <a:schemeClr val="accent6">
-                    <a:lumMod val="60000"/>
-                    <a:lumOff val="40000"/>
-                  </a:schemeClr>
-                </a:solidFill>
-              </a:rPr>
-              <a:t>Tokenization is essential because </a:t>
-            </a:r>
-            <a:r>
-              <a:rPr lang="en-US" sz="2000" b="1" dirty="0">
-                <a:solidFill>
-                  <a:schemeClr val="accent6">
-                    <a:lumMod val="60000"/>
-                    <a:lumOff val="40000"/>
-                  </a:schemeClr>
-                </a:solidFill>
-              </a:rPr>
-              <a:t>computers cannot directly understand or process unstructured human language</a:t>
-            </a:r>
-            <a:r>
-              <a:rPr lang="en-US" sz="2000" dirty="0">
-                <a:solidFill>
-                  <a:schemeClr val="accent6">
-                    <a:lumMod val="60000"/>
-                    <a:lumOff val="40000"/>
-                  </a:schemeClr>
-                </a:solidFill>
-              </a:rPr>
-              <a:t>. By breaking text into tokens, we convert it into a </a:t>
-            </a:r>
-            <a:r>
-              <a:rPr lang="en-US" sz="2000" b="1" dirty="0">
-                <a:solidFill>
-                  <a:schemeClr val="accent6">
-                    <a:lumMod val="60000"/>
-                    <a:lumOff val="40000"/>
-                  </a:schemeClr>
-                </a:solidFill>
-              </a:rPr>
-              <a:t>structured format</a:t>
-            </a:r>
-            <a:r>
-              <a:rPr lang="en-US" sz="2000" dirty="0">
-                <a:solidFill>
-                  <a:schemeClr val="accent6">
-                    <a:lumMod val="60000"/>
-                    <a:lumOff val="40000"/>
-                  </a:schemeClr>
-                </a:solidFill>
-              </a:rPr>
-              <a:t> that can be analyzed, modeled, or used as input to NLP algorithms.</a:t>
-            </a:r>
-            <a:endParaRPr lang="en-US" sz="2000" b="1" dirty="0">
+            <a:pPr marL="342900" indent="-342900">
+              <a:buFontTx/>
+              <a:buChar char="-"/>
+            </a:pPr>
+            <a:endParaRPr lang="en-US" sz="2000" dirty="0">
               <a:solidFill>
                 <a:schemeClr val="accent6">
                   <a:lumMod val="60000"/>
@@ -17590,7 +17393,11 @@
             </a:endParaRPr>
           </a:p>
           <a:p>
-            <a:endParaRPr lang="en-US" sz="2000" b="1" dirty="0">
+            <a:pPr marL="342900" indent="-342900">
+              <a:buFontTx/>
+              <a:buChar char="-"/>
+            </a:pPr>
+            <a:endParaRPr lang="en-US" sz="2000" dirty="0">
               <a:solidFill>
                 <a:schemeClr val="accent6">
                   <a:lumMod val="60000"/>
@@ -17601,7 +17408,7 @@
           </a:p>
           <a:p>
             <a:r>
-              <a:rPr lang="en-US" sz="2000" b="1" u="sng" dirty="0">
+              <a:rPr lang="en-US" sz="2000" dirty="0">
                 <a:solidFill>
                   <a:schemeClr val="accent6">
                     <a:lumMod val="60000"/>
@@ -17613,17 +17420,10 @@
             </a:r>
           </a:p>
           <a:p>
-            <a:r>
-              <a:rPr lang="en-US" sz="2000" b="1" dirty="0">
-                <a:solidFill>
-                  <a:schemeClr val="accent6">
-                    <a:lumMod val="60000"/>
-                    <a:lumOff val="40000"/>
-                  </a:schemeClr>
-                </a:solidFill>
-              </a:rPr>
-              <a:t>Makes text data manageable: </a:t>
-            </a:r>
+            <a:pPr marL="342900" indent="-342900">
+              <a:buFontTx/>
+              <a:buChar char="-"/>
+            </a:pPr>
             <a:r>
               <a:rPr lang="en-US" sz="2000" dirty="0">
                 <a:solidFill>
@@ -17633,19 +17433,28 @@
                   </a:schemeClr>
                 </a:solidFill>
               </a:rPr>
-              <a:t>Tokenization breaks down </a:t>
-            </a:r>
-            <a:r>
-              <a:rPr lang="en-US" sz="2000" b="1" dirty="0">
-                <a:solidFill>
-                  <a:schemeClr val="accent6">
-                    <a:lumMod val="60000"/>
-                    <a:lumOff val="40000"/>
-                  </a:schemeClr>
-                </a:solidFill>
-              </a:rPr>
-              <a:t>large text into smaller</a:t>
-            </a:r>
+              <a:t>Makes text data manageable: Tokenization breaks down large text into smaller, more easily processed chunks, making it easier for NLP models to work with. </a:t>
+            </a:r>
+          </a:p>
+          <a:p>
+            <a:pPr marL="342900" indent="-342900">
+              <a:buFontTx/>
+              <a:buChar char="-"/>
+            </a:pPr>
+            <a:endParaRPr lang="en-US" sz="2000" dirty="0">
+              <a:solidFill>
+                <a:schemeClr val="accent6">
+                  <a:lumMod val="60000"/>
+                  <a:lumOff val="40000"/>
+                </a:schemeClr>
+              </a:solidFill>
+            </a:endParaRPr>
+          </a:p>
+          <a:p>
+            <a:pPr marL="342900" indent="-342900">
+              <a:buFontTx/>
+              <a:buChar char="-"/>
+            </a:pPr>
             <a:r>
               <a:rPr lang="en-US" sz="2000" dirty="0">
                 <a:solidFill>
@@ -17655,21 +17464,28 @@
                   </a:schemeClr>
                 </a:solidFill>
               </a:rPr>
-              <a:t>, more easily processed chunks, making it easier for NLP models to work with. </a:t>
-            </a:r>
-          </a:p>
-          <a:p>
-            <a:r>
-              <a:rPr lang="en-US" sz="2000" b="1" dirty="0">
-                <a:solidFill>
-                  <a:schemeClr val="accent6">
-                    <a:lumMod val="60000"/>
-                    <a:lumOff val="40000"/>
-                  </a:schemeClr>
-                </a:solidFill>
-              </a:rPr>
-              <a:t>Facilitates analysis and understanding: </a:t>
-            </a:r>
+              <a:t>- Lays the foundation for other NLP tasks: Tokenization is a fundamental step that enables various other NLP tasks, such as text classification, sentiment analysis, machine translation, and language modeling. </a:t>
+            </a:r>
+          </a:p>
+          <a:p>
+            <a:pPr marL="342900" indent="-342900">
+              <a:buFontTx/>
+              <a:buChar char="-"/>
+            </a:pPr>
+            <a:endParaRPr lang="en-US" sz="2000" dirty="0">
+              <a:solidFill>
+                <a:schemeClr val="accent6">
+                  <a:lumMod val="60000"/>
+                  <a:lumOff val="40000"/>
+                </a:schemeClr>
+              </a:solidFill>
+            </a:endParaRPr>
+          </a:p>
+          <a:p>
+            <a:pPr marL="342900" indent="-342900">
+              <a:buFontTx/>
+              <a:buChar char="-"/>
+            </a:pPr>
             <a:r>
               <a:rPr lang="en-US" sz="2000" dirty="0">
                 <a:solidFill>
@@ -17679,55 +17495,7 @@
                   </a:schemeClr>
                 </a:solidFill>
               </a:rPr>
-              <a:t>By isolating individual units (tokens), NLP models can analyze the meaning and relationships between them, leading to a deeper understanding of the text. </a:t>
-            </a:r>
-          </a:p>
-          <a:p>
-            <a:r>
-              <a:rPr lang="en-US" sz="2000" b="1" dirty="0">
-                <a:solidFill>
-                  <a:schemeClr val="accent6">
-                    <a:lumMod val="60000"/>
-                    <a:lumOff val="40000"/>
-                  </a:schemeClr>
-                </a:solidFill>
-              </a:rPr>
-              <a:t>Lays the foundation for other NLP tasks: </a:t>
-            </a:r>
-            <a:r>
-              <a:rPr lang="en-US" sz="2000" dirty="0">
-                <a:solidFill>
-                  <a:schemeClr val="accent6">
-                    <a:lumMod val="60000"/>
-                    <a:lumOff val="40000"/>
-                  </a:schemeClr>
-                </a:solidFill>
-              </a:rPr>
-              <a:t>Tokenization is a fundamental step that enables various other NLP tasks, such as text classification, sentiment analysis, machine translation, and language modeling. </a:t>
-            </a:r>
-          </a:p>
-          <a:p>
-            <a:r>
-              <a:rPr lang="en-US" sz="2000" b="1" dirty="0">
-                <a:solidFill>
-                  <a:schemeClr val="accent6">
-                    <a:lumMod val="60000"/>
-                    <a:lumOff val="40000"/>
-                  </a:schemeClr>
-                </a:solidFill>
-              </a:rPr>
-              <a:t>Enables text-to-numerical conversion: </a:t>
-            </a:r>
-            <a:r>
-              <a:rPr lang="en-US" sz="2000" dirty="0">
-                <a:solidFill>
-                  <a:schemeClr val="accent6">
-                    <a:lumMod val="60000"/>
-                    <a:lumOff val="40000"/>
-                  </a:schemeClr>
-                </a:solidFill>
-              </a:rPr>
-              <a:t>Tokenization is crucial for converting raw text into a numerical format that machine learning models can process, as they typically work with numbers rather than raw text. </a:t>
+              <a:t>- Enables text-to-numerical conversion: Sentence -&gt; Tokens -&gt; Numerical form(King, Queen, Castle, Fish, Ocean ) King, Queen and Castle are close to each other and Fish, Ocean are close Tokenization is crucial for converting raw text into a numerical format that machine learning models can process, as they typically work with numbers rather than raw text. </a:t>
             </a:r>
           </a:p>
         </p:txBody>
@@ -17787,7 +17555,7 @@
 </p:sld>
 </file>
 
-<file path=ppt/slides/slide23.xml><?xml version="1.0" encoding="utf-8"?>
+<file path=ppt/slides/slide22.xml><?xml version="1.0" encoding="utf-8"?>
 <p:sld xmlns:a="http://schemas.openxmlformats.org/drawingml/2006/main" xmlns:r="http://schemas.openxmlformats.org/officeDocument/2006/relationships" xmlns:p="http://schemas.openxmlformats.org/presentationml/2006/main">
   <p:cSld>
     <p:spTree>
@@ -19424,7 +19192,7 @@
 </p:sld>
 </file>
 
-<file path=ppt/slides/slide24.xml><?xml version="1.0" encoding="utf-8"?>
+<file path=ppt/slides/slide23.xml><?xml version="1.0" encoding="utf-8"?>
 <p:sld xmlns:a="http://schemas.openxmlformats.org/drawingml/2006/main" xmlns:r="http://schemas.openxmlformats.org/officeDocument/2006/relationships" xmlns:p="http://schemas.openxmlformats.org/presentationml/2006/main">
   <p:cSld>
     <p:spTree>
@@ -19479,7 +19247,7 @@
         <p:spPr>
           <a:xfrm>
             <a:off x="369116" y="956344"/>
-            <a:ext cx="11432626" cy="5262979"/>
+            <a:ext cx="11432626" cy="2308324"/>
           </a:xfrm>
           <a:prstGeom prst="rect">
             <a:avLst/>
@@ -19491,80 +19259,6 @@
             <a:spAutoFit/>
           </a:bodyPr>
           <a:lstStyle/>
-          <a:p>
-            <a:r>
-              <a:rPr lang="en-US" sz="2400" dirty="0">
-                <a:solidFill>
-                  <a:schemeClr val="accent6">
-                    <a:lumMod val="60000"/>
-                    <a:lumOff val="40000"/>
-                  </a:schemeClr>
-                </a:solidFill>
-              </a:rPr>
-              <a:t>Why POS tagging?</a:t>
-            </a:r>
-          </a:p>
-          <a:p>
-            <a:pPr marL="285750" indent="-285750">
-              <a:buFont typeface="Arial" panose="020B0604020202020204" pitchFamily="34" charset="0"/>
-              <a:buChar char="•"/>
-            </a:pPr>
-            <a:r>
-              <a:rPr lang="en-US" sz="2400" dirty="0">
-                <a:solidFill>
-                  <a:schemeClr val="accent6">
-                    <a:lumMod val="60000"/>
-                    <a:lumOff val="40000"/>
-                  </a:schemeClr>
-                </a:solidFill>
-              </a:rPr>
-              <a:t>POS tags can help in better normalization (e.g., you might lemmatize differently based on the word's part of speech: "running" → "run" if it's a verb).</a:t>
-            </a:r>
-          </a:p>
-          <a:p>
-            <a:pPr marL="285750" indent="-285750">
-              <a:buFont typeface="Arial" panose="020B0604020202020204" pitchFamily="34" charset="0"/>
-              <a:buChar char="•"/>
-            </a:pPr>
-            <a:r>
-              <a:rPr lang="en-US" sz="2400" dirty="0">
-                <a:solidFill>
-                  <a:schemeClr val="accent6">
-                    <a:lumMod val="60000"/>
-                    <a:lumOff val="40000"/>
-                  </a:schemeClr>
-                </a:solidFill>
-              </a:rPr>
-              <a:t>POS tags can become extra features fed into a model (especially in more advanced NLP tasks).</a:t>
-            </a:r>
-          </a:p>
-          <a:p>
-            <a:pPr marL="285750" indent="-285750">
-              <a:buFont typeface="Arial" panose="020B0604020202020204" pitchFamily="34" charset="0"/>
-              <a:buChar char="•"/>
-            </a:pPr>
-            <a:r>
-              <a:rPr lang="en-US" sz="2400" dirty="0">
-                <a:solidFill>
-                  <a:schemeClr val="accent6">
-                    <a:lumMod val="60000"/>
-                    <a:lumOff val="40000"/>
-                  </a:schemeClr>
-                </a:solidFill>
-              </a:rPr>
-              <a:t>Some downstream models (like Named Entity Recognition, Question Answering, etc.) perform better with POS information.</a:t>
-            </a:r>
-          </a:p>
-          <a:p>
-            <a:endParaRPr lang="en-US" sz="2400" dirty="0">
-              <a:solidFill>
-                <a:schemeClr val="accent6">
-                  <a:lumMod val="60000"/>
-                  <a:lumOff val="40000"/>
-                </a:schemeClr>
-              </a:solidFill>
-            </a:endParaRPr>
-          </a:p>
           <a:p>
             <a:r>
               <a:rPr lang="en-US" sz="2400" dirty="0">
@@ -19642,7 +19336,7 @@
 </p:sld>
 </file>
 
-<file path=ppt/slides/slide25.xml><?xml version="1.0" encoding="utf-8"?>
+<file path=ppt/slides/slide24.xml><?xml version="1.0" encoding="utf-8"?>
 <p:sld xmlns:a="http://schemas.openxmlformats.org/drawingml/2006/main" xmlns:r="http://schemas.openxmlformats.org/officeDocument/2006/relationships" xmlns:p="http://schemas.openxmlformats.org/presentationml/2006/main">
   <p:cSld>
     <p:spTree>
@@ -19696,8 +19390,8 @@
         </p:nvSpPr>
         <p:spPr>
           <a:xfrm>
-            <a:off x="243281" y="738231"/>
-            <a:ext cx="5108895" cy="2893100"/>
+            <a:off x="106121" y="771787"/>
+            <a:ext cx="5108895" cy="4708981"/>
           </a:xfrm>
           <a:prstGeom prst="rect">
             <a:avLst/>
@@ -19711,7 +19405,7 @@
           <a:lstStyle/>
           <a:p>
             <a:r>
-              <a:rPr lang="en-US" sz="1400" dirty="0">
+              <a:rPr lang="en-US" sz="2000" dirty="0">
                 <a:solidFill>
                   <a:schemeClr val="accent6">
                     <a:lumMod val="60000"/>
@@ -19722,7 +19416,7 @@
               <a:t>1. </a:t>
             </a:r>
             <a:r>
-              <a:rPr lang="en-US" sz="1400" b="1" dirty="0" err="1">
+              <a:rPr lang="en-US" sz="2000" b="1" dirty="0" err="1">
                 <a:solidFill>
                   <a:schemeClr val="accent6">
                     <a:lumMod val="60000"/>
@@ -19733,7 +19427,7 @@
               <a:t>Chatbots</a:t>
             </a:r>
             <a:r>
-              <a:rPr lang="en-US" sz="1400" b="1" dirty="0">
+              <a:rPr lang="en-US" sz="2000" b="1" dirty="0">
                 <a:solidFill>
                   <a:schemeClr val="accent6">
                     <a:lumMod val="60000"/>
@@ -19746,7 +19440,7 @@
           </a:p>
           <a:p>
             <a:r>
-              <a:rPr lang="en-US" sz="1400" dirty="0">
+              <a:rPr lang="en-US" sz="2000" dirty="0">
                 <a:solidFill>
                   <a:schemeClr val="accent6">
                     <a:lumMod val="60000"/>
@@ -19759,7 +19453,7 @@
           </a:p>
           <a:p>
             <a:r>
-              <a:rPr lang="en-US" sz="1400" b="1" dirty="0">
+              <a:rPr lang="en-US" sz="2000" b="1" dirty="0">
                 <a:solidFill>
                   <a:schemeClr val="accent6">
                     <a:lumMod val="60000"/>
@@ -19772,7 +19466,7 @@
           </a:p>
           <a:p>
             <a:r>
-              <a:rPr lang="en-US" sz="1400" dirty="0">
+              <a:rPr lang="en-US" sz="2000" dirty="0">
                 <a:solidFill>
                   <a:schemeClr val="accent6">
                     <a:lumMod val="60000"/>
@@ -19785,7 +19479,7 @@
           </a:p>
           <a:p>
             <a:r>
-              <a:rPr lang="en-US" sz="1400" dirty="0">
+              <a:rPr lang="en-US" sz="2000" dirty="0">
                 <a:solidFill>
                   <a:schemeClr val="accent6">
                     <a:lumMod val="60000"/>
@@ -19798,7 +19492,7 @@
           </a:p>
           <a:p>
             <a:r>
-              <a:rPr lang="en-US" sz="1400" dirty="0">
+              <a:rPr lang="en-US" sz="2000" dirty="0">
                 <a:solidFill>
                   <a:schemeClr val="accent6">
                     <a:lumMod val="60000"/>
@@ -19811,7 +19505,7 @@
           </a:p>
           <a:p>
             <a:r>
-              <a:rPr lang="en-US" sz="1400" dirty="0">
+              <a:rPr lang="en-US" sz="2000" dirty="0">
                 <a:solidFill>
                   <a:schemeClr val="accent6">
                     <a:lumMod val="60000"/>
@@ -19824,7 +19518,7 @@
           </a:p>
           <a:p>
             <a:r>
-              <a:rPr lang="en-US" sz="1400" dirty="0">
+              <a:rPr lang="en-US" sz="2000" dirty="0">
                 <a:solidFill>
                   <a:schemeClr val="accent6">
                     <a:lumMod val="60000"/>
@@ -19836,7 +19530,7 @@
             </a:r>
           </a:p>
           <a:p>
-            <a:endParaRPr lang="en-US" sz="1400" dirty="0">
+            <a:endParaRPr lang="en-US" sz="2000" dirty="0">
               <a:solidFill>
                 <a:schemeClr val="accent6">
                   <a:lumMod val="60000"/>
@@ -19847,7 +19541,7 @@
           </a:p>
           <a:p>
             <a:r>
-              <a:rPr lang="en-US" sz="1400" b="1" dirty="0">
+              <a:rPr lang="en-US" sz="2000" b="1" dirty="0">
                 <a:solidFill>
                   <a:schemeClr val="accent6">
                     <a:lumMod val="60000"/>
@@ -19860,7 +19554,7 @@
           </a:p>
           <a:p>
             <a:r>
-              <a:rPr lang="en-US" sz="1400" dirty="0">
+              <a:rPr lang="en-US" sz="2000" dirty="0">
                 <a:solidFill>
                   <a:schemeClr val="accent6">
                     <a:lumMod val="60000"/>
@@ -19871,7 +19565,7 @@
               <a:t>The </a:t>
             </a:r>
             <a:r>
-              <a:rPr lang="en-US" sz="1400" dirty="0" err="1">
+              <a:rPr lang="en-US" sz="2000" dirty="0" err="1">
                 <a:solidFill>
                   <a:schemeClr val="accent6">
                     <a:lumMod val="60000"/>
@@ -19882,7 +19576,7 @@
               <a:t>chatbot</a:t>
             </a:r>
             <a:r>
-              <a:rPr lang="en-US" sz="1400" dirty="0">
+              <a:rPr lang="en-US" sz="2000" dirty="0">
                 <a:solidFill>
                   <a:schemeClr val="accent6">
                     <a:lumMod val="60000"/>
@@ -19893,7 +19587,7 @@
               <a:t> needs to know that "Book" is a verb (an action), and "flight" is the object. This helps the </a:t>
             </a:r>
             <a:r>
-              <a:rPr lang="en-US" sz="1400" dirty="0" err="1">
+              <a:rPr lang="en-US" sz="2000" dirty="0" err="1">
                 <a:solidFill>
                   <a:schemeClr val="accent6">
                     <a:lumMod val="60000"/>
@@ -19904,7 +19598,7 @@
               <a:t>chatbot</a:t>
             </a:r>
             <a:r>
-              <a:rPr lang="en-US" sz="1400" dirty="0">
+              <a:rPr lang="en-US" sz="2000" dirty="0">
                 <a:solidFill>
                   <a:schemeClr val="accent6">
                     <a:lumMod val="60000"/>
@@ -19919,14 +19613,14 @@
       </p:sp>
       <p:sp>
         <p:nvSpPr>
-          <p:cNvPr id="6" name="TextBox 5"/>
+          <p:cNvPr id="8" name="TextBox 7"/>
           <p:cNvSpPr txBox="1"/>
           <p:nvPr/>
         </p:nvSpPr>
         <p:spPr>
           <a:xfrm>
-            <a:off x="218114" y="4253218"/>
-            <a:ext cx="5712902" cy="2246769"/>
+            <a:off x="5780016" y="771787"/>
+            <a:ext cx="6182685" cy="5632311"/>
           </a:xfrm>
           <a:prstGeom prst="rect">
             <a:avLst/>
@@ -19940,33 +19634,46 @@
           <a:lstStyle/>
           <a:p>
             <a:r>
-              <a:rPr lang="en-US" sz="1400" b="1" dirty="0">
-                <a:solidFill>
-                  <a:schemeClr val="accent6">
-                    <a:lumMod val="60000"/>
-                    <a:lumOff val="40000"/>
-                  </a:schemeClr>
-                </a:solidFill>
-              </a:rPr>
-              <a:t>2. Voice Assistants Understanding Commands (Alexa, Siri)</a:t>
-            </a:r>
-          </a:p>
-          <a:p>
-            <a:r>
-              <a:rPr lang="en-US" sz="1400" dirty="0">
-                <a:solidFill>
-                  <a:schemeClr val="accent6">
-                    <a:lumMod val="60000"/>
-                    <a:lumOff val="40000"/>
-                  </a:schemeClr>
-                </a:solidFill>
-              </a:rPr>
-              <a:t>Example Input: "Play relaxing music."</a:t>
-            </a:r>
-          </a:p>
-          <a:p>
-            <a:r>
-              <a:rPr lang="en-US" sz="1400" b="1" dirty="0">
+              <a:rPr lang="en-US" sz="2000" b="1" dirty="0">
+                <a:solidFill>
+                  <a:schemeClr val="accent6">
+                    <a:lumMod val="60000"/>
+                    <a:lumOff val="40000"/>
+                  </a:schemeClr>
+                </a:solidFill>
+              </a:rPr>
+              <a:t>2. Text Summarization Tools</a:t>
+            </a:r>
+          </a:p>
+          <a:p>
+            <a:r>
+              <a:rPr lang="en-US" sz="2000" dirty="0">
+                <a:solidFill>
+                  <a:schemeClr val="accent6">
+                    <a:lumMod val="60000"/>
+                    <a:lumOff val="40000"/>
+                  </a:schemeClr>
+                </a:solidFill>
+              </a:rPr>
+              <a:t>Example Input: </a:t>
+            </a:r>
+          </a:p>
+          <a:p>
+            <a:r>
+              <a:rPr lang="en-US" sz="2000" dirty="0">
+                <a:solidFill>
+                  <a:schemeClr val="accent6">
+                    <a:lumMod val="60000"/>
+                    <a:lumOff val="40000"/>
+                  </a:schemeClr>
+                </a:solidFill>
+              </a:rPr>
+              <a:t>"The stock market rose sharply due to the new policy announcements."</a:t>
+            </a:r>
+          </a:p>
+          <a:p>
+            <a:r>
+              <a:rPr lang="en-US" sz="2000" b="1" dirty="0">
                 <a:solidFill>
                   <a:schemeClr val="accent6">
                     <a:lumMod val="60000"/>
@@ -19979,45 +19686,110 @@
           </a:p>
           <a:p>
             <a:r>
-              <a:rPr lang="en-US" sz="1400" dirty="0">
-                <a:solidFill>
-                  <a:schemeClr val="accent6">
-                    <a:lumMod val="60000"/>
-                    <a:lumOff val="40000"/>
-                  </a:schemeClr>
-                </a:solidFill>
-              </a:rPr>
-              <a:t>Play (Verb)</a:t>
-            </a:r>
-          </a:p>
-          <a:p>
-            <a:r>
-              <a:rPr lang="en-US" sz="1400" dirty="0">
-                <a:solidFill>
-                  <a:schemeClr val="accent6">
-                    <a:lumMod val="60000"/>
-                    <a:lumOff val="40000"/>
-                  </a:schemeClr>
-                </a:solidFill>
-              </a:rPr>
-              <a:t>relaxing (Adjective)</a:t>
-            </a:r>
-          </a:p>
-          <a:p>
-            <a:r>
-              <a:rPr lang="en-US" sz="1400" dirty="0">
-                <a:solidFill>
-                  <a:schemeClr val="accent6">
-                    <a:lumMod val="60000"/>
-                    <a:lumOff val="40000"/>
-                  </a:schemeClr>
-                </a:solidFill>
-              </a:rPr>
-              <a:t>music (Noun)</a:t>
-            </a:r>
-          </a:p>
-          <a:p>
-            <a:endParaRPr lang="en-US" sz="1400" dirty="0">
+              <a:rPr lang="en-US" sz="2000" dirty="0">
+                <a:solidFill>
+                  <a:schemeClr val="accent6">
+                    <a:lumMod val="60000"/>
+                    <a:lumOff val="40000"/>
+                  </a:schemeClr>
+                </a:solidFill>
+              </a:rPr>
+              <a:t>stock (Noun)</a:t>
+            </a:r>
+          </a:p>
+          <a:p>
+            <a:r>
+              <a:rPr lang="en-US" sz="2000" dirty="0">
+                <a:solidFill>
+                  <a:schemeClr val="accent6">
+                    <a:lumMod val="60000"/>
+                    <a:lumOff val="40000"/>
+                  </a:schemeClr>
+                </a:solidFill>
+              </a:rPr>
+              <a:t>market (Noun)</a:t>
+            </a:r>
+          </a:p>
+          <a:p>
+            <a:r>
+              <a:rPr lang="en-US" sz="2000" dirty="0">
+                <a:solidFill>
+                  <a:schemeClr val="accent6">
+                    <a:lumMod val="60000"/>
+                    <a:lumOff val="40000"/>
+                  </a:schemeClr>
+                </a:solidFill>
+              </a:rPr>
+              <a:t>rose (Verb)</a:t>
+            </a:r>
+          </a:p>
+          <a:p>
+            <a:r>
+              <a:rPr lang="en-US" sz="2000" dirty="0">
+                <a:solidFill>
+                  <a:schemeClr val="accent6">
+                    <a:lumMod val="60000"/>
+                    <a:lumOff val="40000"/>
+                  </a:schemeClr>
+                </a:solidFill>
+              </a:rPr>
+              <a:t>sharply (Adverb)</a:t>
+            </a:r>
+          </a:p>
+          <a:p>
+            <a:r>
+              <a:rPr lang="en-US" sz="2000" dirty="0">
+                <a:solidFill>
+                  <a:schemeClr val="accent6">
+                    <a:lumMod val="60000"/>
+                    <a:lumOff val="40000"/>
+                  </a:schemeClr>
+                </a:solidFill>
+              </a:rPr>
+              <a:t>due (Preposition)</a:t>
+            </a:r>
+          </a:p>
+          <a:p>
+            <a:r>
+              <a:rPr lang="en-US" sz="2000" dirty="0">
+                <a:solidFill>
+                  <a:schemeClr val="accent6">
+                    <a:lumMod val="60000"/>
+                    <a:lumOff val="40000"/>
+                  </a:schemeClr>
+                </a:solidFill>
+              </a:rPr>
+              <a:t>new (Adjective)</a:t>
+            </a:r>
+          </a:p>
+          <a:p>
+            <a:r>
+              <a:rPr lang="en-US" sz="2000" dirty="0">
+                <a:solidFill>
+                  <a:schemeClr val="accent6">
+                    <a:lumMod val="60000"/>
+                    <a:lumOff val="40000"/>
+                  </a:schemeClr>
+                </a:solidFill>
+              </a:rPr>
+              <a:t>policy (Noun)</a:t>
+            </a:r>
+          </a:p>
+          <a:p>
+            <a:r>
+              <a:rPr lang="en-US" sz="2000" dirty="0">
+                <a:solidFill>
+                  <a:schemeClr val="accent6">
+                    <a:lumMod val="60000"/>
+                    <a:lumOff val="40000"/>
+                  </a:schemeClr>
+                </a:solidFill>
+              </a:rPr>
+              <a:t>announcements (Noun)</a:t>
+            </a:r>
+          </a:p>
+          <a:p>
+            <a:endParaRPr lang="en-US" sz="2000" dirty="0">
               <a:solidFill>
                 <a:schemeClr val="accent6">
                   <a:lumMod val="60000"/>
@@ -20028,7 +19800,7 @@
           </a:p>
           <a:p>
             <a:r>
-              <a:rPr lang="en-US" sz="1400" b="1" dirty="0">
+              <a:rPr lang="en-US" sz="2000" b="1" dirty="0">
                 <a:solidFill>
                   <a:schemeClr val="accent6">
                     <a:lumMod val="60000"/>
@@ -20041,29 +19813,119 @@
           </a:p>
           <a:p>
             <a:r>
-              <a:rPr lang="en-US" sz="1400" dirty="0">
-                <a:solidFill>
-                  <a:schemeClr val="accent6">
-                    <a:lumMod val="60000"/>
-                    <a:lumOff val="40000"/>
-                  </a:schemeClr>
-                </a:solidFill>
-              </a:rPr>
-              <a:t>Helps distinguish between commands (verbs like "play", "call", "set") and objects (nouns like "music", "alarm").</a:t>
+              <a:rPr lang="en-US" sz="2000" dirty="0">
+                <a:solidFill>
+                  <a:schemeClr val="accent6">
+                    <a:lumMod val="60000"/>
+                    <a:lumOff val="40000"/>
+                  </a:schemeClr>
+                </a:solidFill>
+              </a:rPr>
+              <a:t>Nouns and verbs are prioritized to extract key points.</a:t>
+            </a:r>
+          </a:p>
+          <a:p>
+            <a:r>
+              <a:rPr lang="en-US" sz="2000" dirty="0">
+                <a:solidFill>
+                  <a:schemeClr val="accent6">
+                    <a:lumMod val="60000"/>
+                    <a:lumOff val="40000"/>
+                  </a:schemeClr>
+                </a:solidFill>
+              </a:rPr>
+              <a:t>Adjectives/adverbs like "sharply" might be selectively used for richer summaries.</a:t>
+            </a:r>
+          </a:p>
+        </p:txBody>
+      </p:sp>
+    </p:spTree>
+    <p:extLst>
+      <p:ext uri="{BB962C8B-B14F-4D97-AF65-F5344CB8AC3E}">
+        <p14:creationId xmlns:p14="http://schemas.microsoft.com/office/powerpoint/2010/main" val="1478735076"/>
+      </p:ext>
+    </p:extLst>
+  </p:cSld>
+  <p:clrMapOvr>
+    <a:masterClrMapping/>
+  </p:clrMapOvr>
+</p:sld>
+</file>
+
+<file path=ppt/slides/slide25.xml><?xml version="1.0" encoding="utf-8"?>
+<p:sld xmlns:a="http://schemas.openxmlformats.org/drawingml/2006/main" xmlns:r="http://schemas.openxmlformats.org/officeDocument/2006/relationships" xmlns:p="http://schemas.openxmlformats.org/presentationml/2006/main">
+  <p:cSld>
+    <p:spTree>
+      <p:nvGrpSpPr>
+        <p:cNvPr id="1" name="">
+          <a:extLst>
+            <a:ext uri="{FF2B5EF4-FFF2-40B4-BE49-F238E27FC236}">
+              <a16:creationId xmlns:a16="http://schemas.microsoft.com/office/drawing/2014/main" id="{57F4B1F4-1364-3356-9D67-43EF273B5CE0}"/>
+            </a:ext>
+          </a:extLst>
+        </p:cNvPr>
+        <p:cNvGrpSpPr/>
+        <p:nvPr/>
+      </p:nvGrpSpPr>
+      <p:grpSpPr>
+        <a:xfrm>
+          <a:off x="0" y="0"/>
+          <a:ext cx="0" cy="0"/>
+          <a:chOff x="0" y="0"/>
+          <a:chExt cx="0" cy="0"/>
+        </a:xfrm>
+      </p:grpSpPr>
+      <p:sp>
+        <p:nvSpPr>
+          <p:cNvPr id="2" name="Title 1">
+            <a:extLst>
+              <a:ext uri="{FF2B5EF4-FFF2-40B4-BE49-F238E27FC236}">
+                <a16:creationId xmlns:a16="http://schemas.microsoft.com/office/drawing/2014/main" id="{82402A43-1FE1-365D-FEF0-BF4A43695CB5}"/>
+              </a:ext>
+            </a:extLst>
+          </p:cNvPr>
+          <p:cNvSpPr>
+            <a:spLocks noGrp="1"/>
+          </p:cNvSpPr>
+          <p:nvPr>
+            <p:ph type="title"/>
+          </p:nvPr>
+        </p:nvSpPr>
+        <p:spPr>
+          <a:xfrm>
+            <a:off x="513461" y="118549"/>
+            <a:ext cx="6122231" cy="515092"/>
+          </a:xfrm>
+        </p:spPr>
+        <p:txBody>
+          <a:bodyPr>
+            <a:noAutofit/>
+          </a:bodyPr>
+          <a:lstStyle/>
+          <a:p>
+            <a:r>
+              <a:rPr lang="en-US" sz="2000" dirty="0"/>
+              <a:t>4.1) POS Tagging: Realistic Examples + How It's Used(p2)</a:t>
             </a:r>
           </a:p>
         </p:txBody>
       </p:sp>
       <p:sp>
         <p:nvSpPr>
-          <p:cNvPr id="8" name="TextBox 7"/>
+          <p:cNvPr id="9" name="TextBox 8">
+            <a:extLst>
+              <a:ext uri="{FF2B5EF4-FFF2-40B4-BE49-F238E27FC236}">
+                <a16:creationId xmlns:a16="http://schemas.microsoft.com/office/drawing/2014/main" id="{EBD4FB67-4603-8492-6FC5-C9A56B80D05F}"/>
+              </a:ext>
+            </a:extLst>
+          </p:cNvPr>
           <p:cNvSpPr txBox="1"/>
           <p:nvPr/>
         </p:nvSpPr>
         <p:spPr>
           <a:xfrm>
-            <a:off x="5780016" y="771787"/>
-            <a:ext cx="6182685" cy="3539430"/>
+            <a:off x="164592" y="1382338"/>
+            <a:ext cx="11448288" cy="3785652"/>
           </a:xfrm>
           <a:prstGeom prst="rect">
             <a:avLst/>
@@ -20077,33 +19939,55 @@
           <a:lstStyle/>
           <a:p>
             <a:r>
-              <a:rPr lang="en-US" sz="1400" b="1" dirty="0">
-                <a:solidFill>
-                  <a:schemeClr val="accent6">
-                    <a:lumMod val="60000"/>
-                    <a:lumOff val="40000"/>
-                  </a:schemeClr>
-                </a:solidFill>
-              </a:rPr>
-              <a:t>3. Text Summarization Tools</a:t>
-            </a:r>
-          </a:p>
-          <a:p>
-            <a:r>
-              <a:rPr lang="en-US" sz="1400" dirty="0">
-                <a:solidFill>
-                  <a:schemeClr val="accent6">
-                    <a:lumMod val="60000"/>
-                    <a:lumOff val="40000"/>
-                  </a:schemeClr>
-                </a:solidFill>
-              </a:rPr>
-              <a:t>Example Input: "The stock market rose sharply due to the new policy announcements."</a:t>
-            </a:r>
-          </a:p>
-          <a:p>
-            <a:r>
-              <a:rPr lang="en-US" sz="1400" b="1" dirty="0">
+              <a:rPr lang="en-US" sz="2400" b="1" dirty="0">
+                <a:solidFill>
+                  <a:schemeClr val="accent6">
+                    <a:lumMod val="60000"/>
+                    <a:lumOff val="40000"/>
+                  </a:schemeClr>
+                </a:solidFill>
+              </a:rPr>
+              <a:t>3. Grammar Checkers ( </a:t>
+            </a:r>
+            <a:r>
+              <a:rPr lang="en-US" sz="2400" b="1" dirty="0" err="1">
+                <a:solidFill>
+                  <a:schemeClr val="accent6">
+                    <a:lumMod val="60000"/>
+                    <a:lumOff val="40000"/>
+                  </a:schemeClr>
+                </a:solidFill>
+              </a:rPr>
+              <a:t>Grammarly</a:t>
+            </a:r>
+            <a:r>
+              <a:rPr lang="en-US" sz="2400" b="1" dirty="0">
+                <a:solidFill>
+                  <a:schemeClr val="accent6">
+                    <a:lumMod val="60000"/>
+                    <a:lumOff val="40000"/>
+                  </a:schemeClr>
+                </a:solidFill>
+              </a:rPr>
+              <a:t>, MS Word)</a:t>
+            </a:r>
+          </a:p>
+          <a:p>
+            <a:r>
+              <a:rPr lang="en-US" sz="2400" dirty="0">
+                <a:solidFill>
+                  <a:schemeClr val="accent6">
+                    <a:lumMod val="60000"/>
+                    <a:lumOff val="40000"/>
+                  </a:schemeClr>
+                </a:solidFill>
+              </a:rPr>
+              <a:t>Example Input: “He run fast.”</a:t>
+            </a:r>
+          </a:p>
+          <a:p>
+            <a:r>
+              <a:rPr lang="en-US" sz="2400" b="1" dirty="0">
                 <a:solidFill>
                   <a:schemeClr val="accent6">
                     <a:lumMod val="60000"/>
@@ -20116,110 +20000,45 @@
           </a:p>
           <a:p>
             <a:r>
-              <a:rPr lang="en-US" sz="1400" dirty="0">
-                <a:solidFill>
-                  <a:schemeClr val="accent6">
-                    <a:lumMod val="60000"/>
-                    <a:lumOff val="40000"/>
-                  </a:schemeClr>
-                </a:solidFill>
-              </a:rPr>
-              <a:t>stock (Noun)</a:t>
-            </a:r>
-          </a:p>
-          <a:p>
-            <a:r>
-              <a:rPr lang="en-US" sz="1400" dirty="0">
-                <a:solidFill>
-                  <a:schemeClr val="accent6">
-                    <a:lumMod val="60000"/>
-                    <a:lumOff val="40000"/>
-                  </a:schemeClr>
-                </a:solidFill>
-              </a:rPr>
-              <a:t>market (Noun)</a:t>
-            </a:r>
-          </a:p>
-          <a:p>
-            <a:r>
-              <a:rPr lang="en-US" sz="1400" dirty="0">
-                <a:solidFill>
-                  <a:schemeClr val="accent6">
-                    <a:lumMod val="60000"/>
-                    <a:lumOff val="40000"/>
-                  </a:schemeClr>
-                </a:solidFill>
-              </a:rPr>
-              <a:t>rose (Verb)</a:t>
-            </a:r>
-          </a:p>
-          <a:p>
-            <a:r>
-              <a:rPr lang="en-US" sz="1400" dirty="0">
-                <a:solidFill>
-                  <a:schemeClr val="accent6">
-                    <a:lumMod val="60000"/>
-                    <a:lumOff val="40000"/>
-                  </a:schemeClr>
-                </a:solidFill>
-              </a:rPr>
-              <a:t>sharply (Adverb)</a:t>
-            </a:r>
-          </a:p>
-          <a:p>
-            <a:r>
-              <a:rPr lang="en-US" sz="1400" dirty="0">
-                <a:solidFill>
-                  <a:schemeClr val="accent6">
-                    <a:lumMod val="60000"/>
-                    <a:lumOff val="40000"/>
-                  </a:schemeClr>
-                </a:solidFill>
-              </a:rPr>
-              <a:t>due (Preposition)</a:t>
-            </a:r>
-          </a:p>
-          <a:p>
-            <a:r>
-              <a:rPr lang="en-US" sz="1400" dirty="0">
-                <a:solidFill>
-                  <a:schemeClr val="accent6">
-                    <a:lumMod val="60000"/>
-                    <a:lumOff val="40000"/>
-                  </a:schemeClr>
-                </a:solidFill>
-              </a:rPr>
-              <a:t>new (Adjective)</a:t>
-            </a:r>
-          </a:p>
-          <a:p>
-            <a:r>
-              <a:rPr lang="en-US" sz="1400" dirty="0">
-                <a:solidFill>
-                  <a:schemeClr val="accent6">
-                    <a:lumMod val="60000"/>
-                    <a:lumOff val="40000"/>
-                  </a:schemeClr>
-                </a:solidFill>
-              </a:rPr>
-              <a:t>policy (Noun)</a:t>
-            </a:r>
-          </a:p>
-          <a:p>
-            <a:r>
-              <a:rPr lang="en-US" sz="1400" dirty="0">
-                <a:solidFill>
-                  <a:schemeClr val="accent6">
-                    <a:lumMod val="60000"/>
-                    <a:lumOff val="40000"/>
-                  </a:schemeClr>
-                </a:solidFill>
-              </a:rPr>
-              <a:t>announcements (Noun)</a:t>
-            </a:r>
-          </a:p>
-          <a:p>
-            <a:endParaRPr lang="en-US" sz="1400" dirty="0">
+              <a:rPr lang="en-US" sz="2400" dirty="0">
+                <a:solidFill>
+                  <a:schemeClr val="accent6">
+                    <a:lumMod val="60000"/>
+                    <a:lumOff val="40000"/>
+                  </a:schemeClr>
+                </a:solidFill>
+              </a:rPr>
+              <a:t>He (Pronoun)</a:t>
+            </a:r>
+          </a:p>
+          <a:p>
+            <a:r>
+              <a:rPr lang="en-US" sz="2400" dirty="0">
+                <a:solidFill>
+                  <a:schemeClr val="accent6">
+                    <a:lumMod val="60000"/>
+                    <a:lumOff val="40000"/>
+                  </a:schemeClr>
+                </a:solidFill>
+              </a:rPr>
+              <a:t>run (Verb)</a:t>
+            </a:r>
+          </a:p>
+          <a:p>
+            <a:r>
+              <a:rPr lang="en-US" sz="2400" dirty="0">
+                <a:solidFill>
+                  <a:schemeClr val="accent6">
+                    <a:lumMod val="60000"/>
+                    <a:lumOff val="40000"/>
+                  </a:schemeClr>
+                </a:solidFill>
+              </a:rPr>
+              <a:t>fast (Adverb)</a:t>
+            </a:r>
+          </a:p>
+          <a:p>
+            <a:endParaRPr lang="en-US" sz="2400" dirty="0">
               <a:solidFill>
                 <a:schemeClr val="accent6">
                   <a:lumMod val="60000"/>
@@ -20230,7 +20049,7 @@
           </a:p>
           <a:p>
             <a:r>
-              <a:rPr lang="en-US" sz="1400" b="1" dirty="0">
+              <a:rPr lang="en-US" sz="2400" b="1" dirty="0">
                 <a:solidFill>
                   <a:schemeClr val="accent6">
                     <a:lumMod val="60000"/>
@@ -20243,198 +20062,7 @@
           </a:p>
           <a:p>
             <a:r>
-              <a:rPr lang="en-US" sz="1400" dirty="0">
-                <a:solidFill>
-                  <a:schemeClr val="accent6">
-                    <a:lumMod val="60000"/>
-                    <a:lumOff val="40000"/>
-                  </a:schemeClr>
-                </a:solidFill>
-              </a:rPr>
-              <a:t>Nouns and verbs are prioritized to extract key points.</a:t>
-            </a:r>
-          </a:p>
-          <a:p>
-            <a:r>
-              <a:rPr lang="en-US" sz="1400" dirty="0">
-                <a:solidFill>
-                  <a:schemeClr val="accent6">
-                    <a:lumMod val="60000"/>
-                    <a:lumOff val="40000"/>
-                  </a:schemeClr>
-                </a:solidFill>
-              </a:rPr>
-              <a:t>Adjectives/adverbs like "sharply" might be selectively used for richer summaries.</a:t>
-            </a:r>
-          </a:p>
-        </p:txBody>
-      </p:sp>
-      <p:sp>
-        <p:nvSpPr>
-          <p:cNvPr id="9" name="TextBox 8"/>
-          <p:cNvSpPr txBox="1"/>
-          <p:nvPr/>
-        </p:nvSpPr>
-        <p:spPr>
-          <a:xfrm>
-            <a:off x="5838738" y="4655890"/>
-            <a:ext cx="6123963" cy="2246769"/>
-          </a:xfrm>
-          <a:prstGeom prst="rect">
-            <a:avLst/>
-          </a:prstGeom>
-          <a:noFill/>
-        </p:spPr>
-        <p:txBody>
-          <a:bodyPr wrap="square" rtlCol="0">
-            <a:spAutoFit/>
-          </a:bodyPr>
-          <a:lstStyle/>
-          <a:p>
-            <a:r>
-              <a:rPr lang="en-US" sz="1400" b="1" dirty="0">
-                <a:solidFill>
-                  <a:schemeClr val="accent6">
-                    <a:lumMod val="60000"/>
-                    <a:lumOff val="40000"/>
-                  </a:schemeClr>
-                </a:solidFill>
-              </a:rPr>
-              <a:t>4. Grammar Checkers ( </a:t>
-            </a:r>
-            <a:r>
-              <a:rPr lang="en-US" sz="1400" b="1" dirty="0" err="1">
-                <a:solidFill>
-                  <a:schemeClr val="accent6">
-                    <a:lumMod val="60000"/>
-                    <a:lumOff val="40000"/>
-                  </a:schemeClr>
-                </a:solidFill>
-              </a:rPr>
-              <a:t>Grammarly</a:t>
-            </a:r>
-            <a:r>
-              <a:rPr lang="en-US" sz="1400" b="1" dirty="0">
-                <a:solidFill>
-                  <a:schemeClr val="accent6">
-                    <a:lumMod val="60000"/>
-                    <a:lumOff val="40000"/>
-                  </a:schemeClr>
-                </a:solidFill>
-              </a:rPr>
-              <a:t>, MS Word)</a:t>
-            </a:r>
-          </a:p>
-          <a:p>
-            <a:r>
-              <a:rPr lang="en-US" sz="1400" dirty="0">
-                <a:solidFill>
-                  <a:schemeClr val="accent6">
-                    <a:lumMod val="60000"/>
-                    <a:lumOff val="40000"/>
-                  </a:schemeClr>
-                </a:solidFill>
-              </a:rPr>
-              <a:t>Example Input: "He run fast.“ &lt;- TODO: Try this in </a:t>
-            </a:r>
-            <a:r>
-              <a:rPr lang="en-US" sz="1400" dirty="0" err="1">
-                <a:solidFill>
-                  <a:schemeClr val="accent6">
-                    <a:lumMod val="60000"/>
-                    <a:lumOff val="40000"/>
-                  </a:schemeClr>
-                </a:solidFill>
-              </a:rPr>
-              <a:t>grammarly</a:t>
-            </a:r>
-            <a:endParaRPr lang="en-US" sz="1400" dirty="0">
-              <a:solidFill>
-                <a:schemeClr val="accent6">
-                  <a:lumMod val="60000"/>
-                  <a:lumOff val="40000"/>
-                </a:schemeClr>
-              </a:solidFill>
-            </a:endParaRPr>
-          </a:p>
-          <a:p>
-            <a:r>
-              <a:rPr lang="en-US" sz="1400" b="1" dirty="0">
-                <a:solidFill>
-                  <a:schemeClr val="accent6">
-                    <a:lumMod val="60000"/>
-                    <a:lumOff val="40000"/>
-                  </a:schemeClr>
-                </a:solidFill>
-              </a:rPr>
-              <a:t>POS Tags:</a:t>
-            </a:r>
-          </a:p>
-          <a:p>
-            <a:r>
-              <a:rPr lang="en-US" sz="1400" dirty="0">
-                <a:solidFill>
-                  <a:schemeClr val="accent6">
-                    <a:lumMod val="60000"/>
-                    <a:lumOff val="40000"/>
-                  </a:schemeClr>
-                </a:solidFill>
-              </a:rPr>
-              <a:t>He (Pronoun)</a:t>
-            </a:r>
-          </a:p>
-          <a:p>
-            <a:r>
-              <a:rPr lang="en-US" sz="1400" dirty="0">
-                <a:solidFill>
-                  <a:schemeClr val="accent6">
-                    <a:lumMod val="60000"/>
-                    <a:lumOff val="40000"/>
-                  </a:schemeClr>
-                </a:solidFill>
-              </a:rPr>
-              <a:t>run (Verb)</a:t>
-            </a:r>
-          </a:p>
-          <a:p>
-            <a:r>
-              <a:rPr lang="en-US" sz="1400" dirty="0">
-                <a:solidFill>
-                  <a:schemeClr val="accent6">
-                    <a:lumMod val="60000"/>
-                    <a:lumOff val="40000"/>
-                  </a:schemeClr>
-                </a:solidFill>
-              </a:rPr>
-              <a:t>fast (Adverb)</a:t>
-            </a:r>
-          </a:p>
-          <a:p>
-            <a:endParaRPr lang="en-US" sz="1400" dirty="0">
-              <a:solidFill>
-                <a:schemeClr val="accent6">
-                  <a:lumMod val="60000"/>
-                  <a:lumOff val="40000"/>
-                </a:schemeClr>
-              </a:solidFill>
-            </a:endParaRPr>
-          </a:p>
-          <a:p>
-            <a:r>
-              <a:rPr lang="en-US" sz="1400" b="1" dirty="0">
-                <a:solidFill>
-                  <a:schemeClr val="accent6">
-                    <a:lumMod val="60000"/>
-                    <a:lumOff val="40000"/>
-                  </a:schemeClr>
-                </a:solidFill>
-              </a:rPr>
-              <a:t>Usage:</a:t>
-            </a:r>
-          </a:p>
-          <a:p>
-            <a:r>
-              <a:rPr lang="en-US" sz="1400" dirty="0">
+              <a:rPr lang="en-US" sz="2400" dirty="0">
                 <a:solidFill>
                   <a:schemeClr val="accent6">
                     <a:lumMod val="60000"/>
@@ -20450,7 +20078,7 @@
     </p:spTree>
     <p:extLst>
       <p:ext uri="{BB962C8B-B14F-4D97-AF65-F5344CB8AC3E}">
-        <p14:creationId xmlns:p14="http://schemas.microsoft.com/office/powerpoint/2010/main" val="1478735076"/>
+        <p14:creationId xmlns:p14="http://schemas.microsoft.com/office/powerpoint/2010/main" val="1418063291"/>
       </p:ext>
     </p:extLst>
   </p:cSld>
@@ -20515,7 +20143,7 @@
         <p:spPr>
           <a:xfrm>
             <a:off x="243281" y="738231"/>
-            <a:ext cx="5108895" cy="2893100"/>
+            <a:ext cx="10418623" cy="4893647"/>
           </a:xfrm>
           <a:prstGeom prst="rect">
             <a:avLst/>
@@ -20529,7 +20157,7 @@
           <a:lstStyle/>
           <a:p>
             <a:r>
-              <a:rPr lang="en-US" sz="1400" b="1" dirty="0">
+              <a:rPr lang="en-US" sz="2400" b="1" dirty="0">
                 <a:solidFill>
                   <a:schemeClr val="accent6">
                     <a:lumMod val="60000"/>
@@ -20541,111 +20169,7 @@
             </a:r>
           </a:p>
           <a:p>
-            <a:r>
-              <a:rPr lang="en-US" sz="1400" dirty="0">
-                <a:solidFill>
-                  <a:schemeClr val="accent6">
-                    <a:lumMod val="60000"/>
-                    <a:lumOff val="40000"/>
-                  </a:schemeClr>
-                </a:solidFill>
-              </a:rPr>
-              <a:t>Example Input: "Apple is looking at buying a startup in the UK."</a:t>
-            </a:r>
-          </a:p>
-          <a:p>
-            <a:r>
-              <a:rPr lang="en-US" sz="1400" b="1" dirty="0">
-                <a:solidFill>
-                  <a:schemeClr val="accent6">
-                    <a:lumMod val="60000"/>
-                    <a:lumOff val="40000"/>
-                  </a:schemeClr>
-                </a:solidFill>
-              </a:rPr>
-              <a:t>POS Tags:</a:t>
-            </a:r>
-          </a:p>
-          <a:p>
-            <a:r>
-              <a:rPr lang="en-US" sz="1400" dirty="0">
-                <a:solidFill>
-                  <a:schemeClr val="accent6">
-                    <a:lumMod val="60000"/>
-                    <a:lumOff val="40000"/>
-                  </a:schemeClr>
-                </a:solidFill>
-              </a:rPr>
-              <a:t>Apple (Proper Noun)</a:t>
-            </a:r>
-          </a:p>
-          <a:p>
-            <a:r>
-              <a:rPr lang="en-US" sz="1400" dirty="0">
-                <a:solidFill>
-                  <a:schemeClr val="accent6">
-                    <a:lumMod val="60000"/>
-                    <a:lumOff val="40000"/>
-                  </a:schemeClr>
-                </a:solidFill>
-              </a:rPr>
-              <a:t>is (Verb)</a:t>
-            </a:r>
-          </a:p>
-          <a:p>
-            <a:r>
-              <a:rPr lang="en-US" sz="1400" dirty="0">
-                <a:solidFill>
-                  <a:schemeClr val="accent6">
-                    <a:lumMod val="60000"/>
-                    <a:lumOff val="40000"/>
-                  </a:schemeClr>
-                </a:solidFill>
-              </a:rPr>
-              <a:t>looking (Verb)</a:t>
-            </a:r>
-          </a:p>
-          <a:p>
-            <a:r>
-              <a:rPr lang="en-US" sz="1400" dirty="0">
-                <a:solidFill>
-                  <a:schemeClr val="accent6">
-                    <a:lumMod val="60000"/>
-                    <a:lumOff val="40000"/>
-                  </a:schemeClr>
-                </a:solidFill>
-              </a:rPr>
-              <a:t>buying (Verb)</a:t>
-            </a:r>
-          </a:p>
-          <a:p>
-            <a:r>
-              <a:rPr lang="en-US" sz="1400" dirty="0">
-                <a:solidFill>
-                  <a:schemeClr val="accent6">
-                    <a:lumMod val="60000"/>
-                    <a:lumOff val="40000"/>
-                  </a:schemeClr>
-                </a:solidFill>
-              </a:rPr>
-              <a:t>startup (Noun)</a:t>
-            </a:r>
-          </a:p>
-          <a:p>
-            <a:r>
-              <a:rPr lang="en-US" sz="1400" dirty="0">
-                <a:solidFill>
-                  <a:schemeClr val="accent6">
-                    <a:lumMod val="60000"/>
-                    <a:lumOff val="40000"/>
-                  </a:schemeClr>
-                </a:solidFill>
-              </a:rPr>
-              <a:t>UK (Proper Noun)</a:t>
-            </a:r>
-          </a:p>
-          <a:p>
-            <a:endParaRPr lang="en-US" sz="1400" dirty="0">
+            <a:endParaRPr lang="en-US" sz="2400" b="1" dirty="0">
               <a:solidFill>
                 <a:schemeClr val="accent6">
                   <a:lumMod val="60000"/>
@@ -20656,82 +20180,20 @@
           </a:p>
           <a:p>
             <a:r>
-              <a:rPr lang="en-US" sz="1400" b="1" dirty="0">
-                <a:solidFill>
-                  <a:schemeClr val="accent6">
-                    <a:lumMod val="60000"/>
-                    <a:lumOff val="40000"/>
-                  </a:schemeClr>
-                </a:solidFill>
-              </a:rPr>
-              <a:t>Usage:</a:t>
-            </a:r>
-          </a:p>
-          <a:p>
-            <a:r>
-              <a:rPr lang="en-US" sz="1400" dirty="0">
-                <a:solidFill>
-                  <a:schemeClr val="accent6">
-                    <a:lumMod val="60000"/>
-                    <a:lumOff val="40000"/>
-                  </a:schemeClr>
-                </a:solidFill>
-              </a:rPr>
-              <a:t>Helps distinguish "Apple" as a company (not a fruit!) based on context.</a:t>
-            </a:r>
-          </a:p>
-        </p:txBody>
-      </p:sp>
-      <p:sp>
-        <p:nvSpPr>
-          <p:cNvPr id="6" name="TextBox 5"/>
-          <p:cNvSpPr txBox="1"/>
-          <p:nvPr/>
-        </p:nvSpPr>
-        <p:spPr>
-          <a:xfrm>
-            <a:off x="218114" y="3716322"/>
-            <a:ext cx="5712902" cy="2893100"/>
-          </a:xfrm>
-          <a:prstGeom prst="rect">
-            <a:avLst/>
-          </a:prstGeom>
-          <a:noFill/>
-        </p:spPr>
-        <p:txBody>
-          <a:bodyPr wrap="square" rtlCol="0">
-            <a:spAutoFit/>
-          </a:bodyPr>
-          <a:lstStyle/>
-          <a:p>
-            <a:r>
-              <a:rPr lang="en-US" sz="1400" b="1" dirty="0">
-                <a:solidFill>
-                  <a:schemeClr val="accent6">
-                    <a:lumMod val="60000"/>
-                    <a:lumOff val="40000"/>
-                  </a:schemeClr>
-                </a:solidFill>
-              </a:rPr>
-              <a:t>6. Search Engines Understanding Queries</a:t>
-            </a:r>
-          </a:p>
-          <a:p>
-            <a:r>
-              <a:rPr lang="en-US" sz="1400" dirty="0">
-                <a:solidFill>
-                  <a:schemeClr val="accent6">
-                    <a:lumMod val="60000"/>
-                    <a:lumOff val="40000"/>
-                  </a:schemeClr>
-                </a:solidFill>
-              </a:rPr>
-              <a:t>Example Input: "best places to visit near me"</a:t>
-            </a:r>
-          </a:p>
-          <a:p>
-            <a:r>
-              <a:rPr lang="en-US" sz="1400" b="1" dirty="0">
+              <a:rPr lang="en-US" sz="2400" dirty="0">
+                <a:solidFill>
+                  <a:schemeClr val="accent6">
+                    <a:lumMod val="60000"/>
+                    <a:lumOff val="40000"/>
+                  </a:schemeClr>
+                </a:solidFill>
+              </a:rPr>
+              <a:t>Example Input: "Apple is looking at buying a startup in the UK."</a:t>
+            </a:r>
+          </a:p>
+          <a:p>
+            <a:r>
+              <a:rPr lang="en-US" sz="2400" b="1" dirty="0">
                 <a:solidFill>
                   <a:schemeClr val="accent6">
                     <a:lumMod val="60000"/>
@@ -20744,84 +20206,84 @@
           </a:p>
           <a:p>
             <a:r>
-              <a:rPr lang="en-US" sz="1400" dirty="0">
-                <a:solidFill>
-                  <a:schemeClr val="accent6">
-                    <a:lumMod val="60000"/>
-                    <a:lumOff val="40000"/>
-                  </a:schemeClr>
-                </a:solidFill>
-              </a:rPr>
-              <a:t>best (Adjective)</a:t>
-            </a:r>
-          </a:p>
-          <a:p>
-            <a:r>
-              <a:rPr lang="en-US" sz="1400" dirty="0">
-                <a:solidFill>
-                  <a:schemeClr val="accent6">
-                    <a:lumMod val="60000"/>
-                    <a:lumOff val="40000"/>
-                  </a:schemeClr>
-                </a:solidFill>
-              </a:rPr>
-              <a:t>places (Noun)</a:t>
-            </a:r>
-          </a:p>
-          <a:p>
-            <a:r>
-              <a:rPr lang="en-US" sz="1400" dirty="0">
-                <a:solidFill>
-                  <a:schemeClr val="accent6">
-                    <a:lumMod val="60000"/>
-                    <a:lumOff val="40000"/>
-                  </a:schemeClr>
-                </a:solidFill>
-              </a:rPr>
-              <a:t>to (Preposition)</a:t>
-            </a:r>
-          </a:p>
-          <a:p>
-            <a:r>
-              <a:rPr lang="en-US" sz="1400" dirty="0">
-                <a:solidFill>
-                  <a:schemeClr val="accent6">
-                    <a:lumMod val="60000"/>
-                    <a:lumOff val="40000"/>
-                  </a:schemeClr>
-                </a:solidFill>
-              </a:rPr>
-              <a:t>visit (Verb)</a:t>
-            </a:r>
-          </a:p>
-          <a:p>
-            <a:r>
-              <a:rPr lang="en-US" sz="1400" dirty="0">
-                <a:solidFill>
-                  <a:schemeClr val="accent6">
-                    <a:lumMod val="60000"/>
-                    <a:lumOff val="40000"/>
-                  </a:schemeClr>
-                </a:solidFill>
-              </a:rPr>
-              <a:t>near (Preposition)</a:t>
-            </a:r>
-          </a:p>
-          <a:p>
-            <a:r>
-              <a:rPr lang="en-US" sz="1400" dirty="0">
-                <a:solidFill>
-                  <a:schemeClr val="accent6">
-                    <a:lumMod val="60000"/>
-                    <a:lumOff val="40000"/>
-                  </a:schemeClr>
-                </a:solidFill>
-              </a:rPr>
-              <a:t>me (Pronoun)</a:t>
-            </a:r>
-          </a:p>
-          <a:p>
-            <a:endParaRPr lang="en-US" sz="1400" dirty="0">
+              <a:rPr lang="en-US" sz="2400" dirty="0">
+                <a:solidFill>
+                  <a:schemeClr val="accent6">
+                    <a:lumMod val="60000"/>
+                    <a:lumOff val="40000"/>
+                  </a:schemeClr>
+                </a:solidFill>
+              </a:rPr>
+              <a:t>Apple (Proper Noun)</a:t>
+            </a:r>
+          </a:p>
+          <a:p>
+            <a:r>
+              <a:rPr lang="en-US" sz="2400" dirty="0">
+                <a:solidFill>
+                  <a:schemeClr val="accent6">
+                    <a:lumMod val="60000"/>
+                    <a:lumOff val="40000"/>
+                  </a:schemeClr>
+                </a:solidFill>
+              </a:rPr>
+              <a:t>is (Verb)</a:t>
+            </a:r>
+          </a:p>
+          <a:p>
+            <a:r>
+              <a:rPr lang="en-US" sz="2400" dirty="0">
+                <a:solidFill>
+                  <a:schemeClr val="accent6">
+                    <a:lumMod val="60000"/>
+                    <a:lumOff val="40000"/>
+                  </a:schemeClr>
+                </a:solidFill>
+              </a:rPr>
+              <a:t>looking (Verb)</a:t>
+            </a:r>
+          </a:p>
+          <a:p>
+            <a:r>
+              <a:rPr lang="en-US" sz="2400" dirty="0">
+                <a:solidFill>
+                  <a:schemeClr val="accent6">
+                    <a:lumMod val="60000"/>
+                    <a:lumOff val="40000"/>
+                  </a:schemeClr>
+                </a:solidFill>
+              </a:rPr>
+              <a:t>buying (Verb)</a:t>
+            </a:r>
+          </a:p>
+          <a:p>
+            <a:r>
+              <a:rPr lang="en-US" sz="2400" dirty="0">
+                <a:solidFill>
+                  <a:schemeClr val="accent6">
+                    <a:lumMod val="60000"/>
+                    <a:lumOff val="40000"/>
+                  </a:schemeClr>
+                </a:solidFill>
+              </a:rPr>
+              <a:t>startup (Noun)</a:t>
+            </a:r>
+          </a:p>
+          <a:p>
+            <a:r>
+              <a:rPr lang="en-US" sz="2400" dirty="0">
+                <a:solidFill>
+                  <a:schemeClr val="accent6">
+                    <a:lumMod val="60000"/>
+                    <a:lumOff val="40000"/>
+                  </a:schemeClr>
+                </a:solidFill>
+              </a:rPr>
+              <a:t>UK (Proper Noun)</a:t>
+            </a:r>
+          </a:p>
+          <a:p>
+            <a:endParaRPr lang="en-US" sz="2400" dirty="0">
               <a:solidFill>
                 <a:schemeClr val="accent6">
                   <a:lumMod val="60000"/>
@@ -20832,7 +20294,7 @@
           </a:p>
           <a:p>
             <a:r>
-              <a:rPr lang="en-US" sz="1400" b="1" dirty="0">
+              <a:rPr lang="en-US" sz="2400" b="1" dirty="0">
                 <a:solidFill>
                   <a:schemeClr val="accent6">
                     <a:lumMod val="60000"/>
@@ -20845,15 +20307,15 @@
           </a:p>
           <a:p>
             <a:r>
-              <a:rPr lang="en-US" sz="1400" dirty="0">
-                <a:solidFill>
-                  <a:schemeClr val="accent6">
-                    <a:lumMod val="60000"/>
-                    <a:lumOff val="40000"/>
-                  </a:schemeClr>
-                </a:solidFill>
-              </a:rPr>
-              <a:t>Recognizes "places" as the core noun and "visit" as the action — tailors better location-based search results.</a:t>
+              <a:rPr lang="en-US" sz="2400" dirty="0">
+                <a:solidFill>
+                  <a:schemeClr val="accent6">
+                    <a:lumMod val="60000"/>
+                    <a:lumOff val="40000"/>
+                  </a:schemeClr>
+                </a:solidFill>
+              </a:rPr>
+              <a:t>Helps distinguish "Apple" as a company (not a fruit!) based on context.</a:t>
             </a:r>
           </a:p>
         </p:txBody>
@@ -24594,14 +24056,14 @@
           <p:nvPr>
             <p:extLst>
               <p:ext uri="{D42A27DB-BD31-4B8C-83A1-F6EECF244321}">
-                <p14:modId xmlns:p14="http://schemas.microsoft.com/office/powerpoint/2010/main" val="912844841"/>
+                <p14:modId xmlns:p14="http://schemas.microsoft.com/office/powerpoint/2010/main" val="4068331741"/>
               </p:ext>
             </p:extLst>
           </p:nvPr>
         </p:nvGraphicFramePr>
         <p:xfrm>
-          <a:off x="535344" y="3429000"/>
-          <a:ext cx="7895424" cy="3200400"/>
+          <a:off x="635928" y="3858768"/>
+          <a:ext cx="9431616" cy="2286000"/>
         </p:xfrm>
         <a:graphic>
           <a:graphicData uri="http://schemas.openxmlformats.org/drawingml/2006/table">
@@ -24615,7 +24077,7 @@
                     </a:ext>
                   </a:extLst>
                 </a:gridCol>
-                <a:gridCol w="5660136">
+                <a:gridCol w="7196328">
                   <a:extLst>
                     <a:ext uri="{9D8B030D-6E8A-4147-A177-3AD203B41FA5}">
                       <a16:colId xmlns:a16="http://schemas.microsoft.com/office/drawing/2014/main" val="160745686"/>
@@ -24631,7 +24093,7 @@
                     <a:p>
                       <a:pPr algn="ctr"/>
                       <a:r>
-                        <a:rPr lang="en-US" sz="1800" b="1" dirty="0">
+                        <a:rPr lang="en-US" sz="2000" b="1" dirty="0">
                           <a:solidFill>
                             <a:schemeClr val="accent6">
                               <a:lumMod val="60000"/>
@@ -24689,7 +24151,7 @@
                     <a:p>
                       <a:pPr algn="ctr"/>
                       <a:r>
-                        <a:rPr lang="en-US" sz="1800" b="1" dirty="0">
+                        <a:rPr lang="en-US" sz="2000" b="1" dirty="0">
                           <a:solidFill>
                             <a:schemeClr val="accent6">
                               <a:lumMod val="60000"/>
@@ -24703,7 +24165,7 @@
                     <a:p>
                       <a:pPr algn="ctr"/>
                       <a:r>
-                        <a:rPr lang="en-US" sz="1800" b="1" dirty="0">
+                        <a:rPr lang="en-US" sz="2000" b="1" dirty="0">
                           <a:solidFill>
                             <a:schemeClr val="accent6">
                               <a:lumMod val="60000"/>
@@ -24714,7 +24176,7 @@
                         <a:t>(</a:t>
                       </a:r>
                       <a:r>
-                        <a:rPr lang="en-US" sz="1800" dirty="0">
+                        <a:rPr lang="en-US" sz="2000" dirty="0">
                           <a:solidFill>
                             <a:schemeClr val="accent6">
                               <a:lumMod val="60000"/>
@@ -24725,7 +24187,7 @@
                         <a:t>Using the </a:t>
                       </a:r>
                       <a:r>
-                        <a:rPr lang="en-US" sz="1800" b="1" dirty="0">
+                        <a:rPr lang="en-US" sz="2000" b="1" dirty="0">
                           <a:solidFill>
                             <a:schemeClr val="accent6">
                               <a:lumMod val="60000"/>
@@ -24736,7 +24198,7 @@
                         <a:t>Porter Stemmer</a:t>
                       </a:r>
                       <a:r>
-                        <a:rPr lang="en-US" sz="1800" b="0" baseline="0" dirty="0">
+                        <a:rPr lang="en-US" sz="2000" b="0" baseline="0" dirty="0">
                           <a:solidFill>
                             <a:schemeClr val="accent6">
                               <a:lumMod val="60000"/>
@@ -24747,7 +24209,7 @@
                         <a:t> - </a:t>
                       </a:r>
                       <a:r>
-                        <a:rPr lang="en-US" sz="1800" dirty="0">
+                        <a:rPr lang="en-US" sz="2000" dirty="0">
                           <a:solidFill>
                             <a:schemeClr val="accent6">
                               <a:lumMod val="60000"/>
@@ -24757,7 +24219,7 @@
                         </a:rPr>
                         <a:t>most common stemmers)</a:t>
                       </a:r>
-                      <a:endParaRPr lang="en-US" sz="1800" b="1" dirty="0">
+                      <a:endParaRPr lang="en-US" sz="2000" b="1" dirty="0">
                         <a:solidFill>
                           <a:schemeClr val="accent6">
                             <a:lumMod val="60000"/>
@@ -24820,7 +24282,7 @@
                     <a:p>
                       <a:pPr algn="ctr"/>
                       <a:r>
-                        <a:rPr lang="en-US" sz="1800" b="0" dirty="0">
+                        <a:rPr lang="en-US" sz="2000" b="0" dirty="0">
                           <a:solidFill>
                             <a:schemeClr val="accent6">
                               <a:lumMod val="60000"/>
@@ -24878,7 +24340,7 @@
                     <a:p>
                       <a:pPr algn="ctr"/>
                       <a:r>
-                        <a:rPr lang="en-US" sz="1800" b="0" dirty="0">
+                        <a:rPr lang="en-US" sz="2000" b="0" dirty="0">
                           <a:solidFill>
                             <a:schemeClr val="accent6">
                               <a:lumMod val="60000"/>
@@ -24943,7 +24405,7 @@
                     <a:p>
                       <a:pPr algn="ctr"/>
                       <a:r>
-                        <a:rPr lang="en-US" sz="1800" b="0">
+                        <a:rPr lang="en-US" sz="2000" b="0" dirty="0">
                           <a:solidFill>
                             <a:schemeClr val="accent6">
                               <a:lumMod val="60000"/>
@@ -25001,7 +24463,7 @@
                     <a:p>
                       <a:pPr algn="ctr"/>
                       <a:r>
-                        <a:rPr lang="en-US" sz="1800" b="0" dirty="0" err="1">
+                        <a:rPr lang="en-US" sz="2000" b="0" dirty="0" err="1">
                           <a:solidFill>
                             <a:schemeClr val="accent6">
                               <a:lumMod val="60000"/>
@@ -25011,7 +24473,7 @@
                         </a:rPr>
                         <a:t>happili</a:t>
                       </a:r>
-                      <a:endParaRPr lang="en-US" sz="1800" b="0" dirty="0">
+                      <a:endParaRPr lang="en-US" sz="2000" b="0" dirty="0">
                         <a:solidFill>
                           <a:schemeClr val="accent6">
                             <a:lumMod val="60000"/>
@@ -25074,7 +24536,7 @@
                     <a:p>
                       <a:pPr algn="ctr"/>
                       <a:r>
-                        <a:rPr lang="en-US" sz="1800" b="0" dirty="0">
+                        <a:rPr lang="en-US" sz="2000" b="0" dirty="0">
                           <a:solidFill>
                             <a:schemeClr val="accent6">
                               <a:lumMod val="60000"/>
@@ -25132,7 +24594,7 @@
                     <a:p>
                       <a:pPr algn="ctr"/>
                       <a:r>
-                        <a:rPr lang="en-US" sz="1800" b="0" dirty="0" err="1">
+                        <a:rPr lang="en-US" sz="2000" b="0" dirty="0" err="1">
                           <a:solidFill>
                             <a:schemeClr val="accent6">
                               <a:lumMod val="60000"/>
@@ -25142,7 +24604,7 @@
                         </a:rPr>
                         <a:t>studi</a:t>
                       </a:r>
-                      <a:endParaRPr lang="en-US" sz="1800" b="0" dirty="0">
+                      <a:endParaRPr lang="en-US" sz="2000" b="0" dirty="0">
                         <a:solidFill>
                           <a:schemeClr val="accent6">
                             <a:lumMod val="60000"/>
@@ -25205,7 +24667,7 @@
                     <a:p>
                       <a:pPr algn="ctr"/>
                       <a:r>
-                        <a:rPr lang="en-US" sz="1800" b="0" dirty="0">
+                        <a:rPr lang="en-US" sz="2000" b="0" dirty="0">
                           <a:solidFill>
                             <a:schemeClr val="accent6">
                               <a:lumMod val="60000"/>
@@ -25263,7 +24725,7 @@
                     <a:p>
                       <a:pPr algn="ctr"/>
                       <a:r>
-                        <a:rPr lang="en-US" sz="1800" b="0" dirty="0" err="1">
+                        <a:rPr lang="en-US" sz="2000" b="0" dirty="0" err="1">
                           <a:solidFill>
                             <a:schemeClr val="accent6">
                               <a:lumMod val="60000"/>
@@ -25273,7 +24735,7 @@
                         </a:rPr>
                         <a:t>relat</a:t>
                       </a:r>
-                      <a:endParaRPr lang="en-US" sz="1800" b="0" dirty="0">
+                      <a:endParaRPr lang="en-US" sz="2000" b="0" dirty="0">
                         <a:solidFill>
                           <a:schemeClr val="accent6">
                             <a:lumMod val="60000"/>
@@ -25325,375 +24787,6 @@
                 <a:extLst>
                   <a:ext uri="{0D108BD9-81ED-4DB2-BD59-A6C34878D82A}">
                     <a16:rowId xmlns:a16="http://schemas.microsoft.com/office/drawing/2014/main" val="4078869009"/>
-                  </a:ext>
-                </a:extLst>
-              </a:tr>
-              <a:tr h="295603">
-                <a:tc>
-                  <a:txBody>
-                    <a:bodyPr/>
-                    <a:lstStyle/>
-                    <a:p>
-                      <a:pPr algn="ctr"/>
-                      <a:r>
-                        <a:rPr lang="en-US" sz="1800" b="0">
-                          <a:solidFill>
-                            <a:schemeClr val="accent6">
-                              <a:lumMod val="60000"/>
-                              <a:lumOff val="40000"/>
-                            </a:schemeClr>
-                          </a:solidFill>
-                        </a:rPr>
-                        <a:t>bigger</a:t>
-                      </a:r>
-                    </a:p>
-                  </a:txBody>
-                  <a:tcPr anchor="ctr">
-                    <a:lnL w="12700" cap="flat" cmpd="sng" algn="ctr">
-                      <a:solidFill>
-                        <a:schemeClr val="tx1"/>
-                      </a:solidFill>
-                      <a:prstDash val="solid"/>
-                      <a:round/>
-                      <a:headEnd type="none" w="med" len="med"/>
-                      <a:tailEnd type="none" w="med" len="med"/>
-                    </a:lnL>
-                    <a:lnR w="12700" cap="flat" cmpd="sng" algn="ctr">
-                      <a:solidFill>
-                        <a:schemeClr val="tx1"/>
-                      </a:solidFill>
-                      <a:prstDash val="solid"/>
-                      <a:round/>
-                      <a:headEnd type="none" w="med" len="med"/>
-                      <a:tailEnd type="none" w="med" len="med"/>
-                    </a:lnR>
-                    <a:lnT w="12700" cap="flat" cmpd="sng" algn="ctr">
-                      <a:solidFill>
-                        <a:schemeClr val="tx1"/>
-                      </a:solidFill>
-                      <a:prstDash val="solid"/>
-                      <a:round/>
-                      <a:headEnd type="none" w="med" len="med"/>
-                      <a:tailEnd type="none" w="med" len="med"/>
-                    </a:lnT>
-                    <a:lnB w="12700" cap="flat" cmpd="sng" algn="ctr">
-                      <a:solidFill>
-                        <a:schemeClr val="tx1"/>
-                      </a:solidFill>
-                      <a:prstDash val="solid"/>
-                      <a:round/>
-                      <a:headEnd type="none" w="med" len="med"/>
-                      <a:tailEnd type="none" w="med" len="med"/>
-                    </a:lnB>
-                  </a:tcPr>
-                </a:tc>
-                <a:tc>
-                  <a:txBody>
-                    <a:bodyPr/>
-                    <a:lstStyle/>
-                    <a:p>
-                      <a:pPr algn="ctr"/>
-                      <a:r>
-                        <a:rPr lang="en-US" sz="1800" b="0">
-                          <a:solidFill>
-                            <a:schemeClr val="accent6">
-                              <a:lumMod val="60000"/>
-                              <a:lumOff val="40000"/>
-                            </a:schemeClr>
-                          </a:solidFill>
-                        </a:rPr>
-                        <a:t>big</a:t>
-                      </a:r>
-                    </a:p>
-                  </a:txBody>
-                  <a:tcPr anchor="ctr">
-                    <a:lnL w="12700" cap="flat" cmpd="sng" algn="ctr">
-                      <a:solidFill>
-                        <a:schemeClr val="tx1"/>
-                      </a:solidFill>
-                      <a:prstDash val="solid"/>
-                      <a:round/>
-                      <a:headEnd type="none" w="med" len="med"/>
-                      <a:tailEnd type="none" w="med" len="med"/>
-                    </a:lnL>
-                    <a:lnR w="12700" cap="flat" cmpd="sng" algn="ctr">
-                      <a:solidFill>
-                        <a:schemeClr val="tx1"/>
-                      </a:solidFill>
-                      <a:prstDash val="solid"/>
-                      <a:round/>
-                      <a:headEnd type="none" w="med" len="med"/>
-                      <a:tailEnd type="none" w="med" len="med"/>
-                    </a:lnR>
-                    <a:lnT w="12700" cap="flat" cmpd="sng" algn="ctr">
-                      <a:solidFill>
-                        <a:schemeClr val="tx1"/>
-                      </a:solidFill>
-                      <a:prstDash val="solid"/>
-                      <a:round/>
-                      <a:headEnd type="none" w="med" len="med"/>
-                      <a:tailEnd type="none" w="med" len="med"/>
-                    </a:lnT>
-                    <a:lnB w="12700" cap="flat" cmpd="sng" algn="ctr">
-                      <a:solidFill>
-                        <a:schemeClr val="tx1"/>
-                      </a:solidFill>
-                      <a:prstDash val="solid"/>
-                      <a:round/>
-                      <a:headEnd type="none" w="med" len="med"/>
-                      <a:tailEnd type="none" w="med" len="med"/>
-                    </a:lnB>
-                  </a:tcPr>
-                </a:tc>
-                <a:extLst>
-                  <a:ext uri="{0D108BD9-81ED-4DB2-BD59-A6C34878D82A}">
-                    <a16:rowId xmlns:a16="http://schemas.microsoft.com/office/drawing/2014/main" val="356289221"/>
-                  </a:ext>
-                </a:extLst>
-              </a:tr>
-              <a:tr h="295603">
-                <a:tc>
-                  <a:txBody>
-                    <a:bodyPr/>
-                    <a:lstStyle/>
-                    <a:p>
-                      <a:pPr algn="ctr"/>
-                      <a:r>
-                        <a:rPr lang="en-US" sz="1800" b="0">
-                          <a:solidFill>
-                            <a:schemeClr val="accent6">
-                              <a:lumMod val="60000"/>
-                              <a:lumOff val="40000"/>
-                            </a:schemeClr>
-                          </a:solidFill>
-                        </a:rPr>
-                        <a:t>fishing</a:t>
-                      </a:r>
-                    </a:p>
-                  </a:txBody>
-                  <a:tcPr anchor="ctr">
-                    <a:lnL w="12700" cap="flat" cmpd="sng" algn="ctr">
-                      <a:solidFill>
-                        <a:schemeClr val="tx1"/>
-                      </a:solidFill>
-                      <a:prstDash val="solid"/>
-                      <a:round/>
-                      <a:headEnd type="none" w="med" len="med"/>
-                      <a:tailEnd type="none" w="med" len="med"/>
-                    </a:lnL>
-                    <a:lnR w="12700" cap="flat" cmpd="sng" algn="ctr">
-                      <a:solidFill>
-                        <a:schemeClr val="tx1"/>
-                      </a:solidFill>
-                      <a:prstDash val="solid"/>
-                      <a:round/>
-                      <a:headEnd type="none" w="med" len="med"/>
-                      <a:tailEnd type="none" w="med" len="med"/>
-                    </a:lnR>
-                    <a:lnT w="12700" cap="flat" cmpd="sng" algn="ctr">
-                      <a:solidFill>
-                        <a:schemeClr val="tx1"/>
-                      </a:solidFill>
-                      <a:prstDash val="solid"/>
-                      <a:round/>
-                      <a:headEnd type="none" w="med" len="med"/>
-                      <a:tailEnd type="none" w="med" len="med"/>
-                    </a:lnT>
-                    <a:lnB w="12700" cap="flat" cmpd="sng" algn="ctr">
-                      <a:solidFill>
-                        <a:schemeClr val="tx1"/>
-                      </a:solidFill>
-                      <a:prstDash val="solid"/>
-                      <a:round/>
-                      <a:headEnd type="none" w="med" len="med"/>
-                      <a:tailEnd type="none" w="med" len="med"/>
-                    </a:lnB>
-                  </a:tcPr>
-                </a:tc>
-                <a:tc>
-                  <a:txBody>
-                    <a:bodyPr/>
-                    <a:lstStyle/>
-                    <a:p>
-                      <a:pPr algn="ctr"/>
-                      <a:r>
-                        <a:rPr lang="en-US" sz="1800" b="0">
-                          <a:solidFill>
-                            <a:schemeClr val="accent6">
-                              <a:lumMod val="60000"/>
-                              <a:lumOff val="40000"/>
-                            </a:schemeClr>
-                          </a:solidFill>
-                        </a:rPr>
-                        <a:t>fish</a:t>
-                      </a:r>
-                    </a:p>
-                  </a:txBody>
-                  <a:tcPr anchor="ctr">
-                    <a:lnL w="12700" cap="flat" cmpd="sng" algn="ctr">
-                      <a:solidFill>
-                        <a:schemeClr val="tx1"/>
-                      </a:solidFill>
-                      <a:prstDash val="solid"/>
-                      <a:round/>
-                      <a:headEnd type="none" w="med" len="med"/>
-                      <a:tailEnd type="none" w="med" len="med"/>
-                    </a:lnL>
-                    <a:lnR w="12700" cap="flat" cmpd="sng" algn="ctr">
-                      <a:solidFill>
-                        <a:schemeClr val="tx1"/>
-                      </a:solidFill>
-                      <a:prstDash val="solid"/>
-                      <a:round/>
-                      <a:headEnd type="none" w="med" len="med"/>
-                      <a:tailEnd type="none" w="med" len="med"/>
-                    </a:lnR>
-                    <a:lnT w="12700" cap="flat" cmpd="sng" algn="ctr">
-                      <a:solidFill>
-                        <a:schemeClr val="tx1"/>
-                      </a:solidFill>
-                      <a:prstDash val="solid"/>
-                      <a:round/>
-                      <a:headEnd type="none" w="med" len="med"/>
-                      <a:tailEnd type="none" w="med" len="med"/>
-                    </a:lnT>
-                    <a:lnB w="12700" cap="flat" cmpd="sng" algn="ctr">
-                      <a:solidFill>
-                        <a:schemeClr val="tx1"/>
-                      </a:solidFill>
-                      <a:prstDash val="solid"/>
-                      <a:round/>
-                      <a:headEnd type="none" w="med" len="med"/>
-                      <a:tailEnd type="none" w="med" len="med"/>
-                    </a:lnB>
-                  </a:tcPr>
-                </a:tc>
-                <a:extLst>
-                  <a:ext uri="{0D108BD9-81ED-4DB2-BD59-A6C34878D82A}">
-                    <a16:rowId xmlns:a16="http://schemas.microsoft.com/office/drawing/2014/main" val="1930595046"/>
-                  </a:ext>
-                </a:extLst>
-              </a:tr>
-              <a:tr h="295603">
-                <a:tc>
-                  <a:txBody>
-                    <a:bodyPr/>
-                    <a:lstStyle/>
-                    <a:p>
-                      <a:pPr algn="ctr"/>
-                      <a:r>
-                        <a:rPr lang="en-US" sz="1800" b="0" dirty="0">
-                          <a:solidFill>
-                            <a:schemeClr val="accent6">
-                              <a:lumMod val="60000"/>
-                              <a:lumOff val="40000"/>
-                            </a:schemeClr>
-                          </a:solidFill>
-                        </a:rPr>
-                        <a:t>Agreement</a:t>
-                      </a:r>
-                    </a:p>
-                  </a:txBody>
-                  <a:tcPr anchor="ctr">
-                    <a:lnL w="12700" cap="flat" cmpd="sng" algn="ctr">
-                      <a:solidFill>
-                        <a:schemeClr val="tx1"/>
-                      </a:solidFill>
-                      <a:prstDash val="solid"/>
-                      <a:round/>
-                      <a:headEnd type="none" w="med" len="med"/>
-                      <a:tailEnd type="none" w="med" len="med"/>
-                    </a:lnL>
-                    <a:lnR w="12700" cap="flat" cmpd="sng" algn="ctr">
-                      <a:solidFill>
-                        <a:schemeClr val="tx1"/>
-                      </a:solidFill>
-                      <a:prstDash val="solid"/>
-                      <a:round/>
-                      <a:headEnd type="none" w="med" len="med"/>
-                      <a:tailEnd type="none" w="med" len="med"/>
-                    </a:lnR>
-                    <a:lnT w="12700" cap="flat" cmpd="sng" algn="ctr">
-                      <a:solidFill>
-                        <a:schemeClr val="tx1"/>
-                      </a:solidFill>
-                      <a:prstDash val="solid"/>
-                      <a:round/>
-                      <a:headEnd type="none" w="med" len="med"/>
-                      <a:tailEnd type="none" w="med" len="med"/>
-                    </a:lnT>
-                    <a:lnB w="12700" cap="flat" cmpd="sng" algn="ctr">
-                      <a:solidFill>
-                        <a:schemeClr val="tx1"/>
-                      </a:solidFill>
-                      <a:prstDash val="solid"/>
-                      <a:round/>
-                      <a:headEnd type="none" w="med" len="med"/>
-                      <a:tailEnd type="none" w="med" len="med"/>
-                    </a:lnB>
-                  </a:tcPr>
-                </a:tc>
-                <a:tc>
-                  <a:txBody>
-                    <a:bodyPr/>
-                    <a:lstStyle/>
-                    <a:p>
-                      <a:pPr algn="ctr"/>
-                      <a:r>
-                        <a:rPr lang="en-US" sz="1800" b="0" dirty="0">
-                          <a:solidFill>
-                            <a:schemeClr val="accent6">
-                              <a:lumMod val="60000"/>
-                              <a:lumOff val="40000"/>
-                            </a:schemeClr>
-                          </a:solidFill>
-                        </a:rPr>
-                        <a:t>agree</a:t>
-                      </a:r>
-                    </a:p>
-                  </a:txBody>
-                  <a:tcPr anchor="ctr">
-                    <a:lnL w="12700" cap="flat" cmpd="sng" algn="ctr">
-                      <a:solidFill>
-                        <a:schemeClr val="tx1"/>
-                      </a:solidFill>
-                      <a:prstDash val="solid"/>
-                      <a:round/>
-                      <a:headEnd type="none" w="med" len="med"/>
-                      <a:tailEnd type="none" w="med" len="med"/>
-                    </a:lnL>
-                    <a:lnR w="12700" cap="flat" cmpd="sng" algn="ctr">
-                      <a:solidFill>
-                        <a:schemeClr val="tx1"/>
-                      </a:solidFill>
-                      <a:prstDash val="solid"/>
-                      <a:round/>
-                      <a:headEnd type="none" w="med" len="med"/>
-                      <a:tailEnd type="none" w="med" len="med"/>
-                    </a:lnR>
-                    <a:lnT w="12700" cap="flat" cmpd="sng" algn="ctr">
-                      <a:solidFill>
-                        <a:schemeClr val="tx1"/>
-                      </a:solidFill>
-                      <a:prstDash val="solid"/>
-                      <a:round/>
-                      <a:headEnd type="none" w="med" len="med"/>
-                      <a:tailEnd type="none" w="med" len="med"/>
-                    </a:lnT>
-                    <a:lnB w="12700" cap="flat" cmpd="sng" algn="ctr">
-                      <a:solidFill>
-                        <a:schemeClr val="tx1"/>
-                      </a:solidFill>
-                      <a:prstDash val="solid"/>
-                      <a:round/>
-                      <a:headEnd type="none" w="med" len="med"/>
-                      <a:tailEnd type="none" w="med" len="med"/>
-                    </a:lnB>
-                  </a:tcPr>
-                </a:tc>
-                <a:extLst>
-                  <a:ext uri="{0D108BD9-81ED-4DB2-BD59-A6C34878D82A}">
-                    <a16:rowId xmlns:a16="http://schemas.microsoft.com/office/drawing/2014/main" val="2008457712"/>
                   </a:ext>
                 </a:extLst>
               </a:tr>
@@ -26543,7 +25636,7 @@
           <a:lstStyle/>
           <a:p>
             <a:r>
-              <a:rPr lang="en-US" sz="2400" dirty="0">
+              <a:rPr lang="en-US" sz="2400" b="1" dirty="0">
                 <a:solidFill>
                   <a:schemeClr val="accent6">
                     <a:lumMod val="60000"/>
@@ -26569,7 +25662,7 @@
               <a:buAutoNum type="arabicParenR"/>
             </a:pPr>
             <a:r>
-              <a:rPr lang="en-US" sz="2400" dirty="0">
+              <a:rPr lang="en-US" sz="2400" b="1" dirty="0">
                 <a:solidFill>
                   <a:schemeClr val="accent6">
                     <a:lumMod val="60000"/>
@@ -27032,7 +26125,7 @@
         <p:spPr>
           <a:xfrm>
             <a:off x="430243" y="889233"/>
-            <a:ext cx="11623685" cy="5262979"/>
+            <a:ext cx="11623685" cy="3046988"/>
           </a:xfrm>
           <a:prstGeom prst="rect">
             <a:avLst/>
@@ -27054,8 +26147,10 @@
                   </a:schemeClr>
                 </a:solidFill>
               </a:rPr>
-              <a:t>N-grams</a:t>
-            </a:r>
+              <a:t>What is an N-gram?</a:t>
+            </a:r>
+          </a:p>
+          <a:p>
             <a:r>
               <a:rPr lang="en-US" sz="2400" dirty="0">
                 <a:solidFill>
@@ -27065,7 +26160,7 @@
                   </a:schemeClr>
                 </a:solidFill>
               </a:rPr>
-              <a:t> are used to capture </a:t>
+              <a:t>An </a:t>
             </a:r>
             <a:r>
               <a:rPr lang="en-US" sz="2400" b="1" dirty="0">
@@ -27076,7 +26171,7 @@
                   </a:schemeClr>
                 </a:solidFill>
               </a:rPr>
-              <a:t>word sequences</a:t>
+              <a:t>N-gram</a:t>
             </a:r>
             <a:r>
               <a:rPr lang="en-US" sz="2400" dirty="0">
@@ -27087,7 +26182,7 @@
                   </a:schemeClr>
                 </a:solidFill>
               </a:rPr>
-              <a:t> and </a:t>
+              <a:t> is a contiguous sequence of </a:t>
             </a:r>
             <a:r>
               <a:rPr lang="en-US" sz="2400" b="1" dirty="0">
@@ -27098,7 +26193,7 @@
                   </a:schemeClr>
                 </a:solidFill>
               </a:rPr>
-              <a:t>contextual patterns</a:t>
+              <a:t>N items</a:t>
             </a:r>
             <a:r>
               <a:rPr lang="en-US" sz="2400" dirty="0">
@@ -27109,30 +26204,7 @@
                   </a:schemeClr>
                 </a:solidFill>
               </a:rPr>
-              <a:t> in text data.</a:t>
-            </a:r>
-          </a:p>
-          <a:p>
-            <a:endParaRPr lang="en-US" sz="2400" dirty="0">
-              <a:solidFill>
-                <a:schemeClr val="accent6">
-                  <a:lumMod val="60000"/>
-                  <a:lumOff val="40000"/>
-                </a:schemeClr>
-              </a:solidFill>
-            </a:endParaRPr>
-          </a:p>
-          <a:p>
-            <a:r>
-              <a:rPr lang="en-US" sz="2400" b="1" dirty="0">
-                <a:solidFill>
-                  <a:schemeClr val="accent6">
-                    <a:lumMod val="60000"/>
-                    <a:lumOff val="40000"/>
-                  </a:schemeClr>
-                </a:solidFill>
-              </a:rPr>
-              <a:t>What is an N-gram?</a:t>
+              <a:t> (usually words or characters) from a given text. It helps preserve context and word order to a limited extent.</a:t>
             </a:r>
           </a:p>
           <a:p>
@@ -27145,51 +26217,7 @@
                   </a:schemeClr>
                 </a:solidFill>
               </a:rPr>
-              <a:t>An </a:t>
-            </a:r>
-            <a:r>
-              <a:rPr lang="en-US" sz="2400" b="1" dirty="0">
-                <a:solidFill>
-                  <a:schemeClr val="accent6">
-                    <a:lumMod val="60000"/>
-                    <a:lumOff val="40000"/>
-                  </a:schemeClr>
-                </a:solidFill>
-              </a:rPr>
-              <a:t>N-gram</a:t>
-            </a:r>
-            <a:r>
-              <a:rPr lang="en-US" sz="2400" dirty="0">
-                <a:solidFill>
-                  <a:schemeClr val="accent6">
-                    <a:lumMod val="60000"/>
-                    <a:lumOff val="40000"/>
-                  </a:schemeClr>
-                </a:solidFill>
-              </a:rPr>
-              <a:t> is a contiguous sequence of </a:t>
-            </a:r>
-            <a:r>
-              <a:rPr lang="en-US" sz="2400" b="1" dirty="0">
-                <a:solidFill>
-                  <a:schemeClr val="accent6">
-                    <a:lumMod val="60000"/>
-                    <a:lumOff val="40000"/>
-                  </a:schemeClr>
-                </a:solidFill>
-              </a:rPr>
-              <a:t>N items</a:t>
-            </a:r>
-            <a:r>
-              <a:rPr lang="en-US" sz="2400" dirty="0">
-                <a:solidFill>
-                  <a:schemeClr val="accent6">
-                    <a:lumMod val="60000"/>
-                    <a:lumOff val="40000"/>
-                  </a:schemeClr>
-                </a:solidFill>
-              </a:rPr>
-              <a:t> (usually words or characters) from a given text. It helps preserve context and word order to a limited extent.</a:t>
+              <a:t>Example: I love New York</a:t>
             </a:r>
           </a:p>
           <a:p>
@@ -27217,7 +26245,7 @@
                   </a:schemeClr>
                 </a:solidFill>
               </a:rPr>
-              <a:t> "I", "love", "pizza"</a:t>
+              <a:t> "I", "love", “New”, “York”, </a:t>
             </a:r>
           </a:p>
           <a:p>
@@ -27245,7 +26273,7 @@
                   </a:schemeClr>
                 </a:solidFill>
               </a:rPr>
-              <a:t> "I love", "love pizza"</a:t>
+              <a:t> "I love", "love New“, “New York”</a:t>
             </a:r>
           </a:p>
           <a:p>
@@ -27273,9 +26301,66 @@
                   </a:schemeClr>
                 </a:solidFill>
               </a:rPr>
-              <a:t> "I love pizza"</a:t>
-            </a:r>
-          </a:p>
+              <a:t> "I love New“, “love New York”</a:t>
+            </a:r>
+          </a:p>
+          <a:p>
+            <a:pPr marL="342900" indent="-342900">
+              <a:buFont typeface="Arial" panose="020B0604020202020204" pitchFamily="34" charset="0"/>
+              <a:buChar char="•"/>
+            </a:pPr>
+            <a:r>
+              <a:rPr lang="en-US" sz="2400" b="1" dirty="0">
+                <a:solidFill>
+                  <a:schemeClr val="accent6">
+                    <a:lumMod val="60000"/>
+                    <a:lumOff val="40000"/>
+                  </a:schemeClr>
+                </a:solidFill>
+              </a:rPr>
+              <a:t>4-gram:  </a:t>
+            </a:r>
+            <a:r>
+              <a:rPr lang="en-US" sz="2400" dirty="0">
+                <a:solidFill>
+                  <a:schemeClr val="accent6">
+                    <a:lumMod val="60000"/>
+                    <a:lumOff val="40000"/>
+                  </a:schemeClr>
+                </a:solidFill>
+              </a:rPr>
+              <a:t>“I love New York”  </a:t>
+            </a:r>
+          </a:p>
+        </p:txBody>
+      </p:sp>
+      <p:sp>
+        <p:nvSpPr>
+          <p:cNvPr id="4" name="TextBox 3">
+            <a:extLst>
+              <a:ext uri="{FF2B5EF4-FFF2-40B4-BE49-F238E27FC236}">
+                <a16:creationId xmlns:a16="http://schemas.microsoft.com/office/drawing/2014/main" id="{68D8A58F-6423-F87D-B13A-30167BC88199}"/>
+              </a:ext>
+            </a:extLst>
+          </p:cNvPr>
+          <p:cNvSpPr txBox="1"/>
+          <p:nvPr/>
+        </p:nvSpPr>
+        <p:spPr>
+          <a:xfrm>
+            <a:off x="362949" y="3881056"/>
+            <a:ext cx="11466101" cy="2308324"/>
+          </a:xfrm>
+          <a:prstGeom prst="rect">
+            <a:avLst/>
+          </a:prstGeom>
+          <a:noFill/>
+        </p:spPr>
+        <p:txBody>
+          <a:bodyPr wrap="square">
+            <a:spAutoFit/>
+          </a:bodyPr>
+          <a:lstStyle/>
           <a:p>
             <a:endParaRPr lang="en-US" sz="2400" dirty="0">
               <a:solidFill>
@@ -30258,7 +29343,7 @@
             <p:spPr>
               <a:xfrm>
                 <a:off x="318082" y="4246779"/>
-                <a:ext cx="6460930" cy="622350"/>
+                <a:ext cx="7701206" cy="691536"/>
               </a:xfrm>
               <a:prstGeom prst="rect">
                 <a:avLst/>
@@ -30282,7 +29367,7 @@
                         <m:rPr>
                           <m:sty m:val="p"/>
                         </m:rPr>
-                        <a:rPr lang="en-US" b="0" i="0" smtClean="0">
+                        <a:rPr lang="en-US" sz="2000" b="0" i="0" smtClean="0">
                           <a:solidFill>
                             <a:schemeClr val="accent6">
                               <a:lumMod val="60000"/>
@@ -30296,7 +29381,7 @@
                       <m:d>
                         <m:dPr>
                           <m:ctrlPr>
-                            <a:rPr lang="en-US" b="0" i="1" smtClean="0">
+                            <a:rPr lang="en-US" sz="2000" b="0" i="1" smtClean="0">
                               <a:solidFill>
                                 <a:schemeClr val="accent6">
                                   <a:lumMod val="60000"/>
@@ -30312,7 +29397,7 @@
                             <m:rPr>
                               <m:sty m:val="p"/>
                             </m:rPr>
-                            <a:rPr lang="en-US" b="0" i="0" smtClean="0">
+                            <a:rPr lang="en-US" sz="2000" b="0" i="0" smtClean="0">
                               <a:solidFill>
                                 <a:schemeClr val="accent6">
                                   <a:lumMod val="60000"/>
@@ -30326,7 +29411,7 @@
                         </m:e>
                       </m:d>
                       <m:r>
-                        <a:rPr lang="en-US" b="0" i="0" smtClean="0">
+                        <a:rPr lang="en-US" sz="2000" b="0" i="0" smtClean="0">
                           <a:solidFill>
                             <a:schemeClr val="accent6">
                               <a:lumMod val="60000"/>
@@ -30340,7 +29425,7 @@
                       <m:func>
                         <m:funcPr>
                           <m:ctrlPr>
-                            <a:rPr lang="en-US" i="1" smtClean="0">
+                            <a:rPr lang="en-US" sz="2000" i="1" smtClean="0">
                               <a:solidFill>
                                 <a:schemeClr val="accent6">
                                   <a:lumMod val="60000"/>
@@ -30356,7 +29441,7 @@
                             <m:rPr>
                               <m:sty m:val="p"/>
                             </m:rPr>
-                            <a:rPr lang="en-US">
+                            <a:rPr lang="en-US" sz="2000">
                               <a:solidFill>
                                 <a:schemeClr val="accent6">
                                   <a:lumMod val="60000"/>
@@ -30372,7 +29457,7 @@
                           <m:d>
                             <m:dPr>
                               <m:ctrlPr>
-                                <a:rPr lang="en-US" i="1">
+                                <a:rPr lang="en-US" sz="2000" i="1">
                                   <a:solidFill>
                                     <a:schemeClr val="accent6">
                                       <a:lumMod val="60000"/>
@@ -30387,7 +29472,7 @@
                               <m:f>
                                 <m:fPr>
                                   <m:ctrlPr>
-                                    <a:rPr lang="en-US" i="1">
+                                    <a:rPr lang="en-US" sz="2000" i="1">
                                       <a:solidFill>
                                         <a:schemeClr val="accent6">
                                           <a:lumMod val="60000"/>
@@ -30400,7 +29485,7 @@
                                 </m:fPr>
                                 <m:num>
                                   <m:r>
-                                    <a:rPr lang="en-US" b="0" i="1" smtClean="0">
+                                    <a:rPr lang="en-US" sz="2000" b="0" i="1" smtClean="0">
                                       <a:solidFill>
                                         <a:schemeClr val="accent6">
                                           <a:lumMod val="60000"/>
@@ -30412,7 +29497,7 @@
                                     <m:t>𝑇𝑜𝑡𝑎𝑙</m:t>
                                   </m:r>
                                   <m:r>
-                                    <a:rPr lang="en-US" b="0" i="1" smtClean="0">
+                                    <a:rPr lang="en-US" sz="2000" b="0" i="1" smtClean="0">
                                       <a:solidFill>
                                         <a:schemeClr val="accent6">
                                           <a:lumMod val="60000"/>
@@ -30424,7 +29509,7 @@
                                     <m:t> </m:t>
                                   </m:r>
                                   <m:r>
-                                    <a:rPr lang="en-US" b="0" i="1" smtClean="0">
+                                    <a:rPr lang="en-US" sz="2000" b="0" i="1" smtClean="0">
                                       <a:solidFill>
                                         <a:schemeClr val="accent6">
                                           <a:lumMod val="60000"/>
@@ -30436,7 +29521,7 @@
                                     <m:t>𝑛𝑢𝑚𝑏𝑒𝑟</m:t>
                                   </m:r>
                                   <m:r>
-                                    <a:rPr lang="en-US" b="0" i="1" smtClean="0">
+                                    <a:rPr lang="en-US" sz="2000" b="0" i="1" smtClean="0">
                                       <a:solidFill>
                                         <a:schemeClr val="accent6">
                                           <a:lumMod val="60000"/>
@@ -30448,7 +29533,7 @@
                                     <m:t> </m:t>
                                   </m:r>
                                   <m:r>
-                                    <a:rPr lang="en-US" b="0" i="1" smtClean="0">
+                                    <a:rPr lang="en-US" sz="2000" b="0" i="1" smtClean="0">
                                       <a:solidFill>
                                         <a:schemeClr val="accent6">
                                           <a:lumMod val="60000"/>
@@ -30460,7 +29545,7 @@
                                     <m:t>𝑜𝑓</m:t>
                                   </m:r>
                                   <m:r>
-                                    <a:rPr lang="en-US" b="0" i="1" smtClean="0">
+                                    <a:rPr lang="en-US" sz="2000" b="0" i="1" smtClean="0">
                                       <a:solidFill>
                                         <a:schemeClr val="accent6">
                                           <a:lumMod val="60000"/>
@@ -30472,7 +29557,7 @@
                                     <m:t> </m:t>
                                   </m:r>
                                   <m:r>
-                                    <a:rPr lang="en-US" b="0" i="1" smtClean="0">
+                                    <a:rPr lang="en-US" sz="2000" b="0" i="1" smtClean="0">
                                       <a:solidFill>
                                         <a:schemeClr val="accent6">
                                           <a:lumMod val="60000"/>
@@ -30486,7 +29571,7 @@
                                 </m:num>
                                 <m:den>
                                   <m:r>
-                                    <a:rPr lang="en-US" b="0" i="1" smtClean="0">
+                                    <a:rPr lang="en-US" sz="2000" b="0" i="1" smtClean="0">
                                       <a:solidFill>
                                         <a:schemeClr val="accent6">
                                           <a:lumMod val="60000"/>
@@ -30498,7 +29583,7 @@
                                     <m:t>𝑁𝑢𝑚𝑏𝑒𝑟</m:t>
                                   </m:r>
                                   <m:r>
-                                    <a:rPr lang="en-US" b="0" i="1" smtClean="0">
+                                    <a:rPr lang="en-US" sz="2000" b="0" i="1" smtClean="0">
                                       <a:solidFill>
                                         <a:schemeClr val="accent6">
                                           <a:lumMod val="60000"/>
@@ -30510,7 +29595,7 @@
                                     <m:t> </m:t>
                                   </m:r>
                                   <m:r>
-                                    <a:rPr lang="en-US" b="0" i="1" smtClean="0">
+                                    <a:rPr lang="en-US" sz="2000" b="0" i="1" smtClean="0">
                                       <a:solidFill>
                                         <a:schemeClr val="accent6">
                                           <a:lumMod val="60000"/>
@@ -30522,7 +29607,7 @@
                                     <m:t>𝑜𝑓</m:t>
                                   </m:r>
                                   <m:r>
-                                    <a:rPr lang="en-US" b="0" i="1" smtClean="0">
+                                    <a:rPr lang="en-US" sz="2000" b="0" i="1" smtClean="0">
                                       <a:solidFill>
                                         <a:schemeClr val="accent6">
                                           <a:lumMod val="60000"/>
@@ -30534,7 +29619,7 @@
                                     <m:t> </m:t>
                                   </m:r>
                                   <m:r>
-                                    <a:rPr lang="en-US" b="0" i="1" smtClean="0">
+                                    <a:rPr lang="en-US" sz="2000" b="0" i="1" smtClean="0">
                                       <a:solidFill>
                                         <a:schemeClr val="accent6">
                                           <a:lumMod val="60000"/>
@@ -30546,7 +29631,7 @@
                                     <m:t>𝑑𝑜𝑐𝑢𝑚𝑒𝑛𝑡𝑠</m:t>
                                   </m:r>
                                   <m:r>
-                                    <a:rPr lang="en-US" b="0" i="1" smtClean="0">
+                                    <a:rPr lang="en-US" sz="2000" b="0" i="1" smtClean="0">
                                       <a:solidFill>
                                         <a:schemeClr val="accent6">
                                           <a:lumMod val="60000"/>
@@ -30558,7 +29643,7 @@
                                     <m:t> </m:t>
                                   </m:r>
                                   <m:r>
-                                    <a:rPr lang="en-US" b="0" i="1" smtClean="0">
+                                    <a:rPr lang="en-US" sz="2000" b="0" i="1" smtClean="0">
                                       <a:solidFill>
                                         <a:schemeClr val="accent6">
                                           <a:lumMod val="60000"/>
@@ -30570,7 +29655,7 @@
                                     <m:t>𝑐𝑜𝑛𝑡𝑎𝑖𝑛𝑖𝑛𝑔</m:t>
                                   </m:r>
                                   <m:r>
-                                    <a:rPr lang="en-US" b="0" i="1" smtClean="0">
+                                    <a:rPr lang="en-US" sz="2000" b="0" i="1" smtClean="0">
                                       <a:solidFill>
                                         <a:schemeClr val="accent6">
                                           <a:lumMod val="60000"/>
@@ -30582,7 +29667,7 @@
                                     <m:t> </m:t>
                                   </m:r>
                                   <m:r>
-                                    <a:rPr lang="en-US" b="0" i="1" smtClean="0">
+                                    <a:rPr lang="en-US" sz="2000" b="0" i="1" smtClean="0">
                                       <a:solidFill>
                                         <a:schemeClr val="accent6">
                                           <a:lumMod val="60000"/>
@@ -30594,7 +29679,7 @@
                                     <m:t>𝑡</m:t>
                                   </m:r>
                                   <m:r>
-                                    <a:rPr lang="en-US" b="0" i="1" smtClean="0">
+                                    <a:rPr lang="en-US" sz="2000" b="0" i="1" smtClean="0">
                                       <a:solidFill>
                                         <a:schemeClr val="accent6">
                                           <a:lumMod val="60000"/>
@@ -30610,7 +29695,7 @@
                             </m:e>
                           </m:d>
                           <m:r>
-                            <a:rPr lang="en-US" b="0" i="1" smtClean="0">
+                            <a:rPr lang="en-US" sz="2000" b="0" i="1" smtClean="0">
                               <a:solidFill>
                                 <a:schemeClr val="accent6">
                                   <a:lumMod val="60000"/>
@@ -30626,7 +29711,7 @@
                     </m:oMath>
                   </m:oMathPara>
                 </a14:m>
-                <a:endParaRPr lang="en-US" dirty="0">
+                <a:endParaRPr lang="en-US" sz="2000" dirty="0">
                   <a:solidFill>
                     <a:schemeClr val="accent6">
                       <a:lumMod val="60000"/>
@@ -30656,7 +29741,7 @@
             <p:spPr>
               <a:xfrm>
                 <a:off x="318082" y="4246779"/>
-                <a:ext cx="6460930" cy="622350"/>
+                <a:ext cx="7701206" cy="691536"/>
               </a:xfrm>
               <a:prstGeom prst="rect">
                 <a:avLst/>
@@ -30806,7 +29891,7 @@
             <p:spPr>
               <a:xfrm>
                 <a:off x="451624" y="1902097"/>
-                <a:ext cx="6606873" cy="622350"/>
+                <a:ext cx="7330148" cy="691536"/>
               </a:xfrm>
               <a:prstGeom prst="rect">
                 <a:avLst/>
@@ -30830,7 +29915,7 @@
                         <m:rPr>
                           <m:sty m:val="p"/>
                         </m:rPr>
-                        <a:rPr lang="en-US" smtClean="0">
+                        <a:rPr lang="en-US" sz="2000" smtClean="0">
                           <a:solidFill>
                             <a:schemeClr val="accent6">
                               <a:lumMod val="60000"/>
@@ -30845,7 +29930,7 @@
                         <m:rPr>
                           <m:sty m:val="p"/>
                         </m:rPr>
-                        <a:rPr lang="en-US" b="0" i="0" smtClean="0">
+                        <a:rPr lang="en-US" sz="2000" b="0" i="0" smtClean="0">
                           <a:solidFill>
                             <a:schemeClr val="accent6">
                               <a:lumMod val="60000"/>
@@ -30859,7 +29944,7 @@
                       <m:d>
                         <m:dPr>
                           <m:ctrlPr>
-                            <a:rPr lang="en-US" b="0" i="1" smtClean="0">
+                            <a:rPr lang="en-US" sz="2000" b="0" i="1" smtClean="0">
                               <a:solidFill>
                                 <a:schemeClr val="accent6">
                                   <a:lumMod val="60000"/>
@@ -30875,7 +29960,7 @@
                             <m:rPr>
                               <m:sty m:val="p"/>
                             </m:rPr>
-                            <a:rPr lang="en-US" b="0" i="0" smtClean="0">
+                            <a:rPr lang="en-US" sz="2000" b="0" i="0" smtClean="0">
                               <a:solidFill>
                                 <a:schemeClr val="accent6">
                                   <a:lumMod val="60000"/>
@@ -30887,7 +29972,7 @@
                             <m:t>t</m:t>
                           </m:r>
                           <m:r>
-                            <a:rPr lang="en-US" b="0" i="0" smtClean="0">
+                            <a:rPr lang="en-US" sz="2000" b="0" i="0" smtClean="0">
                               <a:solidFill>
                                 <a:schemeClr val="accent6">
                                   <a:lumMod val="60000"/>
@@ -30902,7 +29987,7 @@
                             <m:rPr>
                               <m:sty m:val="p"/>
                             </m:rPr>
-                            <a:rPr lang="en-US" b="0" i="0" smtClean="0">
+                            <a:rPr lang="en-US" sz="2000" b="0" i="0" smtClean="0">
                               <a:solidFill>
                                 <a:schemeClr val="accent6">
                                   <a:lumMod val="60000"/>
@@ -30916,7 +30001,7 @@
                         </m:e>
                       </m:d>
                       <m:r>
-                        <a:rPr lang="en-US" b="0" i="0" smtClean="0">
+                        <a:rPr lang="en-US" sz="2000" b="0" i="0" smtClean="0">
                           <a:solidFill>
                             <a:schemeClr val="accent6">
                               <a:lumMod val="60000"/>
@@ -30930,7 +30015,7 @@
                       <m:func>
                         <m:funcPr>
                           <m:ctrlPr>
-                            <a:rPr lang="en-US" i="1" smtClean="0">
+                            <a:rPr lang="en-US" sz="2000" i="1" smtClean="0">
                               <a:solidFill>
                                 <a:schemeClr val="accent6">
                                   <a:lumMod val="60000"/>
@@ -30946,7 +30031,7 @@
                           <m:d>
                             <m:dPr>
                               <m:ctrlPr>
-                                <a:rPr lang="en-US" i="1" smtClean="0">
+                                <a:rPr lang="en-US" sz="2000" i="1" smtClean="0">
                                   <a:solidFill>
                                     <a:schemeClr val="accent6">
                                       <a:lumMod val="60000"/>
@@ -30961,7 +30046,7 @@
                               <m:f>
                                 <m:fPr>
                                   <m:ctrlPr>
-                                    <a:rPr lang="en-US" i="1">
+                                    <a:rPr lang="en-US" sz="2000" i="1">
                                       <a:solidFill>
                                         <a:schemeClr val="accent6">
                                           <a:lumMod val="60000"/>
@@ -30974,7 +30059,7 @@
                                 </m:fPr>
                                 <m:num>
                                   <m:r>
-                                    <a:rPr lang="en-US" b="0" i="1" smtClean="0">
+                                    <a:rPr lang="en-US" sz="2000" b="0" i="1" smtClean="0">
                                       <a:solidFill>
                                         <a:schemeClr val="accent6">
                                           <a:lumMod val="60000"/>
@@ -30986,7 +30071,7 @@
                                     <m:t>𝑁𝑢𝑚𝑏𝑒𝑟</m:t>
                                   </m:r>
                                   <m:r>
-                                    <a:rPr lang="en-US" b="0" i="1" smtClean="0">
+                                    <a:rPr lang="en-US" sz="2000" b="0" i="1" smtClean="0">
                                       <a:solidFill>
                                         <a:schemeClr val="accent6">
                                           <a:lumMod val="60000"/>
@@ -30998,7 +30083,7 @@
                                     <m:t> </m:t>
                                   </m:r>
                                   <m:r>
-                                    <a:rPr lang="en-US" b="0" i="1" smtClean="0">
+                                    <a:rPr lang="en-US" sz="2000" b="0" i="1" smtClean="0">
                                       <a:solidFill>
                                         <a:schemeClr val="accent6">
                                           <a:lumMod val="60000"/>
@@ -31010,7 +30095,7 @@
                                     <m:t>𝑜𝑓</m:t>
                                   </m:r>
                                   <m:r>
-                                    <a:rPr lang="en-US" b="0" i="1" smtClean="0">
+                                    <a:rPr lang="en-US" sz="2000" b="0" i="1" smtClean="0">
                                       <a:solidFill>
                                         <a:schemeClr val="accent6">
                                           <a:lumMod val="60000"/>
@@ -31022,7 +30107,7 @@
                                     <m:t> </m:t>
                                   </m:r>
                                   <m:r>
-                                    <a:rPr lang="en-US" b="0" i="1" smtClean="0">
+                                    <a:rPr lang="en-US" sz="2000" b="0" i="1" smtClean="0">
                                       <a:solidFill>
                                         <a:schemeClr val="accent6">
                                           <a:lumMod val="60000"/>
@@ -31034,7 +30119,7 @@
                                     <m:t>𝑡𝑖𝑚𝑒𝑠</m:t>
                                   </m:r>
                                   <m:r>
-                                    <a:rPr lang="en-US" b="0" i="1" smtClean="0">
+                                    <a:rPr lang="en-US" sz="2000" b="0" i="1" smtClean="0">
                                       <a:solidFill>
                                         <a:schemeClr val="accent6">
                                           <a:lumMod val="60000"/>
@@ -31046,7 +30131,7 @@
                                     <m:t> </m:t>
                                   </m:r>
                                   <m:r>
-                                    <a:rPr lang="en-US" b="0" i="1" smtClean="0">
+                                    <a:rPr lang="en-US" sz="2000" b="0" i="1" smtClean="0">
                                       <a:solidFill>
                                         <a:schemeClr val="accent6">
                                           <a:lumMod val="60000"/>
@@ -31058,7 +30143,7 @@
                                     <m:t>𝑡𝑒𝑟𝑚</m:t>
                                   </m:r>
                                   <m:r>
-                                    <a:rPr lang="en-US" b="0" i="1" smtClean="0">
+                                    <a:rPr lang="en-US" sz="2000" b="0" i="1" smtClean="0">
                                       <a:solidFill>
                                         <a:schemeClr val="accent6">
                                           <a:lumMod val="60000"/>
@@ -31070,7 +30155,7 @@
                                     <m:t> </m:t>
                                   </m:r>
                                   <m:r>
-                                    <a:rPr lang="en-US" b="0" i="1" smtClean="0">
+                                    <a:rPr lang="en-US" sz="2000" b="0" i="1" smtClean="0">
                                       <a:solidFill>
                                         <a:schemeClr val="accent6">
                                           <a:lumMod val="60000"/>
@@ -31082,7 +30167,7 @@
                                     <m:t>𝑡</m:t>
                                   </m:r>
                                   <m:r>
-                                    <a:rPr lang="en-US" b="0" i="1" smtClean="0">
+                                    <a:rPr lang="en-US" sz="2000" b="0" i="1" smtClean="0">
                                       <a:solidFill>
                                         <a:schemeClr val="accent6">
                                           <a:lumMod val="60000"/>
@@ -31094,7 +30179,7 @@
                                     <m:t> </m:t>
                                   </m:r>
                                   <m:r>
-                                    <a:rPr lang="en-US" b="0" i="1" smtClean="0">
+                                    <a:rPr lang="en-US" sz="2000" b="0" i="1" smtClean="0">
                                       <a:solidFill>
                                         <a:schemeClr val="accent6">
                                           <a:lumMod val="60000"/>
@@ -31106,7 +30191,7 @@
                                     <m:t>𝑎𝑝𝑝𝑒𝑎𝑟𝑠</m:t>
                                   </m:r>
                                   <m:r>
-                                    <a:rPr lang="en-US" b="0" i="1" smtClean="0">
+                                    <a:rPr lang="en-US" sz="2000" b="0" i="1" smtClean="0">
                                       <a:solidFill>
                                         <a:schemeClr val="accent6">
                                           <a:lumMod val="60000"/>
@@ -31118,7 +30203,7 @@
                                     <m:t> </m:t>
                                   </m:r>
                                   <m:r>
-                                    <a:rPr lang="en-US" b="0" i="1" smtClean="0">
+                                    <a:rPr lang="en-US" sz="2000" b="0" i="1" smtClean="0">
                                       <a:solidFill>
                                         <a:schemeClr val="accent6">
                                           <a:lumMod val="60000"/>
@@ -31130,7 +30215,7 @@
                                     <m:t>𝑖𝑛</m:t>
                                   </m:r>
                                   <m:r>
-                                    <a:rPr lang="en-US" b="0" i="1" smtClean="0">
+                                    <a:rPr lang="en-US" sz="2000" b="0" i="1" smtClean="0">
                                       <a:solidFill>
                                         <a:schemeClr val="accent6">
                                           <a:lumMod val="60000"/>
@@ -31142,7 +30227,7 @@
                                     <m:t> </m:t>
                                   </m:r>
                                   <m:r>
-                                    <a:rPr lang="en-US" b="0" i="1" smtClean="0">
+                                    <a:rPr lang="en-US" sz="2000" b="0" i="1" smtClean="0">
                                       <a:solidFill>
                                         <a:schemeClr val="accent6">
                                           <a:lumMod val="60000"/>
@@ -31154,7 +30239,7 @@
                                     <m:t>𝑑𝑜𝑐𝑢𝑚𝑒𝑛𝑡</m:t>
                                   </m:r>
                                   <m:r>
-                                    <a:rPr lang="en-US" b="0" i="1" smtClean="0">
+                                    <a:rPr lang="en-US" sz="2000" b="0" i="1" smtClean="0">
                                       <a:solidFill>
                                         <a:schemeClr val="accent6">
                                           <a:lumMod val="60000"/>
@@ -31166,7 +30251,7 @@
                                     <m:t> </m:t>
                                   </m:r>
                                   <m:r>
-                                    <a:rPr lang="en-US" b="0" i="1" smtClean="0">
+                                    <a:rPr lang="en-US" sz="2000" b="0" i="1" smtClean="0">
                                       <a:solidFill>
                                         <a:schemeClr val="accent6">
                                           <a:lumMod val="60000"/>
@@ -31180,7 +30265,7 @@
                                 </m:num>
                                 <m:den>
                                   <m:r>
-                                    <a:rPr lang="en-US" b="0" i="1" smtClean="0">
+                                    <a:rPr lang="en-US" sz="2000" b="0" i="1" smtClean="0">
                                       <a:solidFill>
                                         <a:schemeClr val="accent6">
                                           <a:lumMod val="60000"/>
@@ -31192,7 +30277,7 @@
                                     <m:t>𝑇𝑜𝑡𝑎𝑙</m:t>
                                   </m:r>
                                   <m:r>
-                                    <a:rPr lang="en-US" b="0" i="1" smtClean="0">
+                                    <a:rPr lang="en-US" sz="2000" b="0" i="1" smtClean="0">
                                       <a:solidFill>
                                         <a:schemeClr val="accent6">
                                           <a:lumMod val="60000"/>
@@ -31204,7 +30289,7 @@
                                     <m:t> </m:t>
                                   </m:r>
                                   <m:r>
-                                    <a:rPr lang="en-US" b="0" i="1" smtClean="0">
+                                    <a:rPr lang="en-US" sz="2000" b="0" i="1" smtClean="0">
                                       <a:solidFill>
                                         <a:schemeClr val="accent6">
                                           <a:lumMod val="60000"/>
@@ -31216,7 +30301,7 @@
                                     <m:t>𝑛𝑢𝑚𝑏𝑒𝑟</m:t>
                                   </m:r>
                                   <m:r>
-                                    <a:rPr lang="en-US" b="0" i="1" smtClean="0">
+                                    <a:rPr lang="en-US" sz="2000" b="0" i="1" smtClean="0">
                                       <a:solidFill>
                                         <a:schemeClr val="accent6">
                                           <a:lumMod val="60000"/>
@@ -31228,7 +30313,7 @@
                                     <m:t> </m:t>
                                   </m:r>
                                   <m:r>
-                                    <a:rPr lang="en-US" b="0" i="1" smtClean="0">
+                                    <a:rPr lang="en-US" sz="2000" b="0" i="1" smtClean="0">
                                       <a:solidFill>
                                         <a:schemeClr val="accent6">
                                           <a:lumMod val="60000"/>
@@ -31240,7 +30325,7 @@
                                     <m:t>𝑜𝑓</m:t>
                                   </m:r>
                                   <m:r>
-                                    <a:rPr lang="en-US" b="0" i="1" smtClean="0">
+                                    <a:rPr lang="en-US" sz="2000" b="0" i="1" smtClean="0">
                                       <a:solidFill>
                                         <a:schemeClr val="accent6">
                                           <a:lumMod val="60000"/>
@@ -31252,7 +30337,7 @@
                                     <m:t> </m:t>
                                   </m:r>
                                   <m:r>
-                                    <a:rPr lang="en-US" b="0" i="1" smtClean="0">
+                                    <a:rPr lang="en-US" sz="2000" b="0" i="1" smtClean="0">
                                       <a:solidFill>
                                         <a:schemeClr val="accent6">
                                           <a:lumMod val="60000"/>
@@ -31264,7 +30349,7 @@
                                     <m:t>𝑡𝑒𝑟𝑚𝑠</m:t>
                                   </m:r>
                                   <m:r>
-                                    <a:rPr lang="en-US" b="0" i="1" smtClean="0">
+                                    <a:rPr lang="en-US" sz="2000" b="0" i="1" smtClean="0">
                                       <a:solidFill>
                                         <a:schemeClr val="accent6">
                                           <a:lumMod val="60000"/>
@@ -31276,7 +30361,7 @@
                                     <m:t> </m:t>
                                   </m:r>
                                   <m:r>
-                                    <a:rPr lang="en-US" b="0" i="1" smtClean="0">
+                                    <a:rPr lang="en-US" sz="2000" b="0" i="1" smtClean="0">
                                       <a:solidFill>
                                         <a:schemeClr val="accent6">
                                           <a:lumMod val="60000"/>
@@ -31288,7 +30373,7 @@
                                     <m:t>𝑖𝑛</m:t>
                                   </m:r>
                                   <m:r>
-                                    <a:rPr lang="en-US" b="0" i="1" smtClean="0">
+                                    <a:rPr lang="en-US" sz="2000" b="0" i="1" smtClean="0">
                                       <a:solidFill>
                                         <a:schemeClr val="accent6">
                                           <a:lumMod val="60000"/>
@@ -31300,7 +30385,7 @@
                                     <m:t> </m:t>
                                   </m:r>
                                   <m:r>
-                                    <a:rPr lang="en-US" b="0" i="1" smtClean="0">
+                                    <a:rPr lang="en-US" sz="2000" b="0" i="1" smtClean="0">
                                       <a:solidFill>
                                         <a:schemeClr val="accent6">
                                           <a:lumMod val="60000"/>
@@ -31320,7 +30405,7 @@
                     </m:oMath>
                   </m:oMathPara>
                 </a14:m>
-                <a:endParaRPr lang="en-US" dirty="0">
+                <a:endParaRPr lang="en-US" sz="2000" dirty="0">
                   <a:solidFill>
                     <a:schemeClr val="accent6">
                       <a:lumMod val="60000"/>
@@ -31350,7 +30435,7 @@
             <p:spPr>
               <a:xfrm>
                 <a:off x="451624" y="1902097"/>
-                <a:ext cx="6606873" cy="622350"/>
+                <a:ext cx="7330148" cy="691536"/>
               </a:xfrm>
               <a:prstGeom prst="rect">
                 <a:avLst/>
@@ -31392,7 +30477,7 @@
         <p:spPr>
           <a:xfrm>
             <a:off x="569967" y="1259478"/>
-            <a:ext cx="2357248" cy="338554"/>
+            <a:ext cx="2900409" cy="400110"/>
           </a:xfrm>
           <a:prstGeom prst="rect">
             <a:avLst/>
@@ -31406,7 +30491,7 @@
           <a:lstStyle/>
           <a:p>
             <a:r>
-              <a:rPr lang="en-US" sz="1600" dirty="0">
+              <a:rPr lang="en-US" sz="2000" dirty="0">
                 <a:solidFill>
                   <a:schemeClr val="accent6">
                     <a:lumMod val="60000"/>
@@ -31436,7 +30521,7 @@
             <p:spPr>
               <a:xfrm>
                 <a:off x="451624" y="3100775"/>
-                <a:ext cx="6693435" cy="622350"/>
+                <a:ext cx="7426328" cy="691536"/>
               </a:xfrm>
               <a:prstGeom prst="rect">
                 <a:avLst/>
@@ -31460,7 +30545,7 @@
                         <m:rPr>
                           <m:sty m:val="p"/>
                         </m:rPr>
-                        <a:rPr lang="en-US" smtClean="0">
+                        <a:rPr lang="en-US" sz="2000" smtClean="0">
                           <a:solidFill>
                             <a:schemeClr val="accent6">
                               <a:lumMod val="60000"/>
@@ -31475,7 +30560,7 @@
                         <m:rPr>
                           <m:sty m:val="p"/>
                         </m:rPr>
-                        <a:rPr lang="en-US" b="0" i="0" smtClean="0">
+                        <a:rPr lang="en-US" sz="2000" b="0" i="0" smtClean="0">
                           <a:solidFill>
                             <a:schemeClr val="accent6">
                               <a:lumMod val="60000"/>
@@ -31489,7 +30574,7 @@
                       <m:d>
                         <m:dPr>
                           <m:ctrlPr>
-                            <a:rPr lang="en-US" b="0" i="1" smtClean="0">
+                            <a:rPr lang="en-US" sz="2000" b="0" i="1" smtClean="0">
                               <a:solidFill>
                                 <a:schemeClr val="accent6">
                                   <a:lumMod val="60000"/>
@@ -31505,7 +30590,7 @@
                             <m:rPr>
                               <m:sty m:val="p"/>
                             </m:rPr>
-                            <a:rPr lang="en-US" b="0" i="0" smtClean="0">
+                            <a:rPr lang="en-US" sz="2000" b="0" i="0" smtClean="0">
                               <a:solidFill>
                                 <a:schemeClr val="accent6">
                                   <a:lumMod val="60000"/>
@@ -31517,7 +30602,7 @@
                             <m:t>t</m:t>
                           </m:r>
                           <m:r>
-                            <a:rPr lang="en-US" b="0" i="0" smtClean="0">
+                            <a:rPr lang="en-US" sz="2000" b="0" i="0" smtClean="0">
                               <a:solidFill>
                                 <a:schemeClr val="accent6">
                                   <a:lumMod val="60000"/>
@@ -31532,7 +30617,7 @@
                             <m:rPr>
                               <m:sty m:val="p"/>
                             </m:rPr>
-                            <a:rPr lang="en-US" b="0" i="0" smtClean="0">
+                            <a:rPr lang="en-US" sz="2000" b="0" i="0" smtClean="0">
                               <a:solidFill>
                                 <a:schemeClr val="accent6">
                                   <a:lumMod val="60000"/>
@@ -31546,7 +30631,7 @@
                         </m:e>
                       </m:d>
                       <m:r>
-                        <a:rPr lang="en-US" b="0" i="0" smtClean="0">
+                        <a:rPr lang="en-US" sz="2000" b="0" i="0" smtClean="0">
                           <a:solidFill>
                             <a:schemeClr val="accent6">
                               <a:lumMod val="60000"/>
@@ -31560,7 +30645,7 @@
                       <m:func>
                         <m:funcPr>
                           <m:ctrlPr>
-                            <a:rPr lang="en-US" i="1" smtClean="0">
+                            <a:rPr lang="en-US" sz="2000" i="1" smtClean="0">
                               <a:solidFill>
                                 <a:schemeClr val="accent6">
                                   <a:lumMod val="60000"/>
@@ -31576,7 +30661,7 @@
                             <m:rPr>
                               <m:sty m:val="p"/>
                             </m:rPr>
-                            <a:rPr lang="en-US">
+                            <a:rPr lang="en-US" sz="2000">
                               <a:solidFill>
                                 <a:schemeClr val="accent6">
                                   <a:lumMod val="60000"/>
@@ -31592,7 +30677,7 @@
                           <m:d>
                             <m:dPr>
                               <m:ctrlPr>
-                                <a:rPr lang="en-US" i="1">
+                                <a:rPr lang="en-US" sz="2000" i="1">
                                   <a:solidFill>
                                     <a:schemeClr val="accent6">
                                       <a:lumMod val="60000"/>
@@ -31607,7 +30692,7 @@
                               <m:f>
                                 <m:fPr>
                                   <m:ctrlPr>
-                                    <a:rPr lang="en-US" i="1">
+                                    <a:rPr lang="en-US" sz="2000" i="1">
                                       <a:solidFill>
                                         <a:schemeClr val="accent6">
                                           <a:lumMod val="60000"/>
@@ -31620,7 +30705,7 @@
                                 </m:fPr>
                                 <m:num>
                                   <m:r>
-                                    <a:rPr lang="en-US" b="0" i="1" smtClean="0">
+                                    <a:rPr lang="en-US" sz="2000" b="0" i="1" smtClean="0">
                                       <a:solidFill>
                                         <a:schemeClr val="accent6">
                                           <a:lumMod val="60000"/>
@@ -31632,7 +30717,7 @@
                                     <m:t>𝑁𝑢𝑚𝑏𝑒𝑟</m:t>
                                   </m:r>
                                   <m:r>
-                                    <a:rPr lang="en-US" b="0" i="1" smtClean="0">
+                                    <a:rPr lang="en-US" sz="2000" b="0" i="1" smtClean="0">
                                       <a:solidFill>
                                         <a:schemeClr val="accent6">
                                           <a:lumMod val="60000"/>
@@ -31644,7 +30729,7 @@
                                     <m:t> </m:t>
                                   </m:r>
                                   <m:r>
-                                    <a:rPr lang="en-US" b="0" i="1" smtClean="0">
+                                    <a:rPr lang="en-US" sz="2000" b="0" i="1" smtClean="0">
                                       <a:solidFill>
                                         <a:schemeClr val="accent6">
                                           <a:lumMod val="60000"/>
@@ -31656,7 +30741,7 @@
                                     <m:t>𝑜𝑓</m:t>
                                   </m:r>
                                   <m:r>
-                                    <a:rPr lang="en-US" b="0" i="1" smtClean="0">
+                                    <a:rPr lang="en-US" sz="2000" b="0" i="1" smtClean="0">
                                       <a:solidFill>
                                         <a:schemeClr val="accent6">
                                           <a:lumMod val="60000"/>
@@ -31668,7 +30753,7 @@
                                     <m:t> </m:t>
                                   </m:r>
                                   <m:r>
-                                    <a:rPr lang="en-US" b="0" i="1" smtClean="0">
+                                    <a:rPr lang="en-US" sz="2000" b="0" i="1" smtClean="0">
                                       <a:solidFill>
                                         <a:schemeClr val="accent6">
                                           <a:lumMod val="60000"/>
@@ -31680,7 +30765,7 @@
                                     <m:t>𝑡𝑖𝑚𝑒𝑠</m:t>
                                   </m:r>
                                   <m:r>
-                                    <a:rPr lang="en-US" b="0" i="1" smtClean="0">
+                                    <a:rPr lang="en-US" sz="2000" b="0" i="1" smtClean="0">
                                       <a:solidFill>
                                         <a:schemeClr val="accent6">
                                           <a:lumMod val="60000"/>
@@ -31692,7 +30777,7 @@
                                     <m:t> </m:t>
                                   </m:r>
                                   <m:r>
-                                    <a:rPr lang="en-US" b="0" i="1" smtClean="0">
+                                    <a:rPr lang="en-US" sz="2000" b="0" i="1" smtClean="0">
                                       <a:solidFill>
                                         <a:schemeClr val="accent6">
                                           <a:lumMod val="60000"/>
@@ -31704,7 +30789,7 @@
                                     <m:t>𝑡𝑒𝑟𝑚</m:t>
                                   </m:r>
                                   <m:r>
-                                    <a:rPr lang="en-US" b="0" i="1" smtClean="0">
+                                    <a:rPr lang="en-US" sz="2000" b="0" i="1" smtClean="0">
                                       <a:solidFill>
                                         <a:schemeClr val="accent6">
                                           <a:lumMod val="60000"/>
@@ -31716,7 +30801,7 @@
                                     <m:t> </m:t>
                                   </m:r>
                                   <m:r>
-                                    <a:rPr lang="en-US" b="0" i="1" smtClean="0">
+                                    <a:rPr lang="en-US" sz="2000" b="0" i="1" smtClean="0">
                                       <a:solidFill>
                                         <a:schemeClr val="accent6">
                                           <a:lumMod val="60000"/>
@@ -31728,7 +30813,7 @@
                                     <m:t>𝑡</m:t>
                                   </m:r>
                                   <m:r>
-                                    <a:rPr lang="en-US" b="0" i="1" smtClean="0">
+                                    <a:rPr lang="en-US" sz="2000" b="0" i="1" smtClean="0">
                                       <a:solidFill>
                                         <a:schemeClr val="accent6">
                                           <a:lumMod val="60000"/>
@@ -31740,7 +30825,7 @@
                                     <m:t> </m:t>
                                   </m:r>
                                   <m:r>
-                                    <a:rPr lang="en-US" b="0" i="1" smtClean="0">
+                                    <a:rPr lang="en-US" sz="2000" b="0" i="1" smtClean="0">
                                       <a:solidFill>
                                         <a:schemeClr val="accent6">
                                           <a:lumMod val="60000"/>
@@ -31752,7 +30837,7 @@
                                     <m:t>𝑎𝑝𝑝𝑒𝑎𝑟𝑠</m:t>
                                   </m:r>
                                   <m:r>
-                                    <a:rPr lang="en-US" b="0" i="1" smtClean="0">
+                                    <a:rPr lang="en-US" sz="2000" b="0" i="1" smtClean="0">
                                       <a:solidFill>
                                         <a:schemeClr val="accent6">
                                           <a:lumMod val="60000"/>
@@ -31764,7 +30849,7 @@
                                     <m:t> </m:t>
                                   </m:r>
                                   <m:r>
-                                    <a:rPr lang="en-US" b="0" i="1" smtClean="0">
+                                    <a:rPr lang="en-US" sz="2000" b="0" i="1" smtClean="0">
                                       <a:solidFill>
                                         <a:schemeClr val="accent6">
                                           <a:lumMod val="60000"/>
@@ -31776,7 +30861,7 @@
                                     <m:t>𝑖𝑛</m:t>
                                   </m:r>
                                   <m:r>
-                                    <a:rPr lang="en-US" b="0" i="1" smtClean="0">
+                                    <a:rPr lang="en-US" sz="2000" b="0" i="1" smtClean="0">
                                       <a:solidFill>
                                         <a:schemeClr val="accent6">
                                           <a:lumMod val="60000"/>
@@ -31788,7 +30873,7 @@
                                     <m:t> </m:t>
                                   </m:r>
                                   <m:r>
-                                    <a:rPr lang="en-US" b="0" i="1" smtClean="0">
+                                    <a:rPr lang="en-US" sz="2000" b="0" i="1" smtClean="0">
                                       <a:solidFill>
                                         <a:schemeClr val="accent6">
                                           <a:lumMod val="60000"/>
@@ -31800,7 +30885,7 @@
                                     <m:t>𝑑𝑜𝑐𝑢𝑚𝑒𝑛𝑡</m:t>
                                   </m:r>
                                   <m:r>
-                                    <a:rPr lang="en-US" b="0" i="1" smtClean="0">
+                                    <a:rPr lang="en-US" sz="2000" b="0" i="1" smtClean="0">
                                       <a:solidFill>
                                         <a:schemeClr val="accent6">
                                           <a:lumMod val="60000"/>
@@ -31812,7 +30897,7 @@
                                     <m:t> </m:t>
                                   </m:r>
                                   <m:r>
-                                    <a:rPr lang="en-US" b="0" i="1" smtClean="0">
+                                    <a:rPr lang="en-US" sz="2000" b="0" i="1" smtClean="0">
                                       <a:solidFill>
                                         <a:schemeClr val="accent6">
                                           <a:lumMod val="60000"/>
@@ -31826,7 +30911,7 @@
                                 </m:num>
                                 <m:den>
                                   <m:r>
-                                    <a:rPr lang="en-US" b="0" i="1" smtClean="0">
+                                    <a:rPr lang="en-US" sz="2000" b="0" i="1" smtClean="0">
                                       <a:solidFill>
                                         <a:schemeClr val="accent6">
                                           <a:lumMod val="60000"/>
@@ -31838,7 +30923,7 @@
                                     <m:t>𝑇𝑜𝑡𝑎𝑙</m:t>
                                   </m:r>
                                   <m:r>
-                                    <a:rPr lang="en-US" b="0" i="1" smtClean="0">
+                                    <a:rPr lang="en-US" sz="2000" b="0" i="1" smtClean="0">
                                       <a:solidFill>
                                         <a:schemeClr val="accent6">
                                           <a:lumMod val="60000"/>
@@ -31850,7 +30935,7 @@
                                     <m:t> </m:t>
                                   </m:r>
                                   <m:r>
-                                    <a:rPr lang="en-US" b="0" i="1" smtClean="0">
+                                    <a:rPr lang="en-US" sz="2000" b="0" i="1" smtClean="0">
                                       <a:solidFill>
                                         <a:schemeClr val="accent6">
                                           <a:lumMod val="60000"/>
@@ -31862,7 +30947,7 @@
                                     <m:t>𝑛𝑢𝑚𝑏𝑒𝑟</m:t>
                                   </m:r>
                                   <m:r>
-                                    <a:rPr lang="en-US" b="0" i="1" smtClean="0">
+                                    <a:rPr lang="en-US" sz="2000" b="0" i="1" smtClean="0">
                                       <a:solidFill>
                                         <a:schemeClr val="accent6">
                                           <a:lumMod val="60000"/>
@@ -31874,7 +30959,7 @@
                                     <m:t> </m:t>
                                   </m:r>
                                   <m:r>
-                                    <a:rPr lang="en-US" b="0" i="1" smtClean="0">
+                                    <a:rPr lang="en-US" sz="2000" b="0" i="1" smtClean="0">
                                       <a:solidFill>
                                         <a:schemeClr val="accent6">
                                           <a:lumMod val="60000"/>
@@ -31886,7 +30971,7 @@
                                     <m:t>𝑜𝑓</m:t>
                                   </m:r>
                                   <m:r>
-                                    <a:rPr lang="en-US" b="0" i="1" smtClean="0">
+                                    <a:rPr lang="en-US" sz="2000" b="0" i="1" smtClean="0">
                                       <a:solidFill>
                                         <a:schemeClr val="accent6">
                                           <a:lumMod val="60000"/>
@@ -31898,7 +30983,7 @@
                                     <m:t> </m:t>
                                   </m:r>
                                   <m:r>
-                                    <a:rPr lang="en-US" b="0" i="1" smtClean="0">
+                                    <a:rPr lang="en-US" sz="2000" b="0" i="1" smtClean="0">
                                       <a:solidFill>
                                         <a:schemeClr val="accent6">
                                           <a:lumMod val="60000"/>
@@ -31910,7 +30995,7 @@
                                     <m:t>𝑡𝑒𝑟𝑚𝑠</m:t>
                                   </m:r>
                                   <m:r>
-                                    <a:rPr lang="en-US" b="0" i="1" smtClean="0">
+                                    <a:rPr lang="en-US" sz="2000" b="0" i="1" smtClean="0">
                                       <a:solidFill>
                                         <a:schemeClr val="accent6">
                                           <a:lumMod val="60000"/>
@@ -31922,7 +31007,7 @@
                                     <m:t> </m:t>
                                   </m:r>
                                   <m:r>
-                                    <a:rPr lang="en-US" b="0" i="1" smtClean="0">
+                                    <a:rPr lang="en-US" sz="2000" b="0" i="1" smtClean="0">
                                       <a:solidFill>
                                         <a:schemeClr val="accent6">
                                           <a:lumMod val="60000"/>
@@ -31934,7 +31019,7 @@
                                     <m:t>𝑖𝑛</m:t>
                                   </m:r>
                                   <m:r>
-                                    <a:rPr lang="en-US" b="0" i="1" smtClean="0">
+                                    <a:rPr lang="en-US" sz="2000" b="0" i="1" smtClean="0">
                                       <a:solidFill>
                                         <a:schemeClr val="accent6">
                                           <a:lumMod val="60000"/>
@@ -31946,7 +31031,7 @@
                                     <m:t> </m:t>
                                   </m:r>
                                   <m:r>
-                                    <a:rPr lang="en-US" b="0" i="1" smtClean="0">
+                                    <a:rPr lang="en-US" sz="2000" b="0" i="1" smtClean="0">
                                       <a:solidFill>
                                         <a:schemeClr val="accent6">
                                           <a:lumMod val="60000"/>
@@ -31966,7 +31051,7 @@
                     </m:oMath>
                   </m:oMathPara>
                 </a14:m>
-                <a:endParaRPr lang="en-US" dirty="0">
+                <a:endParaRPr lang="en-US" sz="2000" dirty="0">
                   <a:solidFill>
                     <a:schemeClr val="accent6">
                       <a:lumMod val="60000"/>
@@ -31996,7 +31081,7 @@
             <p:spPr>
               <a:xfrm>
                 <a:off x="451624" y="3100775"/>
-                <a:ext cx="6693435" cy="622350"/>
+                <a:ext cx="7426328" cy="691536"/>
               </a:xfrm>
               <a:prstGeom prst="rect">
                 <a:avLst/>
@@ -32088,7 +31173,7 @@
         <p:spPr>
           <a:xfrm>
             <a:off x="451624" y="5730579"/>
-            <a:ext cx="3490058" cy="400110"/>
+            <a:ext cx="4134465" cy="461665"/>
           </a:xfrm>
           <a:prstGeom prst="rect">
             <a:avLst/>
@@ -32102,7 +31187,7 @@
           <a:lstStyle/>
           <a:p>
             <a:r>
-              <a:rPr lang="en-US" sz="2000" dirty="0">
+              <a:rPr lang="en-US" sz="2400" dirty="0">
                 <a:solidFill>
                   <a:schemeClr val="accent6">
                     <a:lumMod val="60000"/>
@@ -32309,7 +31394,7 @@
         </p:nvSpPr>
         <p:spPr>
           <a:xfrm>
-            <a:off x="318082" y="188957"/>
+            <a:off x="4185994" y="68282"/>
             <a:ext cx="5604546" cy="456996"/>
           </a:xfrm>
         </p:spPr>
@@ -32436,8 +31521,8 @@
         </p:nvSpPr>
         <p:spPr>
           <a:xfrm>
-            <a:off x="97928" y="670480"/>
-            <a:ext cx="6851512" cy="3416320"/>
+            <a:off x="6487" y="446350"/>
+            <a:ext cx="7701904" cy="3785652"/>
           </a:xfrm>
           <a:prstGeom prst="rect">
             <a:avLst/>
@@ -32454,7 +31539,7 @@
               <a:buNone/>
             </a:pPr>
             <a:r>
-              <a:rPr lang="en-US" sz="1800" dirty="0">
+              <a:rPr lang="en-US" sz="2000" dirty="0">
                 <a:solidFill>
                   <a:schemeClr val="accent6">
                     <a:lumMod val="60000"/>
@@ -32470,7 +31555,7 @@
               <a:buNone/>
             </a:pPr>
             <a:r>
-              <a:rPr lang="en-US" sz="1800" dirty="0">
+              <a:rPr lang="en-US" sz="2000" dirty="0">
                 <a:solidFill>
                   <a:schemeClr val="accent6">
                     <a:lumMod val="60000"/>
@@ -32486,7 +31571,7 @@
               <a:buNone/>
             </a:pPr>
             <a:r>
-              <a:rPr lang="en-US" sz="1800" dirty="0">
+              <a:rPr lang="en-US" sz="2000" dirty="0">
                 <a:solidFill>
                   <a:schemeClr val="accent6">
                     <a:lumMod val="60000"/>
@@ -32502,7 +31587,7 @@
               <a:buNone/>
             </a:pPr>
             <a:r>
-              <a:rPr lang="en-US" sz="1800" dirty="0">
+              <a:rPr lang="en-US" sz="2000" dirty="0">
                 <a:solidFill>
                   <a:schemeClr val="accent6">
                     <a:lumMod val="60000"/>
@@ -32518,7 +31603,7 @@
               <a:buNone/>
             </a:pPr>
             <a:r>
-              <a:rPr lang="en-US" sz="1800" dirty="0">
+              <a:rPr lang="en-US" sz="2000" dirty="0">
                 <a:solidFill>
                   <a:schemeClr val="accent6">
                     <a:lumMod val="60000"/>
@@ -32533,7 +31618,7 @@
             <a:pPr marL="0" indent="0">
               <a:buNone/>
             </a:pPr>
-            <a:endParaRPr lang="en-US" sz="1800" dirty="0">
+            <a:endParaRPr lang="en-US" sz="2000" dirty="0">
               <a:solidFill>
                 <a:schemeClr val="accent6">
                   <a:lumMod val="60000"/>
@@ -32547,7 +31632,7 @@
               <a:buNone/>
             </a:pPr>
             <a:r>
-              <a:rPr lang="en-US" sz="1800" dirty="0">
+              <a:rPr lang="en-US" sz="2000" dirty="0">
                 <a:solidFill>
                   <a:schemeClr val="accent6">
                     <a:lumMod val="60000"/>
@@ -32562,7 +31647,7 @@
             <a:pPr marL="0" indent="0">
               <a:buNone/>
             </a:pPr>
-            <a:endParaRPr lang="en-US" sz="1800" dirty="0">
+            <a:endParaRPr lang="en-US" sz="2000" dirty="0">
               <a:solidFill>
                 <a:schemeClr val="accent6">
                   <a:lumMod val="60000"/>
@@ -32576,7 +31661,7 @@
               <a:buNone/>
             </a:pPr>
             <a:r>
-              <a:rPr lang="en-US" sz="1800" dirty="0">
+              <a:rPr lang="en-US" sz="2000" dirty="0">
                 <a:solidFill>
                   <a:schemeClr val="accent6">
                     <a:lumMod val="60000"/>
@@ -32592,7 +31677,7 @@
               <a:buNone/>
             </a:pPr>
             <a:r>
-              <a:rPr lang="en-US" sz="1800" dirty="0">
+              <a:rPr lang="en-US" sz="2000" dirty="0">
                 <a:solidFill>
                   <a:schemeClr val="accent6">
                     <a:lumMod val="60000"/>

--- a/deep_learning/3_RNN_NLP/2_NLP_2_Detailed/2_NLP_process.pptx
+++ b/deep_learning/3_RNN_NLP/2_NLP_2_Detailed/2_NLP_process.pptx
@@ -1995,7 +1995,7 @@
       <dgm:spPr/>
     </dgm:pt>
     <dgm:pt modelId="{C35A75CD-558B-4038-B5ED-FE94802087E2}" type="pres">
-      <dgm:prSet presAssocID="{CA52D65C-C524-4C1F-8047-728773BB3F03}" presName="node" presStyleLbl="node1" presStyleIdx="0" presStyleCnt="4" custScaleX="103374">
+      <dgm:prSet presAssocID="{CA52D65C-C524-4C1F-8047-728773BB3F03}" presName="node" presStyleLbl="node1" presStyleIdx="0" presStyleCnt="4" custScaleX="103374" custLinFactNeighborX="-8361" custLinFactNeighborY="-516">
         <dgm:presLayoutVars>
           <dgm:bulletEnabled val="1"/>
         </dgm:presLayoutVars>
@@ -2003,7 +2003,7 @@
       <dgm:spPr/>
     </dgm:pt>
     <dgm:pt modelId="{D89F832D-E3ED-4E37-854E-BD18B3B3376F}" type="pres">
-      <dgm:prSet presAssocID="{761CBF07-9D9B-49AF-B85F-059F41968DC0}" presName="sibTrans" presStyleLbl="sibTrans2D1" presStyleIdx="0" presStyleCnt="3"/>
+      <dgm:prSet presAssocID="{761CBF07-9D9B-49AF-B85F-059F41968DC0}" presName="sibTrans" presStyleLbl="sibTrans2D1" presStyleIdx="0" presStyleCnt="3" custLinFactNeighborX="-21576" custLinFactNeighborY="-2726"/>
       <dgm:spPr/>
     </dgm:pt>
     <dgm:pt modelId="{B53021F2-D7F0-4FAF-BB2B-D8D0962C06F8}" type="pres">
@@ -2011,7 +2011,7 @@
       <dgm:spPr/>
     </dgm:pt>
     <dgm:pt modelId="{4FAD35A4-61F3-418D-BE87-E52A64AFAABF}" type="pres">
-      <dgm:prSet presAssocID="{243C6970-D0C0-4D9F-A4FF-9D3D975D4E10}" presName="node" presStyleLbl="node1" presStyleIdx="1" presStyleCnt="4">
+      <dgm:prSet presAssocID="{243C6970-D0C0-4D9F-A4FF-9D3D975D4E10}" presName="node" presStyleLbl="node1" presStyleIdx="1" presStyleCnt="4" custScaleX="127552">
         <dgm:presLayoutVars>
           <dgm:bulletEnabled val="1"/>
         </dgm:presLayoutVars>
@@ -2043,7 +2043,7 @@
       <dgm:spPr/>
     </dgm:pt>
     <dgm:pt modelId="{E8DD1799-27EF-49F2-854E-787D75467B88}" type="pres">
-      <dgm:prSet presAssocID="{FCB03A75-110F-4703-85E9-D18F2E2978F4}" presName="node" presStyleLbl="node1" presStyleIdx="3" presStyleCnt="4" custScaleX="114445">
+      <dgm:prSet presAssocID="{FCB03A75-110F-4703-85E9-D18F2E2978F4}" presName="node" presStyleLbl="node1" presStyleIdx="3" presStyleCnt="4" custScaleX="129007">
         <dgm:presLayoutVars>
           <dgm:bulletEnabled val="1"/>
         </dgm:presLayoutVars>
@@ -2557,8 +2557,8 @@
       </dsp:nvSpPr>
       <dsp:spPr>
         <a:xfrm>
-          <a:off x="4595" y="175435"/>
-          <a:ext cx="2261165" cy="5607956"/>
+          <a:off x="0" y="290103"/>
+          <a:ext cx="2097743" cy="5323681"/>
         </a:xfrm>
         <a:prstGeom prst="roundRect">
           <a:avLst>
@@ -2702,8 +2702,8 @@
         </a:p>
       </dsp:txBody>
       <dsp:txXfrm>
-        <a:off x="70822" y="241662"/>
-        <a:ext cx="2128711" cy="5475502"/>
+        <a:off x="61441" y="351544"/>
+        <a:ext cx="1974861" cy="5200799"/>
       </dsp:txXfrm>
     </dsp:sp>
     <dsp:sp modelId="{D89F832D-E3ED-4E37-854E-BD18B3B3376F}">
@@ -2712,9 +2712,9 @@
         <dsp:cNvSpPr/>
       </dsp:nvSpPr>
       <dsp:spPr>
-        <a:xfrm>
-          <a:off x="2484497" y="2708180"/>
-          <a:ext cx="463721" cy="542466"/>
+        <a:xfrm rot="29911">
+          <a:off x="2208164" y="2699368"/>
+          <a:ext cx="431497" cy="503260"/>
         </a:xfrm>
         <a:prstGeom prst="rightArrow">
           <a:avLst>
@@ -2756,7 +2756,7 @@
         </a:bodyPr>
         <a:lstStyle/>
         <a:p>
-          <a:pPr marL="0" lvl="0" indent="0" algn="ctr" defTabSz="1022350">
+          <a:pPr marL="0" lvl="0" indent="0" algn="ctr" defTabSz="933450">
             <a:lnSpc>
               <a:spcPct val="90000"/>
             </a:lnSpc>
@@ -2768,12 +2768,12 @@
             </a:spcAft>
             <a:buNone/>
           </a:pPr>
-          <a:endParaRPr lang="en-US" sz="2300" kern="1200"/>
+          <a:endParaRPr lang="en-US" sz="2100" kern="1200"/>
         </a:p>
       </dsp:txBody>
       <dsp:txXfrm>
-        <a:off x="2484497" y="2816673"/>
-        <a:ext cx="324605" cy="325480"/>
+        <a:off x="2208166" y="2799457"/>
+        <a:ext cx="302048" cy="301956"/>
       </dsp:txXfrm>
     </dsp:sp>
     <dsp:sp modelId="{4FAD35A4-61F3-418D-BE87-E52A64AFAABF}">
@@ -2783,8 +2783,8 @@
       </dsp:nvSpPr>
       <dsp:spPr>
         <a:xfrm>
-          <a:off x="3140706" y="175435"/>
-          <a:ext cx="2187364" cy="5607956"/>
+          <a:off x="2911858" y="317573"/>
+          <a:ext cx="2588382" cy="5323681"/>
         </a:xfrm>
         <a:prstGeom prst="roundRect">
           <a:avLst>
@@ -2969,8 +2969,8 @@
         </a:p>
       </dsp:txBody>
       <dsp:txXfrm>
-        <a:off x="3204772" y="239501"/>
-        <a:ext cx="2059232" cy="5479824"/>
+        <a:off x="2987669" y="393384"/>
+        <a:ext cx="2436760" cy="5172059"/>
       </dsp:txXfrm>
     </dsp:sp>
     <dsp:sp modelId="{7115A0E0-D94C-4BEC-8C6E-8F6E167A80FC}">
@@ -2980,8 +2980,8 @@
       </dsp:nvSpPr>
       <dsp:spPr>
         <a:xfrm>
-          <a:off x="5546807" y="2708180"/>
-          <a:ext cx="463721" cy="542466"/>
+          <a:off x="5703168" y="2727783"/>
+          <a:ext cx="430206" cy="503260"/>
         </a:xfrm>
         <a:prstGeom prst="rightArrow">
           <a:avLst>
@@ -3023,7 +3023,7 @@
         </a:bodyPr>
         <a:lstStyle/>
         <a:p>
-          <a:pPr marL="0" lvl="0" indent="0" algn="ctr" defTabSz="1022350">
+          <a:pPr marL="0" lvl="0" indent="0" algn="ctr" defTabSz="933450">
             <a:lnSpc>
               <a:spcPct val="90000"/>
             </a:lnSpc>
@@ -3035,12 +3035,12 @@
             </a:spcAft>
             <a:buNone/>
           </a:pPr>
-          <a:endParaRPr lang="en-US" sz="2300" kern="1200"/>
+          <a:endParaRPr lang="en-US" sz="2100" kern="1200"/>
         </a:p>
       </dsp:txBody>
       <dsp:txXfrm>
-        <a:off x="5546807" y="2816673"/>
-        <a:ext cx="324605" cy="325480"/>
+        <a:off x="5703168" y="2828435"/>
+        <a:ext cx="301144" cy="301956"/>
       </dsp:txXfrm>
     </dsp:sp>
     <dsp:sp modelId="{0BED751A-81B5-4F78-8ACE-26CD8123C9DA}">
@@ -3050,8 +3050,8 @@
       </dsp:nvSpPr>
       <dsp:spPr>
         <a:xfrm>
-          <a:off x="6203016" y="175435"/>
-          <a:ext cx="2187364" cy="5607956"/>
+          <a:off x="6311951" y="317573"/>
+          <a:ext cx="2029276" cy="5323681"/>
         </a:xfrm>
         <a:prstGeom prst="roundRect">
           <a:avLst>
@@ -3212,8 +3212,8 @@
         </a:p>
       </dsp:txBody>
       <dsp:txXfrm>
-        <a:off x="6267082" y="239501"/>
-        <a:ext cx="2059232" cy="5479824"/>
+        <a:off x="6371386" y="377008"/>
+        <a:ext cx="1910406" cy="5204811"/>
       </dsp:txXfrm>
     </dsp:sp>
     <dsp:sp modelId="{21319410-2170-4FC1-80BC-A15C57440B7B}">
@@ -3223,8 +3223,8 @@
       </dsp:nvSpPr>
       <dsp:spPr>
         <a:xfrm>
-          <a:off x="8609116" y="2708180"/>
-          <a:ext cx="463721" cy="542466"/>
+          <a:off x="8544154" y="2727783"/>
+          <a:ext cx="430206" cy="503260"/>
         </a:xfrm>
         <a:prstGeom prst="rightArrow">
           <a:avLst>
@@ -3266,7 +3266,7 @@
         </a:bodyPr>
         <a:lstStyle/>
         <a:p>
-          <a:pPr marL="0" lvl="0" indent="0" algn="ctr" defTabSz="1022350">
+          <a:pPr marL="0" lvl="0" indent="0" algn="ctr" defTabSz="933450">
             <a:lnSpc>
               <a:spcPct val="90000"/>
             </a:lnSpc>
@@ -3278,12 +3278,12 @@
             </a:spcAft>
             <a:buNone/>
           </a:pPr>
-          <a:endParaRPr lang="en-US" sz="2300" kern="1200"/>
+          <a:endParaRPr lang="en-US" sz="2100" kern="1200"/>
         </a:p>
       </dsp:txBody>
       <dsp:txXfrm>
-        <a:off x="8609116" y="2816673"/>
-        <a:ext cx="324605" cy="325480"/>
+        <a:off x="8544154" y="2828435"/>
+        <a:ext cx="301144" cy="301956"/>
       </dsp:txXfrm>
     </dsp:sp>
     <dsp:sp modelId="{E8DD1799-27EF-49F2-854E-787D75467B88}">
@@ -3293,8 +3293,8 @@
       </dsp:nvSpPr>
       <dsp:spPr>
         <a:xfrm>
-          <a:off x="9265325" y="175435"/>
-          <a:ext cx="2503328" cy="5607956"/>
+          <a:off x="9152937" y="317573"/>
+          <a:ext cx="2617908" cy="5323681"/>
         </a:xfrm>
         <a:prstGeom prst="roundRect">
           <a:avLst>
@@ -3468,8 +3468,8 @@
         </a:p>
       </dsp:txBody>
       <dsp:txXfrm>
-        <a:off x="9338645" y="248755"/>
-        <a:ext cx="2356688" cy="5461316"/>
+        <a:off x="9229613" y="394249"/>
+        <a:ext cx="2464556" cy="5170329"/>
       </dsp:txXfrm>
     </dsp:sp>
   </dsp:spTree>
@@ -6965,7 +6965,7 @@
           <a:p>
             <a:fld id="{7BAEECA8-D063-486F-AE31-5020270C1449}" type="datetimeFigureOut">
               <a:rPr lang="en-US" smtClean="0"/>
-              <a:t>5/3/2026</a:t>
+              <a:t>7/19/2026</a:t>
             </a:fld>
             <a:endParaRPr lang="en-US"/>
           </a:p>
@@ -7142,7 +7142,7 @@
           <a:p>
             <a:fld id="{CB233BD1-3BA8-448D-9D08-7846095EA517}" type="datetimeFigureOut">
               <a:rPr lang="en-US" smtClean="0"/>
-              <a:t>5/3/2026</a:t>
+              <a:t>7/19/2026</a:t>
             </a:fld>
             <a:endParaRPr lang="en-US"/>
           </a:p>
@@ -7556,7 +7556,7 @@
           <a:p>
             <a:fld id="{6383FAE1-13DE-4511-8C1B-C8AFB720664C}" type="datetimeFigureOut">
               <a:rPr lang="en-US" smtClean="0"/>
-              <a:t>5/3/2026</a:t>
+              <a:t>7/19/2026</a:t>
             </a:fld>
             <a:endParaRPr lang="en-US"/>
           </a:p>
@@ -7754,7 +7754,7 @@
           <a:p>
             <a:fld id="{6383FAE1-13DE-4511-8C1B-C8AFB720664C}" type="datetimeFigureOut">
               <a:rPr lang="en-US" smtClean="0"/>
-              <a:t>5/3/2026</a:t>
+              <a:t>7/19/2026</a:t>
             </a:fld>
             <a:endParaRPr lang="en-US"/>
           </a:p>
@@ -7962,7 +7962,7 @@
           <a:p>
             <a:fld id="{6383FAE1-13DE-4511-8C1B-C8AFB720664C}" type="datetimeFigureOut">
               <a:rPr lang="en-US" smtClean="0"/>
-              <a:t>5/3/2026</a:t>
+              <a:t>7/19/2026</a:t>
             </a:fld>
             <a:endParaRPr lang="en-US"/>
           </a:p>
@@ -8160,7 +8160,7 @@
           <a:p>
             <a:fld id="{6383FAE1-13DE-4511-8C1B-C8AFB720664C}" type="datetimeFigureOut">
               <a:rPr lang="en-US" smtClean="0"/>
-              <a:t>5/3/2026</a:t>
+              <a:t>7/19/2026</a:t>
             </a:fld>
             <a:endParaRPr lang="en-US"/>
           </a:p>
@@ -8435,7 +8435,7 @@
           <a:p>
             <a:fld id="{6383FAE1-13DE-4511-8C1B-C8AFB720664C}" type="datetimeFigureOut">
               <a:rPr lang="en-US" smtClean="0"/>
-              <a:t>5/3/2026</a:t>
+              <a:t>7/19/2026</a:t>
             </a:fld>
             <a:endParaRPr lang="en-US"/>
           </a:p>
@@ -8700,7 +8700,7 @@
           <a:p>
             <a:fld id="{6383FAE1-13DE-4511-8C1B-C8AFB720664C}" type="datetimeFigureOut">
               <a:rPr lang="en-US" smtClean="0"/>
-              <a:t>5/3/2026</a:t>
+              <a:t>7/19/2026</a:t>
             </a:fld>
             <a:endParaRPr lang="en-US"/>
           </a:p>
@@ -9112,7 +9112,7 @@
           <a:p>
             <a:fld id="{6383FAE1-13DE-4511-8C1B-C8AFB720664C}" type="datetimeFigureOut">
               <a:rPr lang="en-US" smtClean="0"/>
-              <a:t>5/3/2026</a:t>
+              <a:t>7/19/2026</a:t>
             </a:fld>
             <a:endParaRPr lang="en-US"/>
           </a:p>
@@ -9253,7 +9253,7 @@
           <a:p>
             <a:fld id="{6383FAE1-13DE-4511-8C1B-C8AFB720664C}" type="datetimeFigureOut">
               <a:rPr lang="en-US" smtClean="0"/>
-              <a:t>5/3/2026</a:t>
+              <a:t>7/19/2026</a:t>
             </a:fld>
             <a:endParaRPr lang="en-US"/>
           </a:p>
@@ -9366,7 +9366,7 @@
           <a:p>
             <a:fld id="{6383FAE1-13DE-4511-8C1B-C8AFB720664C}" type="datetimeFigureOut">
               <a:rPr lang="en-US" smtClean="0"/>
-              <a:t>5/3/2026</a:t>
+              <a:t>7/19/2026</a:t>
             </a:fld>
             <a:endParaRPr lang="en-US"/>
           </a:p>
@@ -9677,7 +9677,7 @@
           <a:p>
             <a:fld id="{6383FAE1-13DE-4511-8C1B-C8AFB720664C}" type="datetimeFigureOut">
               <a:rPr lang="en-US" smtClean="0"/>
-              <a:t>5/3/2026</a:t>
+              <a:t>7/19/2026</a:t>
             </a:fld>
             <a:endParaRPr lang="en-US"/>
           </a:p>
@@ -9968,7 +9968,7 @@
           <a:p>
             <a:fld id="{6383FAE1-13DE-4511-8C1B-C8AFB720664C}" type="datetimeFigureOut">
               <a:rPr lang="en-US" smtClean="0"/>
-              <a:t>5/3/2026</a:t>
+              <a:t>7/19/2026</a:t>
             </a:fld>
             <a:endParaRPr lang="en-US"/>
           </a:p>
@@ -10212,7 +10212,7 @@
           <a:p>
             <a:fld id="{6383FAE1-13DE-4511-8C1B-C8AFB720664C}" type="datetimeFigureOut">
               <a:rPr lang="en-US" smtClean="0"/>
-              <a:t>5/3/2026</a:t>
+              <a:t>7/19/2026</a:t>
             </a:fld>
             <a:endParaRPr lang="en-US"/>
           </a:p>
@@ -32545,13 +32545,8 @@
           <a:p>
             <a:r>
               <a:rPr lang="en-US" sz="3200" dirty="0"/>
-              <a:t>5. Text Representation: Word </a:t>
-            </a:r>
-            <a:r>
-              <a:rPr lang="en-US" sz="3200" dirty="0" err="1"/>
-              <a:t>embeddings</a:t>
-            </a:r>
-            <a:endParaRPr lang="en-US" sz="3200" dirty="0"/>
+              <a:t>5. Text Representation: Word Embeddings</a:t>
+            </a:r>
           </a:p>
         </p:txBody>
       </p:sp>
@@ -32569,7 +32564,7 @@
         </p:nvSpPr>
         <p:spPr>
           <a:xfrm>
-            <a:off x="162634" y="1984909"/>
+            <a:off x="36576" y="923012"/>
             <a:ext cx="11559974" cy="2677656"/>
           </a:xfrm>
           <a:prstGeom prst="rect">
@@ -32740,6 +32735,66 @@
           </a:p>
         </p:txBody>
       </p:sp>
+      <p:pic>
+        <p:nvPicPr>
+          <p:cNvPr id="4" name="Picture 3">
+            <a:extLst>
+              <a:ext uri="{FF2B5EF4-FFF2-40B4-BE49-F238E27FC236}">
+                <a16:creationId xmlns:a16="http://schemas.microsoft.com/office/drawing/2014/main" id="{6732CEB5-7E35-AF19-8871-C182BD544EAE}"/>
+              </a:ext>
+            </a:extLst>
+          </p:cNvPr>
+          <p:cNvPicPr>
+            <a:picLocks noChangeAspect="1"/>
+          </p:cNvPicPr>
+          <p:nvPr/>
+        </p:nvPicPr>
+        <p:blipFill>
+          <a:blip r:embed="rId2"/>
+          <a:stretch>
+            <a:fillRect/>
+          </a:stretch>
+        </p:blipFill>
+        <p:spPr>
+          <a:xfrm>
+            <a:off x="7351776" y="3600668"/>
+            <a:ext cx="4461725" cy="2752979"/>
+          </a:xfrm>
+          <a:prstGeom prst="rect">
+            <a:avLst/>
+          </a:prstGeom>
+        </p:spPr>
+      </p:pic>
+      <p:pic>
+        <p:nvPicPr>
+          <p:cNvPr id="7" name="Picture 6">
+            <a:extLst>
+              <a:ext uri="{FF2B5EF4-FFF2-40B4-BE49-F238E27FC236}">
+                <a16:creationId xmlns:a16="http://schemas.microsoft.com/office/drawing/2014/main" id="{F76815F5-B0C4-7769-268A-9F037DA34B0F}"/>
+              </a:ext>
+            </a:extLst>
+          </p:cNvPr>
+          <p:cNvPicPr>
+            <a:picLocks noChangeAspect="1"/>
+          </p:cNvPicPr>
+          <p:nvPr/>
+        </p:nvPicPr>
+        <p:blipFill>
+          <a:blip r:embed="rId3"/>
+          <a:stretch>
+            <a:fillRect/>
+          </a:stretch>
+        </p:blipFill>
+        <p:spPr>
+          <a:xfrm>
+            <a:off x="378499" y="4163276"/>
+            <a:ext cx="5058481" cy="1457528"/>
+          </a:xfrm>
+          <a:prstGeom prst="rect">
+            <a:avLst/>
+          </a:prstGeom>
+        </p:spPr>
+      </p:pic>
     </p:spTree>
     <p:extLst>
       <p:ext uri="{BB962C8B-B14F-4D97-AF65-F5344CB8AC3E}">
@@ -32794,15 +32849,7 @@
           <a:p>
             <a:r>
               <a:rPr lang="en-US" sz="3200" dirty="0"/>
-              <a:t>5. Text Representation: Word </a:t>
-            </a:r>
-            <a:r>
-              <a:rPr lang="en-US" sz="3200" dirty="0" err="1"/>
-              <a:t>embeddings</a:t>
-            </a:r>
-            <a:r>
-              <a:rPr lang="en-US" sz="3200" dirty="0"/>
-              <a:t>, Word2Vec Architecture</a:t>
+              <a:t>5. Text Representation: Word Embeddings, Word2Vec Architecture</a:t>
             </a:r>
           </a:p>
         </p:txBody>
@@ -33132,15 +33179,7 @@
           <a:p>
             <a:r>
               <a:rPr lang="en-US" sz="3200" dirty="0"/>
-              <a:t>5. Text Representation: Word </a:t>
-            </a:r>
-            <a:r>
-              <a:rPr lang="en-US" sz="3200" dirty="0" err="1"/>
-              <a:t>embeddings</a:t>
-            </a:r>
-            <a:r>
-              <a:rPr lang="en-US" sz="3200"/>
-              <a:t> (</a:t>
+              <a:t>5. Text Representation: Word Embeddings (</a:t>
             </a:r>
             <a:r>
               <a:rPr lang="en-US" sz="3200" b="1" dirty="0"/>
@@ -33765,7 +33804,7 @@
           <p:nvPr>
             <p:extLst>
               <p:ext uri="{D42A27DB-BD31-4B8C-83A1-F6EECF244321}">
-                <p14:modId xmlns:p14="http://schemas.microsoft.com/office/powerpoint/2010/main" val="2646585671"/>
+                <p14:modId xmlns:p14="http://schemas.microsoft.com/office/powerpoint/2010/main" val="1259644293"/>
               </p:ext>
             </p:extLst>
           </p:nvPr>
